--- a/AI漫剧制作课程/PPT课件/模块16-合规规范.pptx
+++ b/AI漫剧制作课程/PPT课件/模块16-合规规范.pptx
@@ -3095,7 +3095,7 @@
     <p:bg>
       <p:bgPr>
         <a:solidFill>
-          <a:srgbClr val="0B1120"/>
+          <a:srgbClr val="0A0E1A"/>
         </a:solidFill>
         <a:effectLst/>
       </p:bgPr>
@@ -3116,13 +3116,13 @@
         <p:spPr>
           <a:xfrm>
             <a:off x="0" y="0"/>
-            <a:ext cx="5029200" cy="6858000"/>
-          </a:xfrm>
-          <a:prstGeom prst="rect">
-            <a:avLst/>
-          </a:prstGeom>
-          <a:solidFill>
-            <a:srgbClr val="EF4444"/>
+            <a:ext cx="4754880" cy="6858000"/>
+          </a:xfrm>
+          <a:prstGeom prst="rect">
+            <a:avLst/>
+          </a:prstGeom>
+          <a:solidFill>
+            <a:srgbClr val="F43F5E"/>
           </a:solidFill>
           <a:ln>
             <a:noFill/>
@@ -3159,13 +3159,13 @@
         <p:spPr>
           <a:xfrm>
             <a:off x="0" y="0"/>
-            <a:ext cx="5029200" cy="109728"/>
-          </a:xfrm>
-          <a:prstGeom prst="rect">
-            <a:avLst/>
-          </a:prstGeom>
-          <a:solidFill>
-            <a:srgbClr val="FFFFFF"/>
+            <a:ext cx="4754880" cy="25400"/>
+          </a:xfrm>
+          <a:prstGeom prst="rect">
+            <a:avLst/>
+          </a:prstGeom>
+          <a:solidFill>
+            <a:srgbClr val="F0F4FC"/>
           </a:solidFill>
           <a:ln>
             <a:noFill/>
@@ -3202,13 +3202,13 @@
         <p:spPr>
           <a:xfrm>
             <a:off x="0" y="0"/>
-            <a:ext cx="109728" cy="6858000"/>
-          </a:xfrm>
-          <a:prstGeom prst="rect">
-            <a:avLst/>
-          </a:prstGeom>
-          <a:solidFill>
-            <a:srgbClr val="FFFFFF"/>
+            <a:ext cx="25400" cy="6858000"/>
+          </a:xfrm>
+          <a:prstGeom prst="rect">
+            <a:avLst/>
+          </a:prstGeom>
+          <a:solidFill>
+            <a:srgbClr val="F0F4FC"/>
           </a:solidFill>
           <a:ln>
             <a:noFill/>
@@ -3244,8 +3244,8 @@
         </p:nvSpPr>
         <p:spPr>
           <a:xfrm>
-            <a:off x="457200" y="1371600"/>
-            <a:ext cx="4114800" cy="2286000"/>
+            <a:off x="548640" y="1097280"/>
+            <a:ext cx="3657600" cy="2560320"/>
           </a:xfrm>
           <a:prstGeom prst="rect">
             <a:avLst/>
@@ -3259,9 +3259,9 @@
           <a:lstStyle/>
           <a:p>
             <a:pPr algn="l">
-              <a:defRPr sz="14000" b="1">
+              <a:defRPr sz="12000" b="1">
                 <a:solidFill>
-                  <a:srgbClr val="FFFFFF"/>
+                  <a:srgbClr val="F0F4FC"/>
                 </a:solidFill>
                 <a:latin typeface="Microsoft YaHei"/>
               </a:defRPr>
@@ -3280,8 +3280,8 @@
         </p:nvSpPr>
         <p:spPr>
           <a:xfrm>
-            <a:off x="548640" y="3657600"/>
-            <a:ext cx="3657600" cy="457200"/>
+            <a:off x="640080" y="3474720"/>
+            <a:ext cx="2743200" cy="365760"/>
           </a:xfrm>
           <a:prstGeom prst="rect">
             <a:avLst/>
@@ -3295,9 +3295,9 @@
           <a:lstStyle/>
           <a:p>
             <a:pPr algn="l">
-              <a:defRPr sz="1400" b="0">
+              <a:defRPr sz="1200" b="0">
                 <a:solidFill>
-                  <a:srgbClr val="FFFFFF"/>
+                  <a:srgbClr val="F0F4FC"/>
                 </a:solidFill>
                 <a:latin typeface="Microsoft YaHei"/>
               </a:defRPr>
@@ -3310,20 +3310,20 @@
       </p:sp>
       <p:sp>
         <p:nvSpPr>
-          <p:cNvPr id="7" name="Rounded Rectangle 6"/>
-          <p:cNvSpPr/>
-          <p:nvPr/>
-        </p:nvSpPr>
-        <p:spPr>
-          <a:xfrm>
-            <a:off x="5669280" y="1371600"/>
-            <a:ext cx="5943600" cy="457200"/>
-          </a:xfrm>
-          <a:prstGeom prst="roundRect">
-            <a:avLst/>
-          </a:prstGeom>
-          <a:solidFill>
-            <a:srgbClr val="EF4444"/>
+          <p:cNvPr id="7" name="Rectangle 6"/>
+          <p:cNvSpPr/>
+          <p:nvPr/>
+        </p:nvSpPr>
+        <p:spPr>
+          <a:xfrm>
+            <a:off x="640080" y="3931920"/>
+            <a:ext cx="1371600" cy="19050"/>
+          </a:xfrm>
+          <a:prstGeom prst="rect">
+            <a:avLst/>
+          </a:prstGeom>
+          <a:solidFill>
+            <a:srgbClr val="F0F4FC"/>
           </a:solidFill>
           <a:ln>
             <a:noFill/>
@@ -3353,14 +3353,57 @@
       </p:sp>
       <p:sp>
         <p:nvSpPr>
-          <p:cNvPr id="8" name="TextBox 7"/>
+          <p:cNvPr id="8" name="Rounded Rectangle 7"/>
+          <p:cNvSpPr/>
+          <p:nvPr/>
+        </p:nvSpPr>
+        <p:spPr>
+          <a:xfrm>
+            <a:off x="5486400" y="1371600"/>
+            <a:ext cx="5943600" cy="411480"/>
+          </a:xfrm>
+          <a:prstGeom prst="roundRect">
+            <a:avLst/>
+          </a:prstGeom>
+          <a:solidFill>
+            <a:srgbClr val="F43F5E"/>
+          </a:solidFill>
+          <a:ln>
+            <a:noFill/>
+          </a:ln>
+        </p:spPr>
+        <p:style>
+          <a:lnRef idx="1">
+            <a:schemeClr val="accent1"/>
+          </a:lnRef>
+          <a:fillRef idx="3">
+            <a:schemeClr val="accent1"/>
+          </a:fillRef>
+          <a:effectRef idx="2">
+            <a:schemeClr val="accent1"/>
+          </a:effectRef>
+          <a:fontRef idx="minor">
+            <a:schemeClr val="lt1"/>
+          </a:fontRef>
+        </p:style>
+        <p:txBody>
+          <a:bodyPr rtlCol="0" anchor="ctr"/>
+          <a:lstStyle/>
+          <a:p>
+            <a:pPr algn="ctr"/>
+          </a:p>
+        </p:txBody>
+      </p:sp>
+      <p:sp>
+        <p:nvSpPr>
+          <p:cNvPr id="9" name="TextBox 8"/>
           <p:cNvSpPr txBox="1"/>
           <p:nvPr/>
         </p:nvSpPr>
         <p:spPr>
           <a:xfrm>
-            <a:off x="5852160" y="1371600"/>
-            <a:ext cx="5486400" cy="457200"/>
+            <a:off x="5669280" y="1371600"/>
+            <a:ext cx="5577840" cy="411480"/>
           </a:xfrm>
           <a:prstGeom prst="rect">
             <a:avLst/>
@@ -3374,9 +3417,9 @@
           <a:lstStyle/>
           <a:p>
             <a:pPr algn="ctr">
-              <a:defRPr sz="1200" b="0">
+              <a:defRPr sz="1100" b="0">
                 <a:solidFill>
-                  <a:srgbClr val="FFFFFF"/>
+                  <a:srgbClr val="F0F4FC"/>
                 </a:solidFill>
                 <a:latin typeface="Microsoft YaHei"/>
               </a:defRPr>
@@ -3389,14 +3432,14 @@
       </p:sp>
       <p:sp>
         <p:nvSpPr>
-          <p:cNvPr id="9" name="TextBox 8"/>
+          <p:cNvPr id="10" name="TextBox 9"/>
           <p:cNvSpPr txBox="1"/>
           <p:nvPr/>
         </p:nvSpPr>
         <p:spPr>
           <a:xfrm>
-            <a:off x="5669280" y="2286000"/>
-            <a:ext cx="5943600" cy="1645920"/>
+            <a:off x="5486400" y="2377440"/>
+            <a:ext cx="5943600" cy="1463040"/>
           </a:xfrm>
           <a:prstGeom prst="rect">
             <a:avLst/>
@@ -3410,9 +3453,9 @@
           <a:lstStyle/>
           <a:p>
             <a:pPr algn="l">
-              <a:defRPr sz="3600" b="1">
+              <a:defRPr sz="4400" b="1">
                 <a:solidFill>
-                  <a:srgbClr val="FFFFFF"/>
+                  <a:srgbClr val="F0F4FC"/>
                 </a:solidFill>
                 <a:latin typeface="Microsoft YaHei"/>
               </a:defRPr>
@@ -3425,20 +3468,20 @@
       </p:sp>
       <p:sp>
         <p:nvSpPr>
-          <p:cNvPr id="10" name="Rectangle 9"/>
-          <p:cNvSpPr/>
-          <p:nvPr/>
-        </p:nvSpPr>
-        <p:spPr>
-          <a:xfrm>
-            <a:off x="5669280" y="4023360"/>
-            <a:ext cx="2743200" cy="38100"/>
-          </a:xfrm>
-          <a:prstGeom prst="rect">
-            <a:avLst/>
-          </a:prstGeom>
-          <a:solidFill>
-            <a:srgbClr val="EF4444"/>
+          <p:cNvPr id="11" name="Rectangle 10"/>
+          <p:cNvSpPr/>
+          <p:nvPr/>
+        </p:nvSpPr>
+        <p:spPr>
+          <a:xfrm>
+            <a:off x="5486400" y="4023360"/>
+            <a:ext cx="2286000" cy="38100"/>
+          </a:xfrm>
+          <a:prstGeom prst="rect">
+            <a:avLst/>
+          </a:prstGeom>
+          <a:solidFill>
+            <a:srgbClr val="F43F5E"/>
           </a:solidFill>
           <a:ln>
             <a:noFill/>
@@ -3468,14 +3511,14 @@
       </p:sp>
       <p:sp>
         <p:nvSpPr>
-          <p:cNvPr id="11" name="TextBox 10"/>
+          <p:cNvPr id="12" name="TextBox 11"/>
           <p:cNvSpPr txBox="1"/>
           <p:nvPr/>
         </p:nvSpPr>
         <p:spPr>
           <a:xfrm>
-            <a:off x="5669280" y="4389120"/>
-            <a:ext cx="5943600" cy="914400"/>
+            <a:off x="5486400" y="4389120"/>
+            <a:ext cx="5943600" cy="731520"/>
           </a:xfrm>
           <a:prstGeom prst="rect">
             <a:avLst/>
@@ -3489,9 +3532,9 @@
           <a:lstStyle/>
           <a:p>
             <a:pPr algn="l">
-              <a:defRPr sz="1800" b="0">
+              <a:defRPr sz="1600" b="0">
                 <a:solidFill>
-                  <a:srgbClr val="CBD5E8"/>
+                  <a:srgbClr val="A0AEC4"/>
                 </a:solidFill>
                 <a:latin typeface="Microsoft YaHei"/>
               </a:defRPr>
@@ -3504,20 +3547,20 @@
       </p:sp>
       <p:sp>
         <p:nvSpPr>
-          <p:cNvPr id="12" name="Rectangle 11"/>
-          <p:cNvSpPr/>
-          <p:nvPr/>
-        </p:nvSpPr>
-        <p:spPr>
-          <a:xfrm>
-            <a:off x="5669280" y="5669280"/>
-            <a:ext cx="5943600" cy="640080"/>
-          </a:xfrm>
-          <a:prstGeom prst="rect">
-            <a:avLst/>
-          </a:prstGeom>
-          <a:solidFill>
-            <a:srgbClr val="141E33"/>
+          <p:cNvPr id="13" name="Rectangle 12"/>
+          <p:cNvSpPr/>
+          <p:nvPr/>
+        </p:nvSpPr>
+        <p:spPr>
+          <a:xfrm>
+            <a:off x="5486400" y="5486400"/>
+            <a:ext cx="5943600" cy="594360"/>
+          </a:xfrm>
+          <a:prstGeom prst="rect">
+            <a:avLst/>
+          </a:prstGeom>
+          <a:solidFill>
+            <a:srgbClr val="161F35"/>
           </a:solidFill>
           <a:ln>
             <a:noFill/>
@@ -3547,14 +3590,14 @@
       </p:sp>
       <p:sp>
         <p:nvSpPr>
-          <p:cNvPr id="13" name="TextBox 12"/>
+          <p:cNvPr id="14" name="TextBox 13"/>
           <p:cNvSpPr txBox="1"/>
           <p:nvPr/>
         </p:nvSpPr>
         <p:spPr>
           <a:xfrm>
-            <a:off x="5852160" y="5715000"/>
-            <a:ext cx="1371600" cy="548640"/>
+            <a:off x="5669280" y="5532120"/>
+            <a:ext cx="1280160" cy="502920"/>
           </a:xfrm>
           <a:prstGeom prst="rect">
             <a:avLst/>
@@ -3568,9 +3611,9 @@
           <a:lstStyle/>
           <a:p>
             <a:pPr algn="ctr">
-              <a:defRPr sz="1200" b="1">
+              <a:defRPr sz="1100" b="1">
                 <a:solidFill>
-                  <a:srgbClr val="EF4444"/>
+                  <a:srgbClr val="F43F5E"/>
                 </a:solidFill>
                 <a:latin typeface="Microsoft YaHei"/>
               </a:defRPr>
@@ -3583,14 +3626,14 @@
       </p:sp>
       <p:sp>
         <p:nvSpPr>
-          <p:cNvPr id="14" name="TextBox 13"/>
+          <p:cNvPr id="15" name="TextBox 14"/>
           <p:cNvSpPr txBox="1"/>
           <p:nvPr/>
         </p:nvSpPr>
         <p:spPr>
           <a:xfrm>
-            <a:off x="7315200" y="5715000"/>
-            <a:ext cx="1371600" cy="548640"/>
+            <a:off x="7132320" y="5532120"/>
+            <a:ext cx="1280160" cy="502920"/>
           </a:xfrm>
           <a:prstGeom prst="rect">
             <a:avLst/>
@@ -3604,9 +3647,9 @@
           <a:lstStyle/>
           <a:p>
             <a:pPr algn="ctr">
-              <a:defRPr sz="1200" b="1">
+              <a:defRPr sz="1100" b="1">
                 <a:solidFill>
-                  <a:srgbClr val="EF4444"/>
+                  <a:srgbClr val="F43F5E"/>
                 </a:solidFill>
                 <a:latin typeface="Microsoft YaHei"/>
               </a:defRPr>
@@ -3619,14 +3662,14 @@
       </p:sp>
       <p:sp>
         <p:nvSpPr>
-          <p:cNvPr id="15" name="TextBox 14"/>
+          <p:cNvPr id="16" name="TextBox 15"/>
           <p:cNvSpPr txBox="1"/>
           <p:nvPr/>
         </p:nvSpPr>
         <p:spPr>
           <a:xfrm>
-            <a:off x="8778240" y="5715000"/>
-            <a:ext cx="1371600" cy="548640"/>
+            <a:off x="8595360" y="5532120"/>
+            <a:ext cx="1280160" cy="502920"/>
           </a:xfrm>
           <a:prstGeom prst="rect">
             <a:avLst/>
@@ -3640,9 +3683,9 @@
           <a:lstStyle/>
           <a:p>
             <a:pPr algn="ctr">
-              <a:defRPr sz="1200" b="1">
+              <a:defRPr sz="1100" b="1">
                 <a:solidFill>
-                  <a:srgbClr val="EF4444"/>
+                  <a:srgbClr val="F43F5E"/>
                 </a:solidFill>
                 <a:latin typeface="Microsoft YaHei"/>
               </a:defRPr>
@@ -3655,14 +3698,14 @@
       </p:sp>
       <p:sp>
         <p:nvSpPr>
-          <p:cNvPr id="16" name="TextBox 15"/>
+          <p:cNvPr id="17" name="TextBox 16"/>
           <p:cNvSpPr txBox="1"/>
           <p:nvPr/>
         </p:nvSpPr>
         <p:spPr>
           <a:xfrm>
-            <a:off x="10241280" y="5715000"/>
-            <a:ext cx="1371600" cy="548640"/>
+            <a:off x="10058400" y="5532120"/>
+            <a:ext cx="1280160" cy="502920"/>
           </a:xfrm>
           <a:prstGeom prst="rect">
             <a:avLst/>
@@ -3676,9 +3719,9 @@
           <a:lstStyle/>
           <a:p>
             <a:pPr algn="ctr">
-              <a:defRPr sz="1200" b="1">
+              <a:defRPr sz="1100" b="1">
                 <a:solidFill>
-                  <a:srgbClr val="EF4444"/>
+                  <a:srgbClr val="F43F5E"/>
                 </a:solidFill>
                 <a:latin typeface="Microsoft YaHei"/>
               </a:defRPr>
@@ -3703,7 +3746,7 @@
     <p:bg>
       <p:bgPr>
         <a:solidFill>
-          <a:srgbClr val="0B1120"/>
+          <a:srgbClr val="0A0E1A"/>
         </a:solidFill>
         <a:effectLst/>
       </p:bgPr>
@@ -3724,13 +3767,13 @@
         <p:spPr>
           <a:xfrm>
             <a:off x="0" y="0"/>
-            <a:ext cx="12191695" cy="1051560"/>
-          </a:xfrm>
-          <a:prstGeom prst="rect">
-            <a:avLst/>
-          </a:prstGeom>
-          <a:solidFill>
-            <a:srgbClr val="141E33"/>
+            <a:ext cx="12191695" cy="38100"/>
+          </a:xfrm>
+          <a:prstGeom prst="rect">
+            <a:avLst/>
+          </a:prstGeom>
+          <a:solidFill>
+            <a:srgbClr val="F43F5E"/>
           </a:solidFill>
           <a:ln>
             <a:noFill/>
@@ -3766,14 +3809,14 @@
         </p:nvSpPr>
         <p:spPr>
           <a:xfrm>
-            <a:off x="0" y="0"/>
-            <a:ext cx="109728" cy="1051560"/>
-          </a:xfrm>
-          <a:prstGeom prst="rect">
-            <a:avLst/>
-          </a:prstGeom>
-          <a:solidFill>
-            <a:srgbClr val="EF4444"/>
+            <a:off x="0" y="38100"/>
+            <a:ext cx="12191695" cy="914400"/>
+          </a:xfrm>
+          <a:prstGeom prst="rect">
+            <a:avLst/>
+          </a:prstGeom>
+          <a:solidFill>
+            <a:srgbClr val="161F35"/>
           </a:solidFill>
           <a:ln>
             <a:noFill/>
@@ -3803,14 +3846,57 @@
       </p:sp>
       <p:sp>
         <p:nvSpPr>
-          <p:cNvPr id="4" name="TextBox 3"/>
+          <p:cNvPr id="4" name="Rectangle 3"/>
+          <p:cNvSpPr/>
+          <p:nvPr/>
+        </p:nvSpPr>
+        <p:spPr>
+          <a:xfrm>
+            <a:off x="0" y="38100"/>
+            <a:ext cx="91440" cy="914400"/>
+          </a:xfrm>
+          <a:prstGeom prst="rect">
+            <a:avLst/>
+          </a:prstGeom>
+          <a:solidFill>
+            <a:srgbClr val="F43F5E"/>
+          </a:solidFill>
+          <a:ln>
+            <a:noFill/>
+          </a:ln>
+        </p:spPr>
+        <p:style>
+          <a:lnRef idx="1">
+            <a:schemeClr val="accent1"/>
+          </a:lnRef>
+          <a:fillRef idx="3">
+            <a:schemeClr val="accent1"/>
+          </a:fillRef>
+          <a:effectRef idx="2">
+            <a:schemeClr val="accent1"/>
+          </a:effectRef>
+          <a:fontRef idx="minor">
+            <a:schemeClr val="lt1"/>
+          </a:fontRef>
+        </p:style>
+        <p:txBody>
+          <a:bodyPr rtlCol="0" anchor="ctr"/>
+          <a:lstStyle/>
+          <a:p>
+            <a:pPr algn="ctr"/>
+          </a:p>
+        </p:txBody>
+      </p:sp>
+      <p:sp>
+        <p:nvSpPr>
+          <p:cNvPr id="5" name="TextBox 4"/>
           <p:cNvSpPr txBox="1"/>
           <p:nvPr/>
         </p:nvSpPr>
         <p:spPr>
           <a:xfrm>
-            <a:off x="548640" y="182880"/>
-            <a:ext cx="10058400" cy="640080"/>
+            <a:off x="731520" y="137160"/>
+            <a:ext cx="10728655" cy="640080"/>
           </a:xfrm>
           <a:prstGeom prst="rect">
             <a:avLst/>
@@ -3824,9 +3910,9 @@
           <a:lstStyle/>
           <a:p>
             <a:pPr algn="l">
-              <a:defRPr sz="2600" b="1">
+              <a:defRPr sz="2400" b="1">
                 <a:solidFill>
-                  <a:srgbClr val="FFFFFF"/>
+                  <a:srgbClr val="F0F4FC"/>
                 </a:solidFill>
                 <a:latin typeface="Microsoft YaHei"/>
               </a:defRPr>
@@ -3839,20 +3925,20 @@
       </p:sp>
       <p:sp>
         <p:nvSpPr>
-          <p:cNvPr id="5" name="Rectangle 4"/>
-          <p:cNvSpPr/>
-          <p:nvPr/>
-        </p:nvSpPr>
-        <p:spPr>
-          <a:xfrm>
-            <a:off x="0" y="1051560"/>
-            <a:ext cx="12191695" cy="25400"/>
-          </a:xfrm>
-          <a:prstGeom prst="rect">
-            <a:avLst/>
-          </a:prstGeom>
-          <a:solidFill>
-            <a:srgbClr val="EF4444"/>
+          <p:cNvPr id="6" name="Rectangle 5"/>
+          <p:cNvSpPr/>
+          <p:nvPr/>
+        </p:nvSpPr>
+        <p:spPr>
+          <a:xfrm>
+            <a:off x="0" y="1078992"/>
+            <a:ext cx="12191695" cy="12700"/>
+          </a:xfrm>
+          <a:prstGeom prst="rect">
+            <a:avLst/>
+          </a:prstGeom>
+          <a:solidFill>
+            <a:srgbClr val="253350"/>
           </a:solidFill>
           <a:ln>
             <a:noFill/>
@@ -3882,20 +3968,20 @@
       </p:sp>
       <p:sp>
         <p:nvSpPr>
-          <p:cNvPr id="6" name="Rounded Rectangle 5"/>
-          <p:cNvSpPr/>
-          <p:nvPr/>
-        </p:nvSpPr>
-        <p:spPr>
-          <a:xfrm>
-            <a:off x="457200" y="1325880"/>
-            <a:ext cx="11247120" cy="731520"/>
+          <p:cNvPr id="7" name="Rounded Rectangle 6"/>
+          <p:cNvSpPr/>
+          <p:nvPr/>
+        </p:nvSpPr>
+        <p:spPr>
+          <a:xfrm>
+            <a:off x="457200" y="1280160"/>
+            <a:ext cx="11247120" cy="685800"/>
           </a:xfrm>
           <a:prstGeom prst="roundRect">
             <a:avLst/>
           </a:prstGeom>
           <a:solidFill>
-            <a:srgbClr val="141E33"/>
+            <a:srgbClr val="161F35"/>
           </a:solidFill>
           <a:ln>
             <a:noFill/>
@@ -3925,20 +4011,20 @@
       </p:sp>
       <p:sp>
         <p:nvSpPr>
-          <p:cNvPr id="7" name="Rectangle 6"/>
-          <p:cNvSpPr/>
-          <p:nvPr/>
-        </p:nvSpPr>
-        <p:spPr>
-          <a:xfrm>
-            <a:off x="457200" y="1325880"/>
-            <a:ext cx="73152" cy="731520"/>
-          </a:xfrm>
-          <a:prstGeom prst="rect">
-            <a:avLst/>
-          </a:prstGeom>
-          <a:solidFill>
-            <a:srgbClr val="EF4444"/>
+          <p:cNvPr id="8" name="Rectangle 7"/>
+          <p:cNvSpPr/>
+          <p:nvPr/>
+        </p:nvSpPr>
+        <p:spPr>
+          <a:xfrm>
+            <a:off x="457200" y="1280160"/>
+            <a:ext cx="54864" cy="685800"/>
+          </a:xfrm>
+          <a:prstGeom prst="rect">
+            <a:avLst/>
+          </a:prstGeom>
+          <a:solidFill>
+            <a:srgbClr val="F43F5E"/>
           </a:solidFill>
           <a:ln>
             <a:noFill/>
@@ -3968,20 +4054,20 @@
       </p:sp>
       <p:sp>
         <p:nvSpPr>
-          <p:cNvPr id="8" name="Oval 7"/>
-          <p:cNvSpPr/>
-          <p:nvPr/>
-        </p:nvSpPr>
-        <p:spPr>
-          <a:xfrm>
-            <a:off x="731520" y="1490472"/>
-            <a:ext cx="365760" cy="365760"/>
+          <p:cNvPr id="9" name="Oval 8"/>
+          <p:cNvSpPr/>
+          <p:nvPr/>
+        </p:nvSpPr>
+        <p:spPr>
+          <a:xfrm>
+            <a:off x="685800" y="1463040"/>
+            <a:ext cx="320040" cy="320040"/>
           </a:xfrm>
           <a:prstGeom prst="ellipse">
             <a:avLst/>
           </a:prstGeom>
           <a:solidFill>
-            <a:srgbClr val="EF4444"/>
+            <a:srgbClr val="F43F5E"/>
           </a:solidFill>
           <a:ln>
             <a:noFill/>
@@ -4011,14 +4097,14 @@
       </p:sp>
       <p:sp>
         <p:nvSpPr>
-          <p:cNvPr id="9" name="TextBox 8"/>
+          <p:cNvPr id="10" name="TextBox 9"/>
           <p:cNvSpPr txBox="1"/>
           <p:nvPr/>
         </p:nvSpPr>
         <p:spPr>
           <a:xfrm>
-            <a:off x="731520" y="1490472"/>
-            <a:ext cx="365760" cy="365760"/>
+            <a:off x="685800" y="1463040"/>
+            <a:ext cx="320040" cy="320040"/>
           </a:xfrm>
           <a:prstGeom prst="rect">
             <a:avLst/>
@@ -4032,9 +4118,9 @@
           <a:lstStyle/>
           <a:p>
             <a:pPr algn="ctr">
-              <a:defRPr sz="1100" b="1">
+              <a:defRPr sz="1000" b="1">
                 <a:solidFill>
-                  <a:srgbClr val="FFFFFF"/>
+                  <a:srgbClr val="F0F4FC"/>
                 </a:solidFill>
                 <a:latin typeface="Microsoft YaHei"/>
               </a:defRPr>
@@ -4047,14 +4133,14 @@
       </p:sp>
       <p:sp>
         <p:nvSpPr>
-          <p:cNvPr id="10" name="TextBox 9"/>
+          <p:cNvPr id="11" name="TextBox 10"/>
           <p:cNvSpPr txBox="1"/>
           <p:nvPr/>
         </p:nvSpPr>
         <p:spPr>
           <a:xfrm>
-            <a:off x="1280160" y="1417320"/>
-            <a:ext cx="10058400" cy="548640"/>
+            <a:off x="1188720" y="1440180"/>
+            <a:ext cx="10058400" cy="365760"/>
           </a:xfrm>
           <a:prstGeom prst="rect">
             <a:avLst/>
@@ -4068,9 +4154,9 @@
           <a:lstStyle/>
           <a:p>
             <a:pPr algn="l">
-              <a:defRPr sz="1500" b="0">
+              <a:defRPr sz="1400" b="0">
                 <a:solidFill>
-                  <a:srgbClr val="CBD5E8"/>
+                  <a:srgbClr val="A0AEC4"/>
                 </a:solidFill>
                 <a:latin typeface="Microsoft YaHei"/>
               </a:defRPr>
@@ -4083,20 +4169,20 @@
       </p:sp>
       <p:sp>
         <p:nvSpPr>
-          <p:cNvPr id="11" name="Rounded Rectangle 10"/>
-          <p:cNvSpPr/>
-          <p:nvPr/>
-        </p:nvSpPr>
-        <p:spPr>
-          <a:xfrm>
-            <a:off x="457200" y="2194560"/>
-            <a:ext cx="11247120" cy="731520"/>
+          <p:cNvPr id="12" name="Rounded Rectangle 11"/>
+          <p:cNvSpPr/>
+          <p:nvPr/>
+        </p:nvSpPr>
+        <p:spPr>
+          <a:xfrm>
+            <a:off x="457200" y="2636520"/>
+            <a:ext cx="11247120" cy="685800"/>
           </a:xfrm>
           <a:prstGeom prst="roundRect">
             <a:avLst/>
           </a:prstGeom>
           <a:solidFill>
-            <a:srgbClr val="141E33"/>
+            <a:srgbClr val="161F35"/>
           </a:solidFill>
           <a:ln>
             <a:noFill/>
@@ -4126,20 +4212,20 @@
       </p:sp>
       <p:sp>
         <p:nvSpPr>
-          <p:cNvPr id="12" name="Rectangle 11"/>
-          <p:cNvSpPr/>
-          <p:nvPr/>
-        </p:nvSpPr>
-        <p:spPr>
-          <a:xfrm>
-            <a:off x="457200" y="2194560"/>
-            <a:ext cx="73152" cy="731520"/>
-          </a:xfrm>
-          <a:prstGeom prst="rect">
-            <a:avLst/>
-          </a:prstGeom>
-          <a:solidFill>
-            <a:srgbClr val="EF4444"/>
+          <p:cNvPr id="13" name="Rectangle 12"/>
+          <p:cNvSpPr/>
+          <p:nvPr/>
+        </p:nvSpPr>
+        <p:spPr>
+          <a:xfrm>
+            <a:off x="457200" y="2636520"/>
+            <a:ext cx="54864" cy="685800"/>
+          </a:xfrm>
+          <a:prstGeom prst="rect">
+            <a:avLst/>
+          </a:prstGeom>
+          <a:solidFill>
+            <a:srgbClr val="F43F5E"/>
           </a:solidFill>
           <a:ln>
             <a:noFill/>
@@ -4169,20 +4255,20 @@
       </p:sp>
       <p:sp>
         <p:nvSpPr>
-          <p:cNvPr id="13" name="Oval 12"/>
-          <p:cNvSpPr/>
-          <p:nvPr/>
-        </p:nvSpPr>
-        <p:spPr>
-          <a:xfrm>
-            <a:off x="731520" y="2359152"/>
-            <a:ext cx="365760" cy="365760"/>
+          <p:cNvPr id="14" name="Oval 13"/>
+          <p:cNvSpPr/>
+          <p:nvPr/>
+        </p:nvSpPr>
+        <p:spPr>
+          <a:xfrm>
+            <a:off x="685800" y="2819400"/>
+            <a:ext cx="320040" cy="320040"/>
           </a:xfrm>
           <a:prstGeom prst="ellipse">
             <a:avLst/>
           </a:prstGeom>
           <a:solidFill>
-            <a:srgbClr val="EF4444"/>
+            <a:srgbClr val="F43F5E"/>
           </a:solidFill>
           <a:ln>
             <a:noFill/>
@@ -4212,14 +4298,14 @@
       </p:sp>
       <p:sp>
         <p:nvSpPr>
-          <p:cNvPr id="14" name="TextBox 13"/>
+          <p:cNvPr id="15" name="TextBox 14"/>
           <p:cNvSpPr txBox="1"/>
           <p:nvPr/>
         </p:nvSpPr>
         <p:spPr>
           <a:xfrm>
-            <a:off x="731520" y="2359152"/>
-            <a:ext cx="365760" cy="365760"/>
+            <a:off x="685800" y="2819400"/>
+            <a:ext cx="320040" cy="320040"/>
           </a:xfrm>
           <a:prstGeom prst="rect">
             <a:avLst/>
@@ -4233,9 +4319,9 @@
           <a:lstStyle/>
           <a:p>
             <a:pPr algn="ctr">
-              <a:defRPr sz="1100" b="1">
+              <a:defRPr sz="1000" b="1">
                 <a:solidFill>
-                  <a:srgbClr val="FFFFFF"/>
+                  <a:srgbClr val="F0F4FC"/>
                 </a:solidFill>
                 <a:latin typeface="Microsoft YaHei"/>
               </a:defRPr>
@@ -4248,14 +4334,14 @@
       </p:sp>
       <p:sp>
         <p:nvSpPr>
-          <p:cNvPr id="15" name="TextBox 14"/>
+          <p:cNvPr id="16" name="TextBox 15"/>
           <p:cNvSpPr txBox="1"/>
           <p:nvPr/>
         </p:nvSpPr>
         <p:spPr>
           <a:xfrm>
-            <a:off x="1280160" y="2286000"/>
-            <a:ext cx="10058400" cy="548640"/>
+            <a:off x="1188720" y="2796540"/>
+            <a:ext cx="10058400" cy="365760"/>
           </a:xfrm>
           <a:prstGeom prst="rect">
             <a:avLst/>
@@ -4269,9 +4355,9 @@
           <a:lstStyle/>
           <a:p>
             <a:pPr algn="l">
-              <a:defRPr sz="1500" b="0">
+              <a:defRPr sz="1400" b="0">
                 <a:solidFill>
-                  <a:srgbClr val="CBD5E8"/>
+                  <a:srgbClr val="A0AEC4"/>
                 </a:solidFill>
                 <a:latin typeface="Microsoft YaHei"/>
               </a:defRPr>
@@ -4284,20 +4370,20 @@
       </p:sp>
       <p:sp>
         <p:nvSpPr>
-          <p:cNvPr id="16" name="Rounded Rectangle 15"/>
-          <p:cNvSpPr/>
-          <p:nvPr/>
-        </p:nvSpPr>
-        <p:spPr>
-          <a:xfrm>
-            <a:off x="457200" y="3063240"/>
-            <a:ext cx="11247120" cy="731520"/>
+          <p:cNvPr id="17" name="Rounded Rectangle 16"/>
+          <p:cNvSpPr/>
+          <p:nvPr/>
+        </p:nvSpPr>
+        <p:spPr>
+          <a:xfrm>
+            <a:off x="457200" y="3992880"/>
+            <a:ext cx="11247120" cy="685800"/>
           </a:xfrm>
           <a:prstGeom prst="roundRect">
             <a:avLst/>
           </a:prstGeom>
           <a:solidFill>
-            <a:srgbClr val="141E33"/>
+            <a:srgbClr val="161F35"/>
           </a:solidFill>
           <a:ln>
             <a:noFill/>
@@ -4327,20 +4413,20 @@
       </p:sp>
       <p:sp>
         <p:nvSpPr>
-          <p:cNvPr id="17" name="Rectangle 16"/>
-          <p:cNvSpPr/>
-          <p:nvPr/>
-        </p:nvSpPr>
-        <p:spPr>
-          <a:xfrm>
-            <a:off x="457200" y="3063240"/>
-            <a:ext cx="73152" cy="731520"/>
-          </a:xfrm>
-          <a:prstGeom prst="rect">
-            <a:avLst/>
-          </a:prstGeom>
-          <a:solidFill>
-            <a:srgbClr val="EF4444"/>
+          <p:cNvPr id="18" name="Rectangle 17"/>
+          <p:cNvSpPr/>
+          <p:nvPr/>
+        </p:nvSpPr>
+        <p:spPr>
+          <a:xfrm>
+            <a:off x="457200" y="3992880"/>
+            <a:ext cx="54864" cy="685800"/>
+          </a:xfrm>
+          <a:prstGeom prst="rect">
+            <a:avLst/>
+          </a:prstGeom>
+          <a:solidFill>
+            <a:srgbClr val="F43F5E"/>
           </a:solidFill>
           <a:ln>
             <a:noFill/>
@@ -4370,20 +4456,20 @@
       </p:sp>
       <p:sp>
         <p:nvSpPr>
-          <p:cNvPr id="18" name="Oval 17"/>
-          <p:cNvSpPr/>
-          <p:nvPr/>
-        </p:nvSpPr>
-        <p:spPr>
-          <a:xfrm>
-            <a:off x="731520" y="3227832"/>
-            <a:ext cx="365760" cy="365760"/>
+          <p:cNvPr id="19" name="Oval 18"/>
+          <p:cNvSpPr/>
+          <p:nvPr/>
+        </p:nvSpPr>
+        <p:spPr>
+          <a:xfrm>
+            <a:off x="685800" y="4175760"/>
+            <a:ext cx="320040" cy="320040"/>
           </a:xfrm>
           <a:prstGeom prst="ellipse">
             <a:avLst/>
           </a:prstGeom>
           <a:solidFill>
-            <a:srgbClr val="EF4444"/>
+            <a:srgbClr val="F43F5E"/>
           </a:solidFill>
           <a:ln>
             <a:noFill/>
@@ -4413,14 +4499,14 @@
       </p:sp>
       <p:sp>
         <p:nvSpPr>
-          <p:cNvPr id="19" name="TextBox 18"/>
+          <p:cNvPr id="20" name="TextBox 19"/>
           <p:cNvSpPr txBox="1"/>
           <p:nvPr/>
         </p:nvSpPr>
         <p:spPr>
           <a:xfrm>
-            <a:off x="731520" y="3227832"/>
-            <a:ext cx="365760" cy="365760"/>
+            <a:off x="685800" y="4175760"/>
+            <a:ext cx="320040" cy="320040"/>
           </a:xfrm>
           <a:prstGeom prst="rect">
             <a:avLst/>
@@ -4434,9 +4520,9 @@
           <a:lstStyle/>
           <a:p>
             <a:pPr algn="ctr">
-              <a:defRPr sz="1100" b="1">
+              <a:defRPr sz="1000" b="1">
                 <a:solidFill>
-                  <a:srgbClr val="FFFFFF"/>
+                  <a:srgbClr val="F0F4FC"/>
                 </a:solidFill>
                 <a:latin typeface="Microsoft YaHei"/>
               </a:defRPr>
@@ -4449,14 +4535,14 @@
       </p:sp>
       <p:sp>
         <p:nvSpPr>
-          <p:cNvPr id="20" name="TextBox 19"/>
+          <p:cNvPr id="21" name="TextBox 20"/>
           <p:cNvSpPr txBox="1"/>
           <p:nvPr/>
         </p:nvSpPr>
         <p:spPr>
           <a:xfrm>
-            <a:off x="1280160" y="3154680"/>
-            <a:ext cx="10058400" cy="548640"/>
+            <a:off x="1188720" y="4152900"/>
+            <a:ext cx="10058400" cy="365760"/>
           </a:xfrm>
           <a:prstGeom prst="rect">
             <a:avLst/>
@@ -4470,9 +4556,9 @@
           <a:lstStyle/>
           <a:p>
             <a:pPr algn="l">
-              <a:defRPr sz="1500" b="0">
+              <a:defRPr sz="1400" b="0">
                 <a:solidFill>
-                  <a:srgbClr val="CBD5E8"/>
+                  <a:srgbClr val="A0AEC4"/>
                 </a:solidFill>
                 <a:latin typeface="Microsoft YaHei"/>
               </a:defRPr>
@@ -4485,20 +4571,20 @@
       </p:sp>
       <p:sp>
         <p:nvSpPr>
-          <p:cNvPr id="21" name="Rounded Rectangle 20"/>
-          <p:cNvSpPr/>
-          <p:nvPr/>
-        </p:nvSpPr>
-        <p:spPr>
-          <a:xfrm>
-            <a:off x="457200" y="3931919"/>
-            <a:ext cx="11247120" cy="731520"/>
+          <p:cNvPr id="22" name="Rounded Rectangle 21"/>
+          <p:cNvSpPr/>
+          <p:nvPr/>
+        </p:nvSpPr>
+        <p:spPr>
+          <a:xfrm>
+            <a:off x="457200" y="5349240"/>
+            <a:ext cx="11247120" cy="685800"/>
           </a:xfrm>
           <a:prstGeom prst="roundRect">
             <a:avLst/>
           </a:prstGeom>
           <a:solidFill>
-            <a:srgbClr val="141E33"/>
+            <a:srgbClr val="161F35"/>
           </a:solidFill>
           <a:ln>
             <a:noFill/>
@@ -4528,20 +4614,20 @@
       </p:sp>
       <p:sp>
         <p:nvSpPr>
-          <p:cNvPr id="22" name="Rectangle 21"/>
-          <p:cNvSpPr/>
-          <p:nvPr/>
-        </p:nvSpPr>
-        <p:spPr>
-          <a:xfrm>
-            <a:off x="457200" y="3931919"/>
-            <a:ext cx="73152" cy="731520"/>
-          </a:xfrm>
-          <a:prstGeom prst="rect">
-            <a:avLst/>
-          </a:prstGeom>
-          <a:solidFill>
-            <a:srgbClr val="EF4444"/>
+          <p:cNvPr id="23" name="Rectangle 22"/>
+          <p:cNvSpPr/>
+          <p:nvPr/>
+        </p:nvSpPr>
+        <p:spPr>
+          <a:xfrm>
+            <a:off x="457200" y="5349240"/>
+            <a:ext cx="54864" cy="685800"/>
+          </a:xfrm>
+          <a:prstGeom prst="rect">
+            <a:avLst/>
+          </a:prstGeom>
+          <a:solidFill>
+            <a:srgbClr val="F43F5E"/>
           </a:solidFill>
           <a:ln>
             <a:noFill/>
@@ -4571,20 +4657,20 @@
       </p:sp>
       <p:sp>
         <p:nvSpPr>
-          <p:cNvPr id="23" name="Oval 22"/>
-          <p:cNvSpPr/>
-          <p:nvPr/>
-        </p:nvSpPr>
-        <p:spPr>
-          <a:xfrm>
-            <a:off x="731520" y="4096511"/>
-            <a:ext cx="365760" cy="365760"/>
+          <p:cNvPr id="24" name="Oval 23"/>
+          <p:cNvSpPr/>
+          <p:nvPr/>
+        </p:nvSpPr>
+        <p:spPr>
+          <a:xfrm>
+            <a:off x="685800" y="5532120"/>
+            <a:ext cx="320040" cy="320040"/>
           </a:xfrm>
           <a:prstGeom prst="ellipse">
             <a:avLst/>
           </a:prstGeom>
           <a:solidFill>
-            <a:srgbClr val="EF4444"/>
+            <a:srgbClr val="F43F5E"/>
           </a:solidFill>
           <a:ln>
             <a:noFill/>
@@ -4614,14 +4700,14 @@
       </p:sp>
       <p:sp>
         <p:nvSpPr>
-          <p:cNvPr id="24" name="TextBox 23"/>
+          <p:cNvPr id="25" name="TextBox 24"/>
           <p:cNvSpPr txBox="1"/>
           <p:nvPr/>
         </p:nvSpPr>
         <p:spPr>
           <a:xfrm>
-            <a:off x="731520" y="4096511"/>
-            <a:ext cx="365760" cy="365760"/>
+            <a:off x="685800" y="5532120"/>
+            <a:ext cx="320040" cy="320040"/>
           </a:xfrm>
           <a:prstGeom prst="rect">
             <a:avLst/>
@@ -4635,9 +4721,9 @@
           <a:lstStyle/>
           <a:p>
             <a:pPr algn="ctr">
-              <a:defRPr sz="1100" b="1">
+              <a:defRPr sz="1000" b="1">
                 <a:solidFill>
-                  <a:srgbClr val="FFFFFF"/>
+                  <a:srgbClr val="F0F4FC"/>
                 </a:solidFill>
                 <a:latin typeface="Microsoft YaHei"/>
               </a:defRPr>
@@ -4650,14 +4736,14 @@
       </p:sp>
       <p:sp>
         <p:nvSpPr>
-          <p:cNvPr id="25" name="TextBox 24"/>
+          <p:cNvPr id="26" name="TextBox 25"/>
           <p:cNvSpPr txBox="1"/>
           <p:nvPr/>
         </p:nvSpPr>
         <p:spPr>
           <a:xfrm>
-            <a:off x="1280160" y="4023359"/>
-            <a:ext cx="10058400" cy="548640"/>
+            <a:off x="1188720" y="5509260"/>
+            <a:ext cx="10058400" cy="365760"/>
           </a:xfrm>
           <a:prstGeom prst="rect">
             <a:avLst/>
@@ -4671,9 +4757,9 @@
           <a:lstStyle/>
           <a:p>
             <a:pPr algn="l">
-              <a:defRPr sz="1500" b="0">
+              <a:defRPr sz="1400" b="0">
                 <a:solidFill>
-                  <a:srgbClr val="CBD5E8"/>
+                  <a:srgbClr val="A0AEC4"/>
                 </a:solidFill>
                 <a:latin typeface="Microsoft YaHei"/>
               </a:defRPr>
@@ -4686,20 +4772,20 @@
       </p:sp>
       <p:sp>
         <p:nvSpPr>
-          <p:cNvPr id="26" name="Rectangle 25"/>
+          <p:cNvPr id="27" name="Rectangle 26"/>
           <p:cNvSpPr/>
           <p:nvPr/>
         </p:nvSpPr>
         <p:spPr>
           <a:xfrm>
             <a:off x="0" y="6446520"/>
-            <a:ext cx="12191695" cy="19050"/>
-          </a:xfrm>
-          <a:prstGeom prst="rect">
-            <a:avLst/>
-          </a:prstGeom>
-          <a:solidFill>
-            <a:srgbClr val="2D3B55"/>
+            <a:ext cx="12191695" cy="12700"/>
+          </a:xfrm>
+          <a:prstGeom prst="rect">
+            <a:avLst/>
+          </a:prstGeom>
+          <a:solidFill>
+            <a:srgbClr val="253350"/>
           </a:solidFill>
           <a:ln>
             <a:noFill/>
@@ -4729,14 +4815,14 @@
       </p:sp>
       <p:sp>
         <p:nvSpPr>
-          <p:cNvPr id="27" name="TextBox 26"/>
+          <p:cNvPr id="28" name="TextBox 27"/>
           <p:cNvSpPr txBox="1"/>
           <p:nvPr/>
         </p:nvSpPr>
         <p:spPr>
           <a:xfrm>
-            <a:off x="457200" y="6492240"/>
-            <a:ext cx="5486400" cy="274320"/>
+            <a:off x="731520" y="6492240"/>
+            <a:ext cx="4572000" cy="274320"/>
           </a:xfrm>
           <a:prstGeom prst="rect">
             <a:avLst/>
@@ -4752,20 +4838,20 @@
             <a:pPr algn="l">
               <a:defRPr sz="900" b="0">
                 <a:solidFill>
-                  <a:srgbClr val="6B7B9E"/>
+                  <a:srgbClr val="607090"/>
                 </a:solidFill>
                 <a:latin typeface="Microsoft YaHei"/>
               </a:defRPr>
             </a:pPr>
             <a:r>
-              <a:t>模块16：合规规范</a:t>
-            </a:r>
-          </a:p>
-        </p:txBody>
-      </p:sp>
-      <p:sp>
-        <p:nvSpPr>
-          <p:cNvPr id="28" name="TextBox 27"/>
+              <a:t>模块16 · 合规规范</a:t>
+            </a:r>
+          </a:p>
+        </p:txBody>
+      </p:sp>
+      <p:sp>
+        <p:nvSpPr>
+          <p:cNvPr id="29" name="TextBox 28"/>
           <p:cNvSpPr txBox="1"/>
           <p:nvPr/>
         </p:nvSpPr>
@@ -4788,7 +4874,7 @@
             <a:pPr algn="r">
               <a:defRPr sz="900" b="0">
                 <a:solidFill>
-                  <a:srgbClr val="6B7B9E"/>
+                  <a:srgbClr val="607090"/>
                 </a:solidFill>
                 <a:latin typeface="Microsoft YaHei"/>
               </a:defRPr>
@@ -4813,7 +4899,7 @@
     <p:bg>
       <p:bgPr>
         <a:solidFill>
-          <a:srgbClr val="0B1120"/>
+          <a:srgbClr val="0A0E1A"/>
         </a:solidFill>
         <a:effectLst/>
       </p:bgPr>
@@ -4834,13 +4920,13 @@
         <p:spPr>
           <a:xfrm>
             <a:off x="0" y="0"/>
-            <a:ext cx="12191695" cy="1051560"/>
-          </a:xfrm>
-          <a:prstGeom prst="rect">
-            <a:avLst/>
-          </a:prstGeom>
-          <a:solidFill>
-            <a:srgbClr val="141E33"/>
+            <a:ext cx="12191695" cy="38100"/>
+          </a:xfrm>
+          <a:prstGeom prst="rect">
+            <a:avLst/>
+          </a:prstGeom>
+          <a:solidFill>
+            <a:srgbClr val="10B981"/>
           </a:solidFill>
           <a:ln>
             <a:noFill/>
@@ -4876,14 +4962,14 @@
         </p:nvSpPr>
         <p:spPr>
           <a:xfrm>
-            <a:off x="0" y="0"/>
-            <a:ext cx="109728" cy="1051560"/>
-          </a:xfrm>
-          <a:prstGeom prst="rect">
-            <a:avLst/>
-          </a:prstGeom>
-          <a:solidFill>
-            <a:srgbClr val="10B981"/>
+            <a:off x="0" y="38100"/>
+            <a:ext cx="12191695" cy="914400"/>
+          </a:xfrm>
+          <a:prstGeom prst="rect">
+            <a:avLst/>
+          </a:prstGeom>
+          <a:solidFill>
+            <a:srgbClr val="161F35"/>
           </a:solidFill>
           <a:ln>
             <a:noFill/>
@@ -4913,14 +4999,57 @@
       </p:sp>
       <p:sp>
         <p:nvSpPr>
-          <p:cNvPr id="4" name="TextBox 3"/>
+          <p:cNvPr id="4" name="Rectangle 3"/>
+          <p:cNvSpPr/>
+          <p:nvPr/>
+        </p:nvSpPr>
+        <p:spPr>
+          <a:xfrm>
+            <a:off x="0" y="38100"/>
+            <a:ext cx="91440" cy="914400"/>
+          </a:xfrm>
+          <a:prstGeom prst="rect">
+            <a:avLst/>
+          </a:prstGeom>
+          <a:solidFill>
+            <a:srgbClr val="10B981"/>
+          </a:solidFill>
+          <a:ln>
+            <a:noFill/>
+          </a:ln>
+        </p:spPr>
+        <p:style>
+          <a:lnRef idx="1">
+            <a:schemeClr val="accent1"/>
+          </a:lnRef>
+          <a:fillRef idx="3">
+            <a:schemeClr val="accent1"/>
+          </a:fillRef>
+          <a:effectRef idx="2">
+            <a:schemeClr val="accent1"/>
+          </a:effectRef>
+          <a:fontRef idx="minor">
+            <a:schemeClr val="lt1"/>
+          </a:fontRef>
+        </p:style>
+        <p:txBody>
+          <a:bodyPr rtlCol="0" anchor="ctr"/>
+          <a:lstStyle/>
+          <a:p>
+            <a:pPr algn="ctr"/>
+          </a:p>
+        </p:txBody>
+      </p:sp>
+      <p:sp>
+        <p:nvSpPr>
+          <p:cNvPr id="5" name="TextBox 4"/>
           <p:cNvSpPr txBox="1"/>
           <p:nvPr/>
         </p:nvSpPr>
         <p:spPr>
           <a:xfrm>
-            <a:off x="548640" y="182880"/>
-            <a:ext cx="10058400" cy="640080"/>
+            <a:off x="731520" y="137160"/>
+            <a:ext cx="10728655" cy="640080"/>
           </a:xfrm>
           <a:prstGeom prst="rect">
             <a:avLst/>
@@ -4934,9 +5063,9 @@
           <a:lstStyle/>
           <a:p>
             <a:pPr algn="l">
-              <a:defRPr sz="2600" b="1">
+              <a:defRPr sz="2400" b="1">
                 <a:solidFill>
-                  <a:srgbClr val="FFFFFF"/>
+                  <a:srgbClr val="F0F4FC"/>
                 </a:solidFill>
                 <a:latin typeface="Microsoft YaHei"/>
               </a:defRPr>
@@ -4949,20 +5078,20 @@
       </p:sp>
       <p:sp>
         <p:nvSpPr>
-          <p:cNvPr id="5" name="Rectangle 4"/>
-          <p:cNvSpPr/>
-          <p:nvPr/>
-        </p:nvSpPr>
-        <p:spPr>
-          <a:xfrm>
-            <a:off x="0" y="1051560"/>
-            <a:ext cx="12191695" cy="25400"/>
-          </a:xfrm>
-          <a:prstGeom prst="rect">
-            <a:avLst/>
-          </a:prstGeom>
-          <a:solidFill>
-            <a:srgbClr val="10B981"/>
+          <p:cNvPr id="6" name="Rectangle 5"/>
+          <p:cNvSpPr/>
+          <p:nvPr/>
+        </p:nvSpPr>
+        <p:spPr>
+          <a:xfrm>
+            <a:off x="0" y="1078992"/>
+            <a:ext cx="12191695" cy="12700"/>
+          </a:xfrm>
+          <a:prstGeom prst="rect">
+            <a:avLst/>
+          </a:prstGeom>
+          <a:solidFill>
+            <a:srgbClr val="253350"/>
           </a:solidFill>
           <a:ln>
             <a:noFill/>
@@ -4992,20 +5121,20 @@
       </p:sp>
       <p:sp>
         <p:nvSpPr>
-          <p:cNvPr id="6" name="Rounded Rectangle 5"/>
-          <p:cNvSpPr/>
-          <p:nvPr/>
-        </p:nvSpPr>
-        <p:spPr>
-          <a:xfrm>
-            <a:off x="457200" y="1371600"/>
-            <a:ext cx="11247120" cy="685800"/>
+          <p:cNvPr id="7" name="Rounded Rectangle 6"/>
+          <p:cNvSpPr/>
+          <p:nvPr/>
+        </p:nvSpPr>
+        <p:spPr>
+          <a:xfrm>
+            <a:off x="457200" y="1280160"/>
+            <a:ext cx="11247120" cy="658368"/>
           </a:xfrm>
           <a:prstGeom prst="roundRect">
             <a:avLst/>
           </a:prstGeom>
           <a:solidFill>
-            <a:srgbClr val="141E33"/>
+            <a:srgbClr val="161F35"/>
           </a:solidFill>
           <a:ln>
             <a:noFill/>
@@ -5035,20 +5164,20 @@
       </p:sp>
       <p:sp>
         <p:nvSpPr>
-          <p:cNvPr id="7" name="Rounded Rectangle 6"/>
-          <p:cNvSpPr/>
-          <p:nvPr/>
-        </p:nvSpPr>
-        <p:spPr>
-          <a:xfrm>
-            <a:off x="640080" y="1508760"/>
-            <a:ext cx="365760" cy="365760"/>
+          <p:cNvPr id="8" name="Rounded Rectangle 7"/>
+          <p:cNvSpPr/>
+          <p:nvPr/>
+        </p:nvSpPr>
+        <p:spPr>
+          <a:xfrm>
+            <a:off x="640080" y="1426464"/>
+            <a:ext cx="320040" cy="320040"/>
           </a:xfrm>
           <a:prstGeom prst="roundRect">
             <a:avLst/>
           </a:prstGeom>
           <a:noFill/>
-          <a:ln w="19050">
+          <a:ln w="12700">
             <a:solidFill>
               <a:srgbClr val="10B981"/>
             </a:solidFill>
@@ -5078,13 +5207,13 @@
       </p:sp>
       <p:sp>
         <p:nvSpPr>
-          <p:cNvPr id="8" name="TextBox 7"/>
+          <p:cNvPr id="9" name="TextBox 8"/>
           <p:cNvSpPr txBox="1"/>
           <p:nvPr/>
         </p:nvSpPr>
         <p:spPr>
           <a:xfrm>
-            <a:off x="1188720" y="1463040"/>
+            <a:off x="1097280" y="1371600"/>
             <a:ext cx="457200" cy="457200"/>
           </a:xfrm>
           <a:prstGeom prst="rect">
@@ -5099,7 +5228,7 @@
           <a:lstStyle/>
           <a:p>
             <a:pPr algn="l">
-              <a:defRPr sz="1200" b="1">
+              <a:defRPr sz="1100" b="1">
                 <a:solidFill>
                   <a:srgbClr val="10B981"/>
                 </a:solidFill>
@@ -5114,14 +5243,14 @@
       </p:sp>
       <p:sp>
         <p:nvSpPr>
-          <p:cNvPr id="9" name="TextBox 8"/>
+          <p:cNvPr id="10" name="TextBox 9"/>
           <p:cNvSpPr txBox="1"/>
           <p:nvPr/>
         </p:nvSpPr>
         <p:spPr>
           <a:xfrm>
-            <a:off x="1645920" y="1463040"/>
-            <a:ext cx="9601200" cy="502920"/>
+            <a:off x="1554480" y="1371600"/>
+            <a:ext cx="9601200" cy="457200"/>
           </a:xfrm>
           <a:prstGeom prst="rect">
             <a:avLst/>
@@ -5135,9 +5264,9 @@
           <a:lstStyle/>
           <a:p>
             <a:pPr algn="l">
-              <a:defRPr sz="1500" b="0">
+              <a:defRPr sz="1400" b="0">
                 <a:solidFill>
-                  <a:srgbClr val="CBD5E8"/>
+                  <a:srgbClr val="A0AEC4"/>
                 </a:solidFill>
                 <a:latin typeface="Microsoft YaHei"/>
               </a:defRPr>
@@ -5150,20 +5279,20 @@
       </p:sp>
       <p:sp>
         <p:nvSpPr>
-          <p:cNvPr id="10" name="Rounded Rectangle 9"/>
-          <p:cNvSpPr/>
-          <p:nvPr/>
-        </p:nvSpPr>
-        <p:spPr>
-          <a:xfrm>
-            <a:off x="457200" y="2194560"/>
-            <a:ext cx="11247120" cy="685800"/>
+          <p:cNvPr id="11" name="Rounded Rectangle 10"/>
+          <p:cNvSpPr/>
+          <p:nvPr/>
+        </p:nvSpPr>
+        <p:spPr>
+          <a:xfrm>
+            <a:off x="457200" y="2084832"/>
+            <a:ext cx="11247120" cy="658368"/>
           </a:xfrm>
           <a:prstGeom prst="roundRect">
             <a:avLst/>
           </a:prstGeom>
           <a:solidFill>
-            <a:srgbClr val="141E33"/>
+            <a:srgbClr val="161F35"/>
           </a:solidFill>
           <a:ln>
             <a:noFill/>
@@ -5193,20 +5322,20 @@
       </p:sp>
       <p:sp>
         <p:nvSpPr>
-          <p:cNvPr id="11" name="Rounded Rectangle 10"/>
-          <p:cNvSpPr/>
-          <p:nvPr/>
-        </p:nvSpPr>
-        <p:spPr>
-          <a:xfrm>
-            <a:off x="640080" y="2331720"/>
-            <a:ext cx="365760" cy="365760"/>
+          <p:cNvPr id="12" name="Rounded Rectangle 11"/>
+          <p:cNvSpPr/>
+          <p:nvPr/>
+        </p:nvSpPr>
+        <p:spPr>
+          <a:xfrm>
+            <a:off x="640080" y="2231136"/>
+            <a:ext cx="320040" cy="320040"/>
           </a:xfrm>
           <a:prstGeom prst="roundRect">
             <a:avLst/>
           </a:prstGeom>
           <a:noFill/>
-          <a:ln w="19050">
+          <a:ln w="12700">
             <a:solidFill>
               <a:srgbClr val="10B981"/>
             </a:solidFill>
@@ -5236,13 +5365,13 @@
       </p:sp>
       <p:sp>
         <p:nvSpPr>
-          <p:cNvPr id="12" name="TextBox 11"/>
+          <p:cNvPr id="13" name="TextBox 12"/>
           <p:cNvSpPr txBox="1"/>
           <p:nvPr/>
         </p:nvSpPr>
         <p:spPr>
           <a:xfrm>
-            <a:off x="1188720" y="2286000"/>
+            <a:off x="1097280" y="2176272"/>
             <a:ext cx="457200" cy="457200"/>
           </a:xfrm>
           <a:prstGeom prst="rect">
@@ -5257,7 +5386,7 @@
           <a:lstStyle/>
           <a:p>
             <a:pPr algn="l">
-              <a:defRPr sz="1200" b="1">
+              <a:defRPr sz="1100" b="1">
                 <a:solidFill>
                   <a:srgbClr val="10B981"/>
                 </a:solidFill>
@@ -5272,14 +5401,14 @@
       </p:sp>
       <p:sp>
         <p:nvSpPr>
-          <p:cNvPr id="13" name="TextBox 12"/>
+          <p:cNvPr id="14" name="TextBox 13"/>
           <p:cNvSpPr txBox="1"/>
           <p:nvPr/>
         </p:nvSpPr>
         <p:spPr>
           <a:xfrm>
-            <a:off x="1645920" y="2286000"/>
-            <a:ext cx="9601200" cy="502920"/>
+            <a:off x="1554480" y="2176272"/>
+            <a:ext cx="9601200" cy="457200"/>
           </a:xfrm>
           <a:prstGeom prst="rect">
             <a:avLst/>
@@ -5293,9 +5422,9 @@
           <a:lstStyle/>
           <a:p>
             <a:pPr algn="l">
-              <a:defRPr sz="1500" b="0">
+              <a:defRPr sz="1400" b="0">
                 <a:solidFill>
-                  <a:srgbClr val="CBD5E8"/>
+                  <a:srgbClr val="A0AEC4"/>
                 </a:solidFill>
                 <a:latin typeface="Microsoft YaHei"/>
               </a:defRPr>
@@ -5308,20 +5437,20 @@
       </p:sp>
       <p:sp>
         <p:nvSpPr>
-          <p:cNvPr id="14" name="Rounded Rectangle 13"/>
-          <p:cNvSpPr/>
-          <p:nvPr/>
-        </p:nvSpPr>
-        <p:spPr>
-          <a:xfrm>
-            <a:off x="457200" y="3017520"/>
-            <a:ext cx="11247120" cy="685800"/>
+          <p:cNvPr id="15" name="Rounded Rectangle 14"/>
+          <p:cNvSpPr/>
+          <p:nvPr/>
+        </p:nvSpPr>
+        <p:spPr>
+          <a:xfrm>
+            <a:off x="457200" y="2889504"/>
+            <a:ext cx="11247120" cy="658368"/>
           </a:xfrm>
           <a:prstGeom prst="roundRect">
             <a:avLst/>
           </a:prstGeom>
           <a:solidFill>
-            <a:srgbClr val="141E33"/>
+            <a:srgbClr val="161F35"/>
           </a:solidFill>
           <a:ln>
             <a:noFill/>
@@ -5351,20 +5480,20 @@
       </p:sp>
       <p:sp>
         <p:nvSpPr>
-          <p:cNvPr id="15" name="Rounded Rectangle 14"/>
-          <p:cNvSpPr/>
-          <p:nvPr/>
-        </p:nvSpPr>
-        <p:spPr>
-          <a:xfrm>
-            <a:off x="640080" y="3154680"/>
-            <a:ext cx="365760" cy="365760"/>
+          <p:cNvPr id="16" name="Rounded Rectangle 15"/>
+          <p:cNvSpPr/>
+          <p:nvPr/>
+        </p:nvSpPr>
+        <p:spPr>
+          <a:xfrm>
+            <a:off x="640080" y="3035808"/>
+            <a:ext cx="320040" cy="320040"/>
           </a:xfrm>
           <a:prstGeom prst="roundRect">
             <a:avLst/>
           </a:prstGeom>
           <a:noFill/>
-          <a:ln w="19050">
+          <a:ln w="12700">
             <a:solidFill>
               <a:srgbClr val="10B981"/>
             </a:solidFill>
@@ -5394,13 +5523,13 @@
       </p:sp>
       <p:sp>
         <p:nvSpPr>
-          <p:cNvPr id="16" name="TextBox 15"/>
+          <p:cNvPr id="17" name="TextBox 16"/>
           <p:cNvSpPr txBox="1"/>
           <p:nvPr/>
         </p:nvSpPr>
         <p:spPr>
           <a:xfrm>
-            <a:off x="1188720" y="3108960"/>
+            <a:off x="1097280" y="2980944"/>
             <a:ext cx="457200" cy="457200"/>
           </a:xfrm>
           <a:prstGeom prst="rect">
@@ -5415,7 +5544,7 @@
           <a:lstStyle/>
           <a:p>
             <a:pPr algn="l">
-              <a:defRPr sz="1200" b="1">
+              <a:defRPr sz="1100" b="1">
                 <a:solidFill>
                   <a:srgbClr val="10B981"/>
                 </a:solidFill>
@@ -5430,14 +5559,14 @@
       </p:sp>
       <p:sp>
         <p:nvSpPr>
-          <p:cNvPr id="17" name="TextBox 16"/>
+          <p:cNvPr id="18" name="TextBox 17"/>
           <p:cNvSpPr txBox="1"/>
           <p:nvPr/>
         </p:nvSpPr>
         <p:spPr>
           <a:xfrm>
-            <a:off x="1645920" y="3108960"/>
-            <a:ext cx="9601200" cy="502920"/>
+            <a:off x="1554480" y="2980944"/>
+            <a:ext cx="9601200" cy="457200"/>
           </a:xfrm>
           <a:prstGeom prst="rect">
             <a:avLst/>
@@ -5451,9 +5580,9 @@
           <a:lstStyle/>
           <a:p>
             <a:pPr algn="l">
-              <a:defRPr sz="1500" b="0">
+              <a:defRPr sz="1400" b="0">
                 <a:solidFill>
-                  <a:srgbClr val="CBD5E8"/>
+                  <a:srgbClr val="A0AEC4"/>
                 </a:solidFill>
                 <a:latin typeface="Microsoft YaHei"/>
               </a:defRPr>
@@ -5466,20 +5595,20 @@
       </p:sp>
       <p:sp>
         <p:nvSpPr>
-          <p:cNvPr id="18" name="Rounded Rectangle 17"/>
-          <p:cNvSpPr/>
-          <p:nvPr/>
-        </p:nvSpPr>
-        <p:spPr>
-          <a:xfrm>
-            <a:off x="457200" y="3840480"/>
-            <a:ext cx="11247120" cy="685800"/>
+          <p:cNvPr id="19" name="Rounded Rectangle 18"/>
+          <p:cNvSpPr/>
+          <p:nvPr/>
+        </p:nvSpPr>
+        <p:spPr>
+          <a:xfrm>
+            <a:off x="457200" y="3694176"/>
+            <a:ext cx="11247120" cy="658368"/>
           </a:xfrm>
           <a:prstGeom prst="roundRect">
             <a:avLst/>
           </a:prstGeom>
           <a:solidFill>
-            <a:srgbClr val="141E33"/>
+            <a:srgbClr val="161F35"/>
           </a:solidFill>
           <a:ln>
             <a:noFill/>
@@ -5509,20 +5638,20 @@
       </p:sp>
       <p:sp>
         <p:nvSpPr>
-          <p:cNvPr id="19" name="Rounded Rectangle 18"/>
-          <p:cNvSpPr/>
-          <p:nvPr/>
-        </p:nvSpPr>
-        <p:spPr>
-          <a:xfrm>
-            <a:off x="640080" y="3977640"/>
-            <a:ext cx="365760" cy="365760"/>
+          <p:cNvPr id="20" name="Rounded Rectangle 19"/>
+          <p:cNvSpPr/>
+          <p:nvPr/>
+        </p:nvSpPr>
+        <p:spPr>
+          <a:xfrm>
+            <a:off x="640080" y="3840480"/>
+            <a:ext cx="320040" cy="320040"/>
           </a:xfrm>
           <a:prstGeom prst="roundRect">
             <a:avLst/>
           </a:prstGeom>
           <a:noFill/>
-          <a:ln w="19050">
+          <a:ln w="12700">
             <a:solidFill>
               <a:srgbClr val="10B981"/>
             </a:solidFill>
@@ -5552,13 +5681,13 @@
       </p:sp>
       <p:sp>
         <p:nvSpPr>
-          <p:cNvPr id="20" name="TextBox 19"/>
+          <p:cNvPr id="21" name="TextBox 20"/>
           <p:cNvSpPr txBox="1"/>
           <p:nvPr/>
         </p:nvSpPr>
         <p:spPr>
           <a:xfrm>
-            <a:off x="1188720" y="3931920"/>
+            <a:off x="1097280" y="3785616"/>
             <a:ext cx="457200" cy="457200"/>
           </a:xfrm>
           <a:prstGeom prst="rect">
@@ -5573,7 +5702,7 @@
           <a:lstStyle/>
           <a:p>
             <a:pPr algn="l">
-              <a:defRPr sz="1200" b="1">
+              <a:defRPr sz="1100" b="1">
                 <a:solidFill>
                   <a:srgbClr val="10B981"/>
                 </a:solidFill>
@@ -5588,14 +5717,14 @@
       </p:sp>
       <p:sp>
         <p:nvSpPr>
-          <p:cNvPr id="21" name="TextBox 20"/>
+          <p:cNvPr id="22" name="TextBox 21"/>
           <p:cNvSpPr txBox="1"/>
           <p:nvPr/>
         </p:nvSpPr>
         <p:spPr>
           <a:xfrm>
-            <a:off x="1645920" y="3931920"/>
-            <a:ext cx="9601200" cy="502920"/>
+            <a:off x="1554480" y="3785616"/>
+            <a:ext cx="9601200" cy="457200"/>
           </a:xfrm>
           <a:prstGeom prst="rect">
             <a:avLst/>
@@ -5609,9 +5738,9 @@
           <a:lstStyle/>
           <a:p>
             <a:pPr algn="l">
-              <a:defRPr sz="1500" b="0">
+              <a:defRPr sz="1400" b="0">
                 <a:solidFill>
-                  <a:srgbClr val="CBD5E8"/>
+                  <a:srgbClr val="A0AEC4"/>
                 </a:solidFill>
                 <a:latin typeface="Microsoft YaHei"/>
               </a:defRPr>
@@ -5624,20 +5753,20 @@
       </p:sp>
       <p:sp>
         <p:nvSpPr>
-          <p:cNvPr id="22" name="Rounded Rectangle 21"/>
-          <p:cNvSpPr/>
-          <p:nvPr/>
-        </p:nvSpPr>
-        <p:spPr>
-          <a:xfrm>
-            <a:off x="457200" y="4663440"/>
-            <a:ext cx="11247120" cy="685800"/>
+          <p:cNvPr id="23" name="Rounded Rectangle 22"/>
+          <p:cNvSpPr/>
+          <p:nvPr/>
+        </p:nvSpPr>
+        <p:spPr>
+          <a:xfrm>
+            <a:off x="457200" y="4498848"/>
+            <a:ext cx="11247120" cy="658368"/>
           </a:xfrm>
           <a:prstGeom prst="roundRect">
             <a:avLst/>
           </a:prstGeom>
           <a:solidFill>
-            <a:srgbClr val="141E33"/>
+            <a:srgbClr val="161F35"/>
           </a:solidFill>
           <a:ln>
             <a:noFill/>
@@ -5667,20 +5796,20 @@
       </p:sp>
       <p:sp>
         <p:nvSpPr>
-          <p:cNvPr id="23" name="Rounded Rectangle 22"/>
-          <p:cNvSpPr/>
-          <p:nvPr/>
-        </p:nvSpPr>
-        <p:spPr>
-          <a:xfrm>
-            <a:off x="640080" y="4800600"/>
-            <a:ext cx="365760" cy="365760"/>
+          <p:cNvPr id="24" name="Rounded Rectangle 23"/>
+          <p:cNvSpPr/>
+          <p:nvPr/>
+        </p:nvSpPr>
+        <p:spPr>
+          <a:xfrm>
+            <a:off x="640080" y="4645152"/>
+            <a:ext cx="320040" cy="320040"/>
           </a:xfrm>
           <a:prstGeom prst="roundRect">
             <a:avLst/>
           </a:prstGeom>
           <a:noFill/>
-          <a:ln w="19050">
+          <a:ln w="12700">
             <a:solidFill>
               <a:srgbClr val="10B981"/>
             </a:solidFill>
@@ -5710,13 +5839,13 @@
       </p:sp>
       <p:sp>
         <p:nvSpPr>
-          <p:cNvPr id="24" name="TextBox 23"/>
+          <p:cNvPr id="25" name="TextBox 24"/>
           <p:cNvSpPr txBox="1"/>
           <p:nvPr/>
         </p:nvSpPr>
         <p:spPr>
           <a:xfrm>
-            <a:off x="1188720" y="4754880"/>
+            <a:off x="1097280" y="4590288"/>
             <a:ext cx="457200" cy="457200"/>
           </a:xfrm>
           <a:prstGeom prst="rect">
@@ -5731,7 +5860,7 @@
           <a:lstStyle/>
           <a:p>
             <a:pPr algn="l">
-              <a:defRPr sz="1200" b="1">
+              <a:defRPr sz="1100" b="1">
                 <a:solidFill>
                   <a:srgbClr val="10B981"/>
                 </a:solidFill>
@@ -5746,14 +5875,14 @@
       </p:sp>
       <p:sp>
         <p:nvSpPr>
-          <p:cNvPr id="25" name="TextBox 24"/>
+          <p:cNvPr id="26" name="TextBox 25"/>
           <p:cNvSpPr txBox="1"/>
           <p:nvPr/>
         </p:nvSpPr>
         <p:spPr>
           <a:xfrm>
-            <a:off x="1645920" y="4754880"/>
-            <a:ext cx="9601200" cy="502920"/>
+            <a:off x="1554480" y="4590288"/>
+            <a:ext cx="9601200" cy="457200"/>
           </a:xfrm>
           <a:prstGeom prst="rect">
             <a:avLst/>
@@ -5767,9 +5896,9 @@
           <a:lstStyle/>
           <a:p>
             <a:pPr algn="l">
-              <a:defRPr sz="1500" b="0">
+              <a:defRPr sz="1400" b="0">
                 <a:solidFill>
-                  <a:srgbClr val="CBD5E8"/>
+                  <a:srgbClr val="A0AEC4"/>
                 </a:solidFill>
                 <a:latin typeface="Microsoft YaHei"/>
               </a:defRPr>
@@ -5782,20 +5911,20 @@
       </p:sp>
       <p:sp>
         <p:nvSpPr>
-          <p:cNvPr id="26" name="Rounded Rectangle 25"/>
-          <p:cNvSpPr/>
-          <p:nvPr/>
-        </p:nvSpPr>
-        <p:spPr>
-          <a:xfrm>
-            <a:off x="457200" y="5486400"/>
-            <a:ext cx="11247120" cy="685800"/>
+          <p:cNvPr id="27" name="Rounded Rectangle 26"/>
+          <p:cNvSpPr/>
+          <p:nvPr/>
+        </p:nvSpPr>
+        <p:spPr>
+          <a:xfrm>
+            <a:off x="457200" y="5303520"/>
+            <a:ext cx="11247120" cy="658368"/>
           </a:xfrm>
           <a:prstGeom prst="roundRect">
             <a:avLst/>
           </a:prstGeom>
           <a:solidFill>
-            <a:srgbClr val="141E33"/>
+            <a:srgbClr val="161F35"/>
           </a:solidFill>
           <a:ln>
             <a:noFill/>
@@ -5825,20 +5954,20 @@
       </p:sp>
       <p:sp>
         <p:nvSpPr>
-          <p:cNvPr id="27" name="Rounded Rectangle 26"/>
-          <p:cNvSpPr/>
-          <p:nvPr/>
-        </p:nvSpPr>
-        <p:spPr>
-          <a:xfrm>
-            <a:off x="640080" y="5623560"/>
-            <a:ext cx="365760" cy="365760"/>
+          <p:cNvPr id="28" name="Rounded Rectangle 27"/>
+          <p:cNvSpPr/>
+          <p:nvPr/>
+        </p:nvSpPr>
+        <p:spPr>
+          <a:xfrm>
+            <a:off x="640080" y="5449824"/>
+            <a:ext cx="320040" cy="320040"/>
           </a:xfrm>
           <a:prstGeom prst="roundRect">
             <a:avLst/>
           </a:prstGeom>
           <a:noFill/>
-          <a:ln w="19050">
+          <a:ln w="12700">
             <a:solidFill>
               <a:srgbClr val="10B981"/>
             </a:solidFill>
@@ -5868,13 +5997,13 @@
       </p:sp>
       <p:sp>
         <p:nvSpPr>
-          <p:cNvPr id="28" name="TextBox 27"/>
+          <p:cNvPr id="29" name="TextBox 28"/>
           <p:cNvSpPr txBox="1"/>
           <p:nvPr/>
         </p:nvSpPr>
         <p:spPr>
           <a:xfrm>
-            <a:off x="1188720" y="5577840"/>
+            <a:off x="1097280" y="5394960"/>
             <a:ext cx="457200" cy="457200"/>
           </a:xfrm>
           <a:prstGeom prst="rect">
@@ -5889,7 +6018,7 @@
           <a:lstStyle/>
           <a:p>
             <a:pPr algn="l">
-              <a:defRPr sz="1200" b="1">
+              <a:defRPr sz="1100" b="1">
                 <a:solidFill>
                   <a:srgbClr val="10B981"/>
                 </a:solidFill>
@@ -5904,14 +6033,14 @@
       </p:sp>
       <p:sp>
         <p:nvSpPr>
-          <p:cNvPr id="29" name="TextBox 28"/>
+          <p:cNvPr id="30" name="TextBox 29"/>
           <p:cNvSpPr txBox="1"/>
           <p:nvPr/>
         </p:nvSpPr>
         <p:spPr>
           <a:xfrm>
-            <a:off x="1645920" y="5577840"/>
-            <a:ext cx="9601200" cy="502920"/>
+            <a:off x="1554480" y="5394960"/>
+            <a:ext cx="9601200" cy="457200"/>
           </a:xfrm>
           <a:prstGeom prst="rect">
             <a:avLst/>
@@ -5925,9 +6054,9 @@
           <a:lstStyle/>
           <a:p>
             <a:pPr algn="l">
-              <a:defRPr sz="1500" b="0">
+              <a:defRPr sz="1400" b="0">
                 <a:solidFill>
-                  <a:srgbClr val="CBD5E8"/>
+                  <a:srgbClr val="A0AEC4"/>
                 </a:solidFill>
                 <a:latin typeface="Microsoft YaHei"/>
               </a:defRPr>
@@ -5940,20 +6069,20 @@
       </p:sp>
       <p:sp>
         <p:nvSpPr>
-          <p:cNvPr id="30" name="Rectangle 29"/>
+          <p:cNvPr id="31" name="Rectangle 30"/>
           <p:cNvSpPr/>
           <p:nvPr/>
         </p:nvSpPr>
         <p:spPr>
           <a:xfrm>
             <a:off x="0" y="6446520"/>
-            <a:ext cx="12191695" cy="19050"/>
-          </a:xfrm>
-          <a:prstGeom prst="rect">
-            <a:avLst/>
-          </a:prstGeom>
-          <a:solidFill>
-            <a:srgbClr val="2D3B55"/>
+            <a:ext cx="12191695" cy="12700"/>
+          </a:xfrm>
+          <a:prstGeom prst="rect">
+            <a:avLst/>
+          </a:prstGeom>
+          <a:solidFill>
+            <a:srgbClr val="253350"/>
           </a:solidFill>
           <a:ln>
             <a:noFill/>
@@ -5983,14 +6112,14 @@
       </p:sp>
       <p:sp>
         <p:nvSpPr>
-          <p:cNvPr id="31" name="TextBox 30"/>
+          <p:cNvPr id="32" name="TextBox 31"/>
           <p:cNvSpPr txBox="1"/>
           <p:nvPr/>
         </p:nvSpPr>
         <p:spPr>
           <a:xfrm>
-            <a:off x="457200" y="6492240"/>
-            <a:ext cx="5486400" cy="274320"/>
+            <a:off x="731520" y="6492240"/>
+            <a:ext cx="4572000" cy="274320"/>
           </a:xfrm>
           <a:prstGeom prst="rect">
             <a:avLst/>
@@ -6006,20 +6135,20 @@
             <a:pPr algn="l">
               <a:defRPr sz="900" b="0">
                 <a:solidFill>
-                  <a:srgbClr val="6B7B9E"/>
+                  <a:srgbClr val="607090"/>
                 </a:solidFill>
                 <a:latin typeface="Microsoft YaHei"/>
               </a:defRPr>
             </a:pPr>
             <a:r>
-              <a:t>模块16：合规规范</a:t>
-            </a:r>
-          </a:p>
-        </p:txBody>
-      </p:sp>
-      <p:sp>
-        <p:nvSpPr>
-          <p:cNvPr id="32" name="TextBox 31"/>
+              <a:t>模块16 · 合规规范</a:t>
+            </a:r>
+          </a:p>
+        </p:txBody>
+      </p:sp>
+      <p:sp>
+        <p:nvSpPr>
+          <p:cNvPr id="33" name="TextBox 32"/>
           <p:cNvSpPr txBox="1"/>
           <p:nvPr/>
         </p:nvSpPr>
@@ -6042,7 +6171,7 @@
             <a:pPr algn="r">
               <a:defRPr sz="900" b="0">
                 <a:solidFill>
-                  <a:srgbClr val="6B7B9E"/>
+                  <a:srgbClr val="607090"/>
                 </a:solidFill>
                 <a:latin typeface="Microsoft YaHei"/>
               </a:defRPr>
@@ -6067,7 +6196,7 @@
     <p:bg>
       <p:bgPr>
         <a:solidFill>
-          <a:srgbClr val="0B1120"/>
+          <a:srgbClr val="0A0E1A"/>
         </a:solidFill>
         <a:effectLst/>
       </p:bgPr>
@@ -6087,14 +6216,14 @@
         </p:nvSpPr>
         <p:spPr>
           <a:xfrm>
-            <a:off x="5029200" y="1371600"/>
-            <a:ext cx="2103120" cy="2103120"/>
+            <a:off x="5181447" y="1645920"/>
+            <a:ext cx="1828800" cy="1828800"/>
           </a:xfrm>
           <a:prstGeom prst="ellipse">
             <a:avLst/>
           </a:prstGeom>
           <a:solidFill>
-            <a:srgbClr val="EF4444"/>
+            <a:srgbClr val="F43F5E"/>
           </a:solidFill>
           <a:ln>
             <a:noFill/>
@@ -6130,8 +6259,8 @@
         </p:nvSpPr>
         <p:spPr>
           <a:xfrm>
-            <a:off x="5029200" y="1645920"/>
-            <a:ext cx="2103120" cy="1645920"/>
+            <a:off x="5181447" y="1920240"/>
+            <a:ext cx="1828800" cy="1371600"/>
           </a:xfrm>
           <a:prstGeom prst="rect">
             <a:avLst/>
@@ -6145,15 +6274,15 @@
           <a:lstStyle/>
           <a:p>
             <a:pPr algn="ctr">
-              <a:defRPr sz="6000" b="0">
+              <a:defRPr sz="5600" b="1">
                 <a:solidFill>
-                  <a:srgbClr val="FFFFFF"/>
+                  <a:srgbClr val="F0F4FC"/>
                 </a:solidFill>
                 <a:latin typeface="Microsoft YaHei"/>
               </a:defRPr>
             </a:pPr>
             <a:r>
-              <a:t>✅</a:t>
+              <a:t>✓</a:t>
             </a:r>
           </a:p>
         </p:txBody>
@@ -6167,7 +6296,7 @@
         <p:spPr>
           <a:xfrm>
             <a:off x="0" y="3840480"/>
-            <a:ext cx="12191695" cy="731520"/>
+            <a:ext cx="12191695" cy="640080"/>
           </a:xfrm>
           <a:prstGeom prst="rect">
             <a:avLst/>
@@ -6183,7 +6312,7 @@
             <a:pPr algn="ctr">
               <a:defRPr sz="3200" b="1">
                 <a:solidFill>
-                  <a:srgbClr val="FFFFFF"/>
+                  <a:srgbClr val="F0F4FC"/>
                 </a:solidFill>
                 <a:latin typeface="Microsoft YaHei"/>
               </a:defRPr>
@@ -6202,14 +6331,14 @@
         </p:nvSpPr>
         <p:spPr>
           <a:xfrm>
-            <a:off x="5029200" y="4754880"/>
-            <a:ext cx="2103120" cy="38100"/>
-          </a:xfrm>
-          <a:prstGeom prst="rect">
-            <a:avLst/>
-          </a:prstGeom>
-          <a:solidFill>
-            <a:srgbClr val="EF4444"/>
+            <a:off x="5029200" y="4663440"/>
+            <a:ext cx="2103120" cy="25400"/>
+          </a:xfrm>
+          <a:prstGeom prst="rect">
+            <a:avLst/>
+          </a:prstGeom>
+          <a:solidFill>
+            <a:srgbClr val="F43F5E"/>
           </a:solidFill>
           <a:ln>
             <a:noFill/>
@@ -6245,7 +6374,7 @@
         </p:nvSpPr>
         <p:spPr>
           <a:xfrm>
-            <a:off x="0" y="5029200"/>
+            <a:off x="0" y="4937760"/>
             <a:ext cx="12191695" cy="457200"/>
           </a:xfrm>
           <a:prstGeom prst="rect">
@@ -6260,9 +6389,9 @@
           <a:lstStyle/>
           <a:p>
             <a:pPr algn="ctr">
-              <a:defRPr sz="1800" b="0">
+              <a:defRPr sz="1600" b="0">
                 <a:solidFill>
-                  <a:srgbClr val="CBD5E8"/>
+                  <a:srgbClr val="A0AEC4"/>
                 </a:solidFill>
                 <a:latin typeface="Microsoft YaHei"/>
               </a:defRPr>
@@ -6296,9 +6425,9 @@
           <a:lstStyle/>
           <a:p>
             <a:pPr algn="ctr">
-              <a:defRPr sz="1200" b="0">
+              <a:defRPr sz="1100" b="0">
                 <a:solidFill>
-                  <a:srgbClr val="6B7B9E"/>
+                  <a:srgbClr val="607090"/>
                 </a:solidFill>
                 <a:latin typeface="Microsoft YaHei"/>
               </a:defRPr>
@@ -6323,7 +6452,7 @@
     <p:bg>
       <p:bgPr>
         <a:solidFill>
-          <a:srgbClr val="0B1120"/>
+          <a:srgbClr val="0A0E1A"/>
         </a:solidFill>
         <a:effectLst/>
       </p:bgPr>
@@ -6344,13 +6473,13 @@
         <p:spPr>
           <a:xfrm>
             <a:off x="0" y="0"/>
-            <a:ext cx="12191695" cy="1051560"/>
-          </a:xfrm>
-          <a:prstGeom prst="rect">
-            <a:avLst/>
-          </a:prstGeom>
-          <a:solidFill>
-            <a:srgbClr val="141E33"/>
+            <a:ext cx="12191695" cy="38100"/>
+          </a:xfrm>
+          <a:prstGeom prst="rect">
+            <a:avLst/>
+          </a:prstGeom>
+          <a:solidFill>
+            <a:srgbClr val="F43F5E"/>
           </a:solidFill>
           <a:ln>
             <a:noFill/>
@@ -6386,14 +6515,14 @@
         </p:nvSpPr>
         <p:spPr>
           <a:xfrm>
-            <a:off x="0" y="0"/>
-            <a:ext cx="109728" cy="1051560"/>
-          </a:xfrm>
-          <a:prstGeom prst="rect">
-            <a:avLst/>
-          </a:prstGeom>
-          <a:solidFill>
-            <a:srgbClr val="EF4444"/>
+            <a:off x="0" y="38100"/>
+            <a:ext cx="12191695" cy="914400"/>
+          </a:xfrm>
+          <a:prstGeom prst="rect">
+            <a:avLst/>
+          </a:prstGeom>
+          <a:solidFill>
+            <a:srgbClr val="161F35"/>
           </a:solidFill>
           <a:ln>
             <a:noFill/>
@@ -6423,14 +6552,57 @@
       </p:sp>
       <p:sp>
         <p:nvSpPr>
-          <p:cNvPr id="4" name="TextBox 3"/>
+          <p:cNvPr id="4" name="Rectangle 3"/>
+          <p:cNvSpPr/>
+          <p:nvPr/>
+        </p:nvSpPr>
+        <p:spPr>
+          <a:xfrm>
+            <a:off x="0" y="38100"/>
+            <a:ext cx="91440" cy="914400"/>
+          </a:xfrm>
+          <a:prstGeom prst="rect">
+            <a:avLst/>
+          </a:prstGeom>
+          <a:solidFill>
+            <a:srgbClr val="F43F5E"/>
+          </a:solidFill>
+          <a:ln>
+            <a:noFill/>
+          </a:ln>
+        </p:spPr>
+        <p:style>
+          <a:lnRef idx="1">
+            <a:schemeClr val="accent1"/>
+          </a:lnRef>
+          <a:fillRef idx="3">
+            <a:schemeClr val="accent1"/>
+          </a:fillRef>
+          <a:effectRef idx="2">
+            <a:schemeClr val="accent1"/>
+          </a:effectRef>
+          <a:fontRef idx="minor">
+            <a:schemeClr val="lt1"/>
+          </a:fontRef>
+        </p:style>
+        <p:txBody>
+          <a:bodyPr rtlCol="0" anchor="ctr"/>
+          <a:lstStyle/>
+          <a:p>
+            <a:pPr algn="ctr"/>
+          </a:p>
+        </p:txBody>
+      </p:sp>
+      <p:sp>
+        <p:nvSpPr>
+          <p:cNvPr id="5" name="TextBox 4"/>
           <p:cNvSpPr txBox="1"/>
           <p:nvPr/>
         </p:nvSpPr>
         <p:spPr>
           <a:xfrm>
-            <a:off x="548640" y="182880"/>
-            <a:ext cx="10058400" cy="640080"/>
+            <a:off x="731520" y="137160"/>
+            <a:ext cx="10728655" cy="640080"/>
           </a:xfrm>
           <a:prstGeom prst="rect">
             <a:avLst/>
@@ -6444,9 +6616,9 @@
           <a:lstStyle/>
           <a:p>
             <a:pPr algn="l">
-              <a:defRPr sz="2600" b="1">
+              <a:defRPr sz="2400" b="1">
                 <a:solidFill>
-                  <a:srgbClr val="FFFFFF"/>
+                  <a:srgbClr val="F0F4FC"/>
                 </a:solidFill>
                 <a:latin typeface="Microsoft YaHei"/>
               </a:defRPr>
@@ -6459,20 +6631,20 @@
       </p:sp>
       <p:sp>
         <p:nvSpPr>
-          <p:cNvPr id="5" name="Rectangle 4"/>
-          <p:cNvSpPr/>
-          <p:nvPr/>
-        </p:nvSpPr>
-        <p:spPr>
-          <a:xfrm>
-            <a:off x="0" y="1051560"/>
-            <a:ext cx="12191695" cy="25400"/>
-          </a:xfrm>
-          <a:prstGeom prst="rect">
-            <a:avLst/>
-          </a:prstGeom>
-          <a:solidFill>
-            <a:srgbClr val="EF4444"/>
+          <p:cNvPr id="6" name="Rectangle 5"/>
+          <p:cNvSpPr/>
+          <p:nvPr/>
+        </p:nvSpPr>
+        <p:spPr>
+          <a:xfrm>
+            <a:off x="0" y="1078992"/>
+            <a:ext cx="12191695" cy="12700"/>
+          </a:xfrm>
+          <a:prstGeom prst="rect">
+            <a:avLst/>
+          </a:prstGeom>
+          <a:solidFill>
+            <a:srgbClr val="253350"/>
           </a:solidFill>
           <a:ln>
             <a:noFill/>
@@ -6502,24 +6674,24 @@
       </p:sp>
       <p:sp>
         <p:nvSpPr>
-          <p:cNvPr id="6" name="Rounded Rectangle 5"/>
-          <p:cNvSpPr/>
-          <p:nvPr/>
-        </p:nvSpPr>
-        <p:spPr>
-          <a:xfrm>
-            <a:off x="548640" y="1371600"/>
-            <a:ext cx="3383280" cy="1005840"/>
+          <p:cNvPr id="7" name="Rounded Rectangle 6"/>
+          <p:cNvSpPr/>
+          <p:nvPr/>
+        </p:nvSpPr>
+        <p:spPr>
+          <a:xfrm>
+            <a:off x="594360" y="1371600"/>
+            <a:ext cx="3383280" cy="960120"/>
           </a:xfrm>
           <a:prstGeom prst="roundRect">
             <a:avLst/>
           </a:prstGeom>
           <a:solidFill>
-            <a:srgbClr val="141E33"/>
-          </a:solidFill>
-          <a:ln w="19050">
+            <a:srgbClr val="161F35"/>
+          </a:solidFill>
+          <a:ln w="12700">
             <a:solidFill>
-              <a:srgbClr val="EF4444"/>
+              <a:srgbClr val="253350"/>
             </a:solidFill>
           </a:ln>
         </p:spPr>
@@ -6547,20 +6719,20 @@
       </p:sp>
       <p:sp>
         <p:nvSpPr>
-          <p:cNvPr id="7" name="Oval 6"/>
-          <p:cNvSpPr/>
-          <p:nvPr/>
-        </p:nvSpPr>
-        <p:spPr>
-          <a:xfrm>
-            <a:off x="685800" y="1600200"/>
-            <a:ext cx="457200" cy="457200"/>
+          <p:cNvPr id="8" name="Oval 7"/>
+          <p:cNvSpPr/>
+          <p:nvPr/>
+        </p:nvSpPr>
+        <p:spPr>
+          <a:xfrm>
+            <a:off x="704088" y="1572768"/>
+            <a:ext cx="411480" cy="411480"/>
           </a:xfrm>
           <a:prstGeom prst="ellipse">
             <a:avLst/>
           </a:prstGeom>
           <a:solidFill>
-            <a:srgbClr val="EF4444"/>
+            <a:srgbClr val="F43F5E"/>
           </a:solidFill>
           <a:ln>
             <a:noFill/>
@@ -6590,14 +6762,14 @@
       </p:sp>
       <p:sp>
         <p:nvSpPr>
-          <p:cNvPr id="8" name="TextBox 7"/>
+          <p:cNvPr id="9" name="TextBox 8"/>
           <p:cNvSpPr txBox="1"/>
           <p:nvPr/>
         </p:nvSpPr>
         <p:spPr>
           <a:xfrm>
-            <a:off x="685800" y="1600200"/>
-            <a:ext cx="457200" cy="457200"/>
+            <a:off x="704088" y="1572768"/>
+            <a:ext cx="411480" cy="411480"/>
           </a:xfrm>
           <a:prstGeom prst="rect">
             <a:avLst/>
@@ -6611,9 +6783,9 @@
           <a:lstStyle/>
           <a:p>
             <a:pPr algn="ctr">
-              <a:defRPr sz="1400" b="1">
+              <a:defRPr sz="1200" b="1">
                 <a:solidFill>
-                  <a:srgbClr val="FFFFFF"/>
+                  <a:srgbClr val="F0F4FC"/>
                 </a:solidFill>
                 <a:latin typeface="Microsoft YaHei"/>
               </a:defRPr>
@@ -6626,14 +6798,14 @@
       </p:sp>
       <p:sp>
         <p:nvSpPr>
-          <p:cNvPr id="9" name="TextBox 8"/>
+          <p:cNvPr id="10" name="TextBox 9"/>
           <p:cNvSpPr txBox="1"/>
           <p:nvPr/>
         </p:nvSpPr>
         <p:spPr>
           <a:xfrm>
-            <a:off x="1280160" y="1554480"/>
-            <a:ext cx="2468880" cy="640080"/>
+            <a:off x="1234440" y="1536192"/>
+            <a:ext cx="2560320" cy="594360"/>
           </a:xfrm>
           <a:prstGeom prst="rect">
             <a:avLst/>
@@ -6647,9 +6819,9 @@
           <a:lstStyle/>
           <a:p>
             <a:pPr algn="l">
-              <a:defRPr sz="1300" b="0">
+              <a:defRPr sz="1200" b="0">
                 <a:solidFill>
-                  <a:srgbClr val="CBD5E8"/>
+                  <a:srgbClr val="A0AEC4"/>
                 </a:solidFill>
                 <a:latin typeface="Microsoft YaHei"/>
               </a:defRPr>
@@ -6662,24 +6834,24 @@
       </p:sp>
       <p:sp>
         <p:nvSpPr>
-          <p:cNvPr id="10" name="Rounded Rectangle 9"/>
+          <p:cNvPr id="11" name="Rounded Rectangle 10"/>
           <p:cNvSpPr/>
           <p:nvPr/>
         </p:nvSpPr>
         <p:spPr>
           <a:xfrm>
             <a:off x="4251960" y="1371600"/>
-            <a:ext cx="3383280" cy="1005840"/>
+            <a:ext cx="3383280" cy="960120"/>
           </a:xfrm>
           <a:prstGeom prst="roundRect">
             <a:avLst/>
           </a:prstGeom>
           <a:solidFill>
-            <a:srgbClr val="141E33"/>
-          </a:solidFill>
-          <a:ln w="19050">
+            <a:srgbClr val="161F35"/>
+          </a:solidFill>
+          <a:ln w="12700">
             <a:solidFill>
-              <a:srgbClr val="EF4444"/>
+              <a:srgbClr val="253350"/>
             </a:solidFill>
           </a:ln>
         </p:spPr>
@@ -6707,20 +6879,20 @@
       </p:sp>
       <p:sp>
         <p:nvSpPr>
-          <p:cNvPr id="11" name="Oval 10"/>
-          <p:cNvSpPr/>
-          <p:nvPr/>
-        </p:nvSpPr>
-        <p:spPr>
-          <a:xfrm>
-            <a:off x="4389120" y="1600200"/>
-            <a:ext cx="457200" cy="457200"/>
+          <p:cNvPr id="12" name="Oval 11"/>
+          <p:cNvSpPr/>
+          <p:nvPr/>
+        </p:nvSpPr>
+        <p:spPr>
+          <a:xfrm>
+            <a:off x="4361688" y="1572768"/>
+            <a:ext cx="411480" cy="411480"/>
           </a:xfrm>
           <a:prstGeom prst="ellipse">
             <a:avLst/>
           </a:prstGeom>
           <a:solidFill>
-            <a:srgbClr val="EF4444"/>
+            <a:srgbClr val="F43F5E"/>
           </a:solidFill>
           <a:ln>
             <a:noFill/>
@@ -6750,14 +6922,14 @@
       </p:sp>
       <p:sp>
         <p:nvSpPr>
-          <p:cNvPr id="12" name="TextBox 11"/>
+          <p:cNvPr id="13" name="TextBox 12"/>
           <p:cNvSpPr txBox="1"/>
           <p:nvPr/>
         </p:nvSpPr>
         <p:spPr>
           <a:xfrm>
-            <a:off x="4389120" y="1600200"/>
-            <a:ext cx="457200" cy="457200"/>
+            <a:off x="4361688" y="1572768"/>
+            <a:ext cx="411480" cy="411480"/>
           </a:xfrm>
           <a:prstGeom prst="rect">
             <a:avLst/>
@@ -6771,9 +6943,9 @@
           <a:lstStyle/>
           <a:p>
             <a:pPr algn="ctr">
-              <a:defRPr sz="1400" b="1">
+              <a:defRPr sz="1200" b="1">
                 <a:solidFill>
-                  <a:srgbClr val="FFFFFF"/>
+                  <a:srgbClr val="F0F4FC"/>
                 </a:solidFill>
                 <a:latin typeface="Microsoft YaHei"/>
               </a:defRPr>
@@ -6786,14 +6958,14 @@
       </p:sp>
       <p:sp>
         <p:nvSpPr>
-          <p:cNvPr id="13" name="TextBox 12"/>
+          <p:cNvPr id="14" name="TextBox 13"/>
           <p:cNvSpPr txBox="1"/>
           <p:nvPr/>
         </p:nvSpPr>
         <p:spPr>
           <a:xfrm>
-            <a:off x="4983480" y="1554480"/>
-            <a:ext cx="2468880" cy="640080"/>
+            <a:off x="4892040" y="1536192"/>
+            <a:ext cx="2560320" cy="594360"/>
           </a:xfrm>
           <a:prstGeom prst="rect">
             <a:avLst/>
@@ -6807,9 +6979,9 @@
           <a:lstStyle/>
           <a:p>
             <a:pPr algn="l">
-              <a:defRPr sz="1300" b="0">
+              <a:defRPr sz="1200" b="0">
                 <a:solidFill>
-                  <a:srgbClr val="CBD5E8"/>
+                  <a:srgbClr val="A0AEC4"/>
                 </a:solidFill>
                 <a:latin typeface="Microsoft YaHei"/>
               </a:defRPr>
@@ -6822,24 +6994,24 @@
       </p:sp>
       <p:sp>
         <p:nvSpPr>
-          <p:cNvPr id="14" name="Rounded Rectangle 13"/>
-          <p:cNvSpPr/>
-          <p:nvPr/>
-        </p:nvSpPr>
-        <p:spPr>
-          <a:xfrm>
-            <a:off x="7955280" y="1371600"/>
-            <a:ext cx="3383280" cy="1005840"/>
+          <p:cNvPr id="15" name="Rounded Rectangle 14"/>
+          <p:cNvSpPr/>
+          <p:nvPr/>
+        </p:nvSpPr>
+        <p:spPr>
+          <a:xfrm>
+            <a:off x="7909560" y="1371600"/>
+            <a:ext cx="3383280" cy="960120"/>
           </a:xfrm>
           <a:prstGeom prst="roundRect">
             <a:avLst/>
           </a:prstGeom>
           <a:solidFill>
-            <a:srgbClr val="141E33"/>
-          </a:solidFill>
-          <a:ln w="19050">
+            <a:srgbClr val="161F35"/>
+          </a:solidFill>
+          <a:ln w="12700">
             <a:solidFill>
-              <a:srgbClr val="EF4444"/>
+              <a:srgbClr val="253350"/>
             </a:solidFill>
           </a:ln>
         </p:spPr>
@@ -6867,20 +7039,20 @@
       </p:sp>
       <p:sp>
         <p:nvSpPr>
-          <p:cNvPr id="15" name="Oval 14"/>
-          <p:cNvSpPr/>
-          <p:nvPr/>
-        </p:nvSpPr>
-        <p:spPr>
-          <a:xfrm>
-            <a:off x="8092440" y="1600200"/>
-            <a:ext cx="457200" cy="457200"/>
+          <p:cNvPr id="16" name="Oval 15"/>
+          <p:cNvSpPr/>
+          <p:nvPr/>
+        </p:nvSpPr>
+        <p:spPr>
+          <a:xfrm>
+            <a:off x="8019288" y="1572768"/>
+            <a:ext cx="411480" cy="411480"/>
           </a:xfrm>
           <a:prstGeom prst="ellipse">
             <a:avLst/>
           </a:prstGeom>
           <a:solidFill>
-            <a:srgbClr val="EF4444"/>
+            <a:srgbClr val="F43F5E"/>
           </a:solidFill>
           <a:ln>
             <a:noFill/>
@@ -6910,14 +7082,14 @@
       </p:sp>
       <p:sp>
         <p:nvSpPr>
-          <p:cNvPr id="16" name="TextBox 15"/>
+          <p:cNvPr id="17" name="TextBox 16"/>
           <p:cNvSpPr txBox="1"/>
           <p:nvPr/>
         </p:nvSpPr>
         <p:spPr>
           <a:xfrm>
-            <a:off x="8092440" y="1600200"/>
-            <a:ext cx="457200" cy="457200"/>
+            <a:off x="8019288" y="1572768"/>
+            <a:ext cx="411480" cy="411480"/>
           </a:xfrm>
           <a:prstGeom prst="rect">
             <a:avLst/>
@@ -6931,9 +7103,9 @@
           <a:lstStyle/>
           <a:p>
             <a:pPr algn="ctr">
-              <a:defRPr sz="1400" b="1">
+              <a:defRPr sz="1200" b="1">
                 <a:solidFill>
-                  <a:srgbClr val="FFFFFF"/>
+                  <a:srgbClr val="F0F4FC"/>
                 </a:solidFill>
                 <a:latin typeface="Microsoft YaHei"/>
               </a:defRPr>
@@ -6946,14 +7118,14 @@
       </p:sp>
       <p:sp>
         <p:nvSpPr>
-          <p:cNvPr id="17" name="TextBox 16"/>
+          <p:cNvPr id="18" name="TextBox 17"/>
           <p:cNvSpPr txBox="1"/>
           <p:nvPr/>
         </p:nvSpPr>
         <p:spPr>
           <a:xfrm>
-            <a:off x="8686800" y="1554480"/>
-            <a:ext cx="2468880" cy="640080"/>
+            <a:off x="8549640" y="1536192"/>
+            <a:ext cx="2560320" cy="594360"/>
           </a:xfrm>
           <a:prstGeom prst="rect">
             <a:avLst/>
@@ -6967,9 +7139,9 @@
           <a:lstStyle/>
           <a:p>
             <a:pPr algn="l">
-              <a:defRPr sz="1300" b="0">
+              <a:defRPr sz="1200" b="0">
                 <a:solidFill>
-                  <a:srgbClr val="CBD5E8"/>
+                  <a:srgbClr val="A0AEC4"/>
                 </a:solidFill>
                 <a:latin typeface="Microsoft YaHei"/>
               </a:defRPr>
@@ -6982,24 +7154,24 @@
       </p:sp>
       <p:sp>
         <p:nvSpPr>
-          <p:cNvPr id="18" name="Rounded Rectangle 17"/>
-          <p:cNvSpPr/>
-          <p:nvPr/>
-        </p:nvSpPr>
-        <p:spPr>
-          <a:xfrm>
-            <a:off x="548640" y="2606040"/>
-            <a:ext cx="3383280" cy="1005840"/>
+          <p:cNvPr id="19" name="Rounded Rectangle 18"/>
+          <p:cNvSpPr/>
+          <p:nvPr/>
+        </p:nvSpPr>
+        <p:spPr>
+          <a:xfrm>
+            <a:off x="594360" y="2606040"/>
+            <a:ext cx="3383280" cy="960120"/>
           </a:xfrm>
           <a:prstGeom prst="roundRect">
             <a:avLst/>
           </a:prstGeom>
           <a:solidFill>
-            <a:srgbClr val="141E33"/>
-          </a:solidFill>
-          <a:ln w="19050">
+            <a:srgbClr val="161F35"/>
+          </a:solidFill>
+          <a:ln w="12700">
             <a:solidFill>
-              <a:srgbClr val="EF4444"/>
+              <a:srgbClr val="253350"/>
             </a:solidFill>
           </a:ln>
         </p:spPr>
@@ -7027,20 +7199,20 @@
       </p:sp>
       <p:sp>
         <p:nvSpPr>
-          <p:cNvPr id="19" name="Oval 18"/>
-          <p:cNvSpPr/>
-          <p:nvPr/>
-        </p:nvSpPr>
-        <p:spPr>
-          <a:xfrm>
-            <a:off x="685800" y="2834640"/>
-            <a:ext cx="457200" cy="457200"/>
+          <p:cNvPr id="20" name="Oval 19"/>
+          <p:cNvSpPr/>
+          <p:nvPr/>
+        </p:nvSpPr>
+        <p:spPr>
+          <a:xfrm>
+            <a:off x="704088" y="2807208"/>
+            <a:ext cx="411480" cy="411480"/>
           </a:xfrm>
           <a:prstGeom prst="ellipse">
             <a:avLst/>
           </a:prstGeom>
           <a:solidFill>
-            <a:srgbClr val="EF4444"/>
+            <a:srgbClr val="F43F5E"/>
           </a:solidFill>
           <a:ln>
             <a:noFill/>
@@ -7070,14 +7242,14 @@
       </p:sp>
       <p:sp>
         <p:nvSpPr>
-          <p:cNvPr id="20" name="TextBox 19"/>
+          <p:cNvPr id="21" name="TextBox 20"/>
           <p:cNvSpPr txBox="1"/>
           <p:nvPr/>
         </p:nvSpPr>
         <p:spPr>
           <a:xfrm>
-            <a:off x="685800" y="2834640"/>
-            <a:ext cx="457200" cy="457200"/>
+            <a:off x="704088" y="2807208"/>
+            <a:ext cx="411480" cy="411480"/>
           </a:xfrm>
           <a:prstGeom prst="rect">
             <a:avLst/>
@@ -7091,9 +7263,9 @@
           <a:lstStyle/>
           <a:p>
             <a:pPr algn="ctr">
-              <a:defRPr sz="1400" b="1">
+              <a:defRPr sz="1200" b="1">
                 <a:solidFill>
-                  <a:srgbClr val="FFFFFF"/>
+                  <a:srgbClr val="F0F4FC"/>
                 </a:solidFill>
                 <a:latin typeface="Microsoft YaHei"/>
               </a:defRPr>
@@ -7106,14 +7278,14 @@
       </p:sp>
       <p:sp>
         <p:nvSpPr>
-          <p:cNvPr id="21" name="TextBox 20"/>
+          <p:cNvPr id="22" name="TextBox 21"/>
           <p:cNvSpPr txBox="1"/>
           <p:nvPr/>
         </p:nvSpPr>
         <p:spPr>
           <a:xfrm>
-            <a:off x="1280160" y="2788920"/>
-            <a:ext cx="2468880" cy="640080"/>
+            <a:off x="1234440" y="2770632"/>
+            <a:ext cx="2560320" cy="594360"/>
           </a:xfrm>
           <a:prstGeom prst="rect">
             <a:avLst/>
@@ -7127,9 +7299,9 @@
           <a:lstStyle/>
           <a:p>
             <a:pPr algn="l">
-              <a:defRPr sz="1300" b="0">
+              <a:defRPr sz="1200" b="0">
                 <a:solidFill>
-                  <a:srgbClr val="CBD5E8"/>
+                  <a:srgbClr val="A0AEC4"/>
                 </a:solidFill>
                 <a:latin typeface="Microsoft YaHei"/>
               </a:defRPr>
@@ -7142,20 +7314,20 @@
       </p:sp>
       <p:sp>
         <p:nvSpPr>
-          <p:cNvPr id="22" name="Rectangle 21"/>
+          <p:cNvPr id="23" name="Rectangle 22"/>
           <p:cNvSpPr/>
           <p:nvPr/>
         </p:nvSpPr>
         <p:spPr>
           <a:xfrm>
             <a:off x="0" y="6446520"/>
-            <a:ext cx="12191695" cy="19050"/>
-          </a:xfrm>
-          <a:prstGeom prst="rect">
-            <a:avLst/>
-          </a:prstGeom>
-          <a:solidFill>
-            <a:srgbClr val="2D3B55"/>
+            <a:ext cx="12191695" cy="12700"/>
+          </a:xfrm>
+          <a:prstGeom prst="rect">
+            <a:avLst/>
+          </a:prstGeom>
+          <a:solidFill>
+            <a:srgbClr val="253350"/>
           </a:solidFill>
           <a:ln>
             <a:noFill/>
@@ -7185,14 +7357,14 @@
       </p:sp>
       <p:sp>
         <p:nvSpPr>
-          <p:cNvPr id="23" name="TextBox 22"/>
+          <p:cNvPr id="24" name="TextBox 23"/>
           <p:cNvSpPr txBox="1"/>
           <p:nvPr/>
         </p:nvSpPr>
         <p:spPr>
           <a:xfrm>
-            <a:off x="457200" y="6492240"/>
-            <a:ext cx="5486400" cy="274320"/>
+            <a:off x="731520" y="6492240"/>
+            <a:ext cx="4572000" cy="274320"/>
           </a:xfrm>
           <a:prstGeom prst="rect">
             <a:avLst/>
@@ -7208,20 +7380,20 @@
             <a:pPr algn="l">
               <a:defRPr sz="900" b="0">
                 <a:solidFill>
-                  <a:srgbClr val="6B7B9E"/>
+                  <a:srgbClr val="607090"/>
                 </a:solidFill>
                 <a:latin typeface="Microsoft YaHei"/>
               </a:defRPr>
             </a:pPr>
             <a:r>
-              <a:t>模块16：合规规范</a:t>
-            </a:r>
-          </a:p>
-        </p:txBody>
-      </p:sp>
-      <p:sp>
-        <p:nvSpPr>
-          <p:cNvPr id="24" name="TextBox 23"/>
+              <a:t>模块16 · 合规规范</a:t>
+            </a:r>
+          </a:p>
+        </p:txBody>
+      </p:sp>
+      <p:sp>
+        <p:nvSpPr>
+          <p:cNvPr id="25" name="TextBox 24"/>
           <p:cNvSpPr txBox="1"/>
           <p:nvPr/>
         </p:nvSpPr>
@@ -7244,7 +7416,7 @@
             <a:pPr algn="r">
               <a:defRPr sz="900" b="0">
                 <a:solidFill>
-                  <a:srgbClr val="6B7B9E"/>
+                  <a:srgbClr val="607090"/>
                 </a:solidFill>
                 <a:latin typeface="Microsoft YaHei"/>
               </a:defRPr>
@@ -7269,7 +7441,7 @@
     <p:bg>
       <p:bgPr>
         <a:solidFill>
-          <a:srgbClr val="0B1120"/>
+          <a:srgbClr val="0A0E1A"/>
         </a:solidFill>
         <a:effectLst/>
       </p:bgPr>
@@ -7290,13 +7462,13 @@
         <p:spPr>
           <a:xfrm>
             <a:off x="0" y="0"/>
-            <a:ext cx="12191695" cy="1051560"/>
-          </a:xfrm>
-          <a:prstGeom prst="rect">
-            <a:avLst/>
-          </a:prstGeom>
-          <a:solidFill>
-            <a:srgbClr val="141E33"/>
+            <a:ext cx="12191695" cy="38100"/>
+          </a:xfrm>
+          <a:prstGeom prst="rect">
+            <a:avLst/>
+          </a:prstGeom>
+          <a:solidFill>
+            <a:srgbClr val="F43F5E"/>
           </a:solidFill>
           <a:ln>
             <a:noFill/>
@@ -7332,14 +7504,14 @@
         </p:nvSpPr>
         <p:spPr>
           <a:xfrm>
-            <a:off x="0" y="0"/>
-            <a:ext cx="109728" cy="1051560"/>
-          </a:xfrm>
-          <a:prstGeom prst="rect">
-            <a:avLst/>
-          </a:prstGeom>
-          <a:solidFill>
-            <a:srgbClr val="EF4444"/>
+            <a:off x="0" y="38100"/>
+            <a:ext cx="12191695" cy="914400"/>
+          </a:xfrm>
+          <a:prstGeom prst="rect">
+            <a:avLst/>
+          </a:prstGeom>
+          <a:solidFill>
+            <a:srgbClr val="161F35"/>
           </a:solidFill>
           <a:ln>
             <a:noFill/>
@@ -7369,14 +7541,57 @@
       </p:sp>
       <p:sp>
         <p:nvSpPr>
-          <p:cNvPr id="4" name="TextBox 3"/>
+          <p:cNvPr id="4" name="Rectangle 3"/>
+          <p:cNvSpPr/>
+          <p:nvPr/>
+        </p:nvSpPr>
+        <p:spPr>
+          <a:xfrm>
+            <a:off x="0" y="38100"/>
+            <a:ext cx="91440" cy="914400"/>
+          </a:xfrm>
+          <a:prstGeom prst="rect">
+            <a:avLst/>
+          </a:prstGeom>
+          <a:solidFill>
+            <a:srgbClr val="F43F5E"/>
+          </a:solidFill>
+          <a:ln>
+            <a:noFill/>
+          </a:ln>
+        </p:spPr>
+        <p:style>
+          <a:lnRef idx="1">
+            <a:schemeClr val="accent1"/>
+          </a:lnRef>
+          <a:fillRef idx="3">
+            <a:schemeClr val="accent1"/>
+          </a:fillRef>
+          <a:effectRef idx="2">
+            <a:schemeClr val="accent1"/>
+          </a:effectRef>
+          <a:fontRef idx="minor">
+            <a:schemeClr val="lt1"/>
+          </a:fontRef>
+        </p:style>
+        <p:txBody>
+          <a:bodyPr rtlCol="0" anchor="ctr"/>
+          <a:lstStyle/>
+          <a:p>
+            <a:pPr algn="ctr"/>
+          </a:p>
+        </p:txBody>
+      </p:sp>
+      <p:sp>
+        <p:nvSpPr>
+          <p:cNvPr id="5" name="TextBox 4"/>
           <p:cNvSpPr txBox="1"/>
           <p:nvPr/>
         </p:nvSpPr>
         <p:spPr>
           <a:xfrm>
-            <a:off x="548640" y="182880"/>
-            <a:ext cx="10058400" cy="640080"/>
+            <a:off x="731520" y="137160"/>
+            <a:ext cx="10728655" cy="640080"/>
           </a:xfrm>
           <a:prstGeom prst="rect">
             <a:avLst/>
@@ -7390,9 +7605,9 @@
           <a:lstStyle/>
           <a:p>
             <a:pPr algn="l">
-              <a:defRPr sz="2600" b="1">
+              <a:defRPr sz="2400" b="1">
                 <a:solidFill>
-                  <a:srgbClr val="FFFFFF"/>
+                  <a:srgbClr val="F0F4FC"/>
                 </a:solidFill>
                 <a:latin typeface="Microsoft YaHei"/>
               </a:defRPr>
@@ -7405,20 +7620,20 @@
       </p:sp>
       <p:sp>
         <p:nvSpPr>
-          <p:cNvPr id="5" name="Rectangle 4"/>
-          <p:cNvSpPr/>
-          <p:nvPr/>
-        </p:nvSpPr>
-        <p:spPr>
-          <a:xfrm>
-            <a:off x="0" y="1051560"/>
-            <a:ext cx="12191695" cy="25400"/>
-          </a:xfrm>
-          <a:prstGeom prst="rect">
-            <a:avLst/>
-          </a:prstGeom>
-          <a:solidFill>
-            <a:srgbClr val="EF4444"/>
+          <p:cNvPr id="6" name="Rectangle 5"/>
+          <p:cNvSpPr/>
+          <p:nvPr/>
+        </p:nvSpPr>
+        <p:spPr>
+          <a:xfrm>
+            <a:off x="0" y="1078992"/>
+            <a:ext cx="12191695" cy="12700"/>
+          </a:xfrm>
+          <a:prstGeom prst="rect">
+            <a:avLst/>
+          </a:prstGeom>
+          <a:solidFill>
+            <a:srgbClr val="253350"/>
           </a:solidFill>
           <a:ln>
             <a:noFill/>
@@ -7448,15 +7663,15 @@
       </p:sp>
       <p:graphicFrame>
         <p:nvGraphicFramePr>
-          <p:cNvPr id="6" name="Table 5"/>
+          <p:cNvPr id="7" name="Table 6"/>
           <p:cNvGraphicFramePr>
             <a:graphicFrameLocks noGrp="1"/>
           </p:cNvGraphicFramePr>
           <p:nvPr/>
         </p:nvGraphicFramePr>
         <p:xfrm>
-          <a:off x="548640" y="1463040"/>
-          <a:ext cx="11064240" cy="3566160"/>
+          <a:off x="548640" y="1371600"/>
+          <a:ext cx="11064240" cy="3291840"/>
         </p:xfrm>
         <a:graphic>
           <a:graphicData uri="http://schemas.openxmlformats.org/drawingml/2006/table">
@@ -7469,16 +7684,16 @@
                 <a:gridCol w="3688080"/>
                 <a:gridCol w="3688080"/>
               </a:tblGrid>
-              <a:tr h="594360">
+              <a:tr h="548640">
                 <a:tc>
                   <a:txBody>
                     <a:bodyPr/>
                     <a:lstStyle/>
                     <a:p>
                       <a:pPr algn="ctr">
-                        <a:defRPr sz="1400" b="1">
+                        <a:defRPr sz="1300" b="1">
                           <a:solidFill>
-                            <a:srgbClr val="FFFFFF"/>
+                            <a:srgbClr val="F0F4FC"/>
                           </a:solidFill>
                           <a:latin typeface="Microsoft YaHei"/>
                         </a:defRPr>
@@ -7490,7 +7705,7 @@
                   </a:txBody>
                   <a:tcPr anchor="ctr">
                     <a:solidFill>
-                      <a:srgbClr val="EF4444"/>
+                      <a:srgbClr val="F43F5E"/>
                     </a:solidFill>
                   </a:tcPr>
                 </a:tc>
@@ -7500,9 +7715,9 @@
                     <a:lstStyle/>
                     <a:p>
                       <a:pPr algn="ctr">
-                        <a:defRPr sz="1400" b="1">
+                        <a:defRPr sz="1300" b="1">
                           <a:solidFill>
-                            <a:srgbClr val="FFFFFF"/>
+                            <a:srgbClr val="F0F4FC"/>
                           </a:solidFill>
                           <a:latin typeface="Microsoft YaHei"/>
                         </a:defRPr>
@@ -7514,7 +7729,7 @@
                   </a:txBody>
                   <a:tcPr anchor="ctr">
                     <a:solidFill>
-                      <a:srgbClr val="EF4444"/>
+                      <a:srgbClr val="F43F5E"/>
                     </a:solidFill>
                   </a:tcPr>
                 </a:tc>
@@ -7524,9 +7739,9 @@
                     <a:lstStyle/>
                     <a:p>
                       <a:pPr algn="ctr">
-                        <a:defRPr sz="1400" b="1">
+                        <a:defRPr sz="1300" b="1">
                           <a:solidFill>
-                            <a:srgbClr val="FFFFFF"/>
+                            <a:srgbClr val="F0F4FC"/>
                           </a:solidFill>
                           <a:latin typeface="Microsoft YaHei"/>
                         </a:defRPr>
@@ -7538,21 +7753,21 @@
                   </a:txBody>
                   <a:tcPr anchor="ctr">
                     <a:solidFill>
-                      <a:srgbClr val="EF4444"/>
+                      <a:srgbClr val="F43F5E"/>
                     </a:solidFill>
                   </a:tcPr>
                 </a:tc>
               </a:tr>
-              <a:tr h="594360">
+              <a:tr h="548640">
                 <a:tc>
                   <a:txBody>
                     <a:bodyPr/>
                     <a:lstStyle/>
                     <a:p>
                       <a:pPr algn="ctr">
-                        <a:defRPr sz="1300">
+                        <a:defRPr sz="1200">
                           <a:solidFill>
-                            <a:srgbClr val="CBD5E8"/>
+                            <a:srgbClr val="A0AEC4"/>
                           </a:solidFill>
                           <a:latin typeface="Microsoft YaHei"/>
                         </a:defRPr>
@@ -7564,7 +7779,7 @@
                   </a:txBody>
                   <a:tcPr anchor="ctr">
                     <a:solidFill>
-                      <a:srgbClr val="141E33"/>
+                      <a:srgbClr val="161F35"/>
                     </a:solidFill>
                   </a:tcPr>
                 </a:tc>
@@ -7574,9 +7789,9 @@
                     <a:lstStyle/>
                     <a:p>
                       <a:pPr algn="ctr">
-                        <a:defRPr sz="1300">
+                        <a:defRPr sz="1200">
                           <a:solidFill>
-                            <a:srgbClr val="CBD5E8"/>
+                            <a:srgbClr val="A0AEC4"/>
                           </a:solidFill>
                           <a:latin typeface="Microsoft YaHei"/>
                         </a:defRPr>
@@ -7588,7 +7803,7 @@
                   </a:txBody>
                   <a:tcPr anchor="ctr">
                     <a:solidFill>
-                      <a:srgbClr val="141E33"/>
+                      <a:srgbClr val="161F35"/>
                     </a:solidFill>
                   </a:tcPr>
                 </a:tc>
@@ -7598,9 +7813,9 @@
                     <a:lstStyle/>
                     <a:p>
                       <a:pPr algn="ctr">
-                        <a:defRPr sz="1300">
+                        <a:defRPr sz="1200">
                           <a:solidFill>
-                            <a:srgbClr val="CBD5E8"/>
+                            <a:srgbClr val="A0AEC4"/>
                           </a:solidFill>
                           <a:latin typeface="Microsoft YaHei"/>
                         </a:defRPr>
@@ -7612,21 +7827,21 @@
                   </a:txBody>
                   <a:tcPr anchor="ctr">
                     <a:solidFill>
-                      <a:srgbClr val="141E33"/>
+                      <a:srgbClr val="161F35"/>
                     </a:solidFill>
                   </a:tcPr>
                 </a:tc>
               </a:tr>
-              <a:tr h="594360">
+              <a:tr h="548640">
                 <a:tc>
                   <a:txBody>
                     <a:bodyPr/>
                     <a:lstStyle/>
                     <a:p>
                       <a:pPr algn="ctr">
-                        <a:defRPr sz="1300">
+                        <a:defRPr sz="1200">
                           <a:solidFill>
-                            <a:srgbClr val="CBD5E8"/>
+                            <a:srgbClr val="A0AEC4"/>
                           </a:solidFill>
                           <a:latin typeface="Microsoft YaHei"/>
                         </a:defRPr>
@@ -7638,7 +7853,7 @@
                   </a:txBody>
                   <a:tcPr anchor="ctr">
                     <a:solidFill>
-                      <a:srgbClr val="1A2842"/>
+                      <a:srgbClr val="1C2842"/>
                     </a:solidFill>
                   </a:tcPr>
                 </a:tc>
@@ -7648,9 +7863,9 @@
                     <a:lstStyle/>
                     <a:p>
                       <a:pPr algn="ctr">
-                        <a:defRPr sz="1300">
+                        <a:defRPr sz="1200">
                           <a:solidFill>
-                            <a:srgbClr val="CBD5E8"/>
+                            <a:srgbClr val="A0AEC4"/>
                           </a:solidFill>
                           <a:latin typeface="Microsoft YaHei"/>
                         </a:defRPr>
@@ -7662,7 +7877,7 @@
                   </a:txBody>
                   <a:tcPr anchor="ctr">
                     <a:solidFill>
-                      <a:srgbClr val="1A2842"/>
+                      <a:srgbClr val="1C2842"/>
                     </a:solidFill>
                   </a:tcPr>
                 </a:tc>
@@ -7672,9 +7887,9 @@
                     <a:lstStyle/>
                     <a:p>
                       <a:pPr algn="ctr">
-                        <a:defRPr sz="1300">
+                        <a:defRPr sz="1200">
                           <a:solidFill>
-                            <a:srgbClr val="CBD5E8"/>
+                            <a:srgbClr val="A0AEC4"/>
                           </a:solidFill>
                           <a:latin typeface="Microsoft YaHei"/>
                         </a:defRPr>
@@ -7686,21 +7901,21 @@
                   </a:txBody>
                   <a:tcPr anchor="ctr">
                     <a:solidFill>
-                      <a:srgbClr val="1A2842"/>
+                      <a:srgbClr val="1C2842"/>
                     </a:solidFill>
                   </a:tcPr>
                 </a:tc>
               </a:tr>
-              <a:tr h="594360">
+              <a:tr h="548640">
                 <a:tc>
                   <a:txBody>
                     <a:bodyPr/>
                     <a:lstStyle/>
                     <a:p>
                       <a:pPr algn="ctr">
-                        <a:defRPr sz="1300">
+                        <a:defRPr sz="1200">
                           <a:solidFill>
-                            <a:srgbClr val="CBD5E8"/>
+                            <a:srgbClr val="A0AEC4"/>
                           </a:solidFill>
                           <a:latin typeface="Microsoft YaHei"/>
                         </a:defRPr>
@@ -7712,7 +7927,7 @@
                   </a:txBody>
                   <a:tcPr anchor="ctr">
                     <a:solidFill>
-                      <a:srgbClr val="141E33"/>
+                      <a:srgbClr val="161F35"/>
                     </a:solidFill>
                   </a:tcPr>
                 </a:tc>
@@ -7722,9 +7937,9 @@
                     <a:lstStyle/>
                     <a:p>
                       <a:pPr algn="ctr">
-                        <a:defRPr sz="1300">
+                        <a:defRPr sz="1200">
                           <a:solidFill>
-                            <a:srgbClr val="CBD5E8"/>
+                            <a:srgbClr val="A0AEC4"/>
                           </a:solidFill>
                           <a:latin typeface="Microsoft YaHei"/>
                         </a:defRPr>
@@ -7736,7 +7951,7 @@
                   </a:txBody>
                   <a:tcPr anchor="ctr">
                     <a:solidFill>
-                      <a:srgbClr val="141E33"/>
+                      <a:srgbClr val="161F35"/>
                     </a:solidFill>
                   </a:tcPr>
                 </a:tc>
@@ -7746,9 +7961,9 @@
                     <a:lstStyle/>
                     <a:p>
                       <a:pPr algn="ctr">
-                        <a:defRPr sz="1300">
+                        <a:defRPr sz="1200">
                           <a:solidFill>
-                            <a:srgbClr val="CBD5E8"/>
+                            <a:srgbClr val="A0AEC4"/>
                           </a:solidFill>
                           <a:latin typeface="Microsoft YaHei"/>
                         </a:defRPr>
@@ -7760,21 +7975,21 @@
                   </a:txBody>
                   <a:tcPr anchor="ctr">
                     <a:solidFill>
-                      <a:srgbClr val="141E33"/>
+                      <a:srgbClr val="161F35"/>
                     </a:solidFill>
                   </a:tcPr>
                 </a:tc>
               </a:tr>
-              <a:tr h="594360">
+              <a:tr h="548640">
                 <a:tc>
                   <a:txBody>
                     <a:bodyPr/>
                     <a:lstStyle/>
                     <a:p>
                       <a:pPr algn="ctr">
-                        <a:defRPr sz="1300">
+                        <a:defRPr sz="1200">
                           <a:solidFill>
-                            <a:srgbClr val="CBD5E8"/>
+                            <a:srgbClr val="A0AEC4"/>
                           </a:solidFill>
                           <a:latin typeface="Microsoft YaHei"/>
                         </a:defRPr>
@@ -7786,7 +8001,7 @@
                   </a:txBody>
                   <a:tcPr anchor="ctr">
                     <a:solidFill>
-                      <a:srgbClr val="1A2842"/>
+                      <a:srgbClr val="1C2842"/>
                     </a:solidFill>
                   </a:tcPr>
                 </a:tc>
@@ -7796,9 +8011,9 @@
                     <a:lstStyle/>
                     <a:p>
                       <a:pPr algn="ctr">
-                        <a:defRPr sz="1300">
+                        <a:defRPr sz="1200">
                           <a:solidFill>
-                            <a:srgbClr val="CBD5E8"/>
+                            <a:srgbClr val="A0AEC4"/>
                           </a:solidFill>
                           <a:latin typeface="Microsoft YaHei"/>
                         </a:defRPr>
@@ -7810,7 +8025,7 @@
                   </a:txBody>
                   <a:tcPr anchor="ctr">
                     <a:solidFill>
-                      <a:srgbClr val="1A2842"/>
+                      <a:srgbClr val="1C2842"/>
                     </a:solidFill>
                   </a:tcPr>
                 </a:tc>
@@ -7820,9 +8035,9 @@
                     <a:lstStyle/>
                     <a:p>
                       <a:pPr algn="ctr">
-                        <a:defRPr sz="1300">
+                        <a:defRPr sz="1200">
                           <a:solidFill>
-                            <a:srgbClr val="CBD5E8"/>
+                            <a:srgbClr val="A0AEC4"/>
                           </a:solidFill>
                           <a:latin typeface="Microsoft YaHei"/>
                         </a:defRPr>
@@ -7834,21 +8049,21 @@
                   </a:txBody>
                   <a:tcPr anchor="ctr">
                     <a:solidFill>
-                      <a:srgbClr val="1A2842"/>
+                      <a:srgbClr val="1C2842"/>
                     </a:solidFill>
                   </a:tcPr>
                 </a:tc>
               </a:tr>
-              <a:tr h="594360">
+              <a:tr h="548640">
                 <a:tc>
                   <a:txBody>
                     <a:bodyPr/>
                     <a:lstStyle/>
                     <a:p>
                       <a:pPr algn="ctr">
-                        <a:defRPr sz="1300">
+                        <a:defRPr sz="1200">
                           <a:solidFill>
-                            <a:srgbClr val="CBD5E8"/>
+                            <a:srgbClr val="A0AEC4"/>
                           </a:solidFill>
                           <a:latin typeface="Microsoft YaHei"/>
                         </a:defRPr>
@@ -7860,7 +8075,7 @@
                   </a:txBody>
                   <a:tcPr anchor="ctr">
                     <a:solidFill>
-                      <a:srgbClr val="141E33"/>
+                      <a:srgbClr val="161F35"/>
                     </a:solidFill>
                   </a:tcPr>
                 </a:tc>
@@ -7870,9 +8085,9 @@
                     <a:lstStyle/>
                     <a:p>
                       <a:pPr algn="ctr">
-                        <a:defRPr sz="1300">
+                        <a:defRPr sz="1200">
                           <a:solidFill>
-                            <a:srgbClr val="CBD5E8"/>
+                            <a:srgbClr val="A0AEC4"/>
                           </a:solidFill>
                           <a:latin typeface="Microsoft YaHei"/>
                         </a:defRPr>
@@ -7884,7 +8099,7 @@
                   </a:txBody>
                   <a:tcPr anchor="ctr">
                     <a:solidFill>
-                      <a:srgbClr val="141E33"/>
+                      <a:srgbClr val="161F35"/>
                     </a:solidFill>
                   </a:tcPr>
                 </a:tc>
@@ -7894,9 +8109,9 @@
                     <a:lstStyle/>
                     <a:p>
                       <a:pPr algn="ctr">
-                        <a:defRPr sz="1300">
+                        <a:defRPr sz="1200">
                           <a:solidFill>
-                            <a:srgbClr val="CBD5E8"/>
+                            <a:srgbClr val="A0AEC4"/>
                           </a:solidFill>
                           <a:latin typeface="Microsoft YaHei"/>
                         </a:defRPr>
@@ -7908,7 +8123,7 @@
                   </a:txBody>
                   <a:tcPr anchor="ctr">
                     <a:solidFill>
-                      <a:srgbClr val="141E33"/>
+                      <a:srgbClr val="161F35"/>
                     </a:solidFill>
                   </a:tcPr>
                 </a:tc>
@@ -7919,20 +8134,20 @@
       </p:graphicFrame>
       <p:sp>
         <p:nvSpPr>
-          <p:cNvPr id="7" name="Rectangle 6"/>
+          <p:cNvPr id="8" name="Rectangle 7"/>
           <p:cNvSpPr/>
           <p:nvPr/>
         </p:nvSpPr>
         <p:spPr>
           <a:xfrm>
             <a:off x="0" y="6446520"/>
-            <a:ext cx="12191695" cy="19050"/>
-          </a:xfrm>
-          <a:prstGeom prst="rect">
-            <a:avLst/>
-          </a:prstGeom>
-          <a:solidFill>
-            <a:srgbClr val="2D3B55"/>
+            <a:ext cx="12191695" cy="12700"/>
+          </a:xfrm>
+          <a:prstGeom prst="rect">
+            <a:avLst/>
+          </a:prstGeom>
+          <a:solidFill>
+            <a:srgbClr val="253350"/>
           </a:solidFill>
           <a:ln>
             <a:noFill/>
@@ -7962,14 +8177,14 @@
       </p:sp>
       <p:sp>
         <p:nvSpPr>
-          <p:cNvPr id="8" name="TextBox 7"/>
+          <p:cNvPr id="9" name="TextBox 8"/>
           <p:cNvSpPr txBox="1"/>
           <p:nvPr/>
         </p:nvSpPr>
         <p:spPr>
           <a:xfrm>
-            <a:off x="457200" y="6492240"/>
-            <a:ext cx="5486400" cy="274320"/>
+            <a:off x="731520" y="6492240"/>
+            <a:ext cx="4572000" cy="274320"/>
           </a:xfrm>
           <a:prstGeom prst="rect">
             <a:avLst/>
@@ -7985,20 +8200,20 @@
             <a:pPr algn="l">
               <a:defRPr sz="900" b="0">
                 <a:solidFill>
-                  <a:srgbClr val="6B7B9E"/>
+                  <a:srgbClr val="607090"/>
                 </a:solidFill>
                 <a:latin typeface="Microsoft YaHei"/>
               </a:defRPr>
             </a:pPr>
             <a:r>
-              <a:t>模块16：合规规范</a:t>
-            </a:r>
-          </a:p>
-        </p:txBody>
-      </p:sp>
-      <p:sp>
-        <p:nvSpPr>
-          <p:cNvPr id="9" name="TextBox 8"/>
+              <a:t>模块16 · 合规规范</a:t>
+            </a:r>
+          </a:p>
+        </p:txBody>
+      </p:sp>
+      <p:sp>
+        <p:nvSpPr>
+          <p:cNvPr id="10" name="TextBox 9"/>
           <p:cNvSpPr txBox="1"/>
           <p:nvPr/>
         </p:nvSpPr>
@@ -8021,7 +8236,7 @@
             <a:pPr algn="r">
               <a:defRPr sz="900" b="0">
                 <a:solidFill>
-                  <a:srgbClr val="6B7B9E"/>
+                  <a:srgbClr val="607090"/>
                 </a:solidFill>
                 <a:latin typeface="Microsoft YaHei"/>
               </a:defRPr>
@@ -8046,7 +8261,7 @@
     <p:bg>
       <p:bgPr>
         <a:solidFill>
-          <a:srgbClr val="0B1120"/>
+          <a:srgbClr val="0A0E1A"/>
         </a:solidFill>
         <a:effectLst/>
       </p:bgPr>
@@ -8067,13 +8282,13 @@
         <p:spPr>
           <a:xfrm>
             <a:off x="0" y="0"/>
-            <a:ext cx="12191695" cy="1051560"/>
-          </a:xfrm>
-          <a:prstGeom prst="rect">
-            <a:avLst/>
-          </a:prstGeom>
-          <a:solidFill>
-            <a:srgbClr val="141E33"/>
+            <a:ext cx="12191695" cy="38100"/>
+          </a:xfrm>
+          <a:prstGeom prst="rect">
+            <a:avLst/>
+          </a:prstGeom>
+          <a:solidFill>
+            <a:srgbClr val="F43F5E"/>
           </a:solidFill>
           <a:ln>
             <a:noFill/>
@@ -8109,14 +8324,14 @@
         </p:nvSpPr>
         <p:spPr>
           <a:xfrm>
-            <a:off x="0" y="0"/>
-            <a:ext cx="109728" cy="1051560"/>
-          </a:xfrm>
-          <a:prstGeom prst="rect">
-            <a:avLst/>
-          </a:prstGeom>
-          <a:solidFill>
-            <a:srgbClr val="EF4444"/>
+            <a:off x="0" y="38100"/>
+            <a:ext cx="12191695" cy="914400"/>
+          </a:xfrm>
+          <a:prstGeom prst="rect">
+            <a:avLst/>
+          </a:prstGeom>
+          <a:solidFill>
+            <a:srgbClr val="161F35"/>
           </a:solidFill>
           <a:ln>
             <a:noFill/>
@@ -8146,14 +8361,57 @@
       </p:sp>
       <p:sp>
         <p:nvSpPr>
-          <p:cNvPr id="4" name="TextBox 3"/>
+          <p:cNvPr id="4" name="Rectangle 3"/>
+          <p:cNvSpPr/>
+          <p:nvPr/>
+        </p:nvSpPr>
+        <p:spPr>
+          <a:xfrm>
+            <a:off x="0" y="38100"/>
+            <a:ext cx="91440" cy="914400"/>
+          </a:xfrm>
+          <a:prstGeom prst="rect">
+            <a:avLst/>
+          </a:prstGeom>
+          <a:solidFill>
+            <a:srgbClr val="F43F5E"/>
+          </a:solidFill>
+          <a:ln>
+            <a:noFill/>
+          </a:ln>
+        </p:spPr>
+        <p:style>
+          <a:lnRef idx="1">
+            <a:schemeClr val="accent1"/>
+          </a:lnRef>
+          <a:fillRef idx="3">
+            <a:schemeClr val="accent1"/>
+          </a:fillRef>
+          <a:effectRef idx="2">
+            <a:schemeClr val="accent1"/>
+          </a:effectRef>
+          <a:fontRef idx="minor">
+            <a:schemeClr val="lt1"/>
+          </a:fontRef>
+        </p:style>
+        <p:txBody>
+          <a:bodyPr rtlCol="0" anchor="ctr"/>
+          <a:lstStyle/>
+          <a:p>
+            <a:pPr algn="ctr"/>
+          </a:p>
+        </p:txBody>
+      </p:sp>
+      <p:sp>
+        <p:nvSpPr>
+          <p:cNvPr id="5" name="TextBox 4"/>
           <p:cNvSpPr txBox="1"/>
           <p:nvPr/>
         </p:nvSpPr>
         <p:spPr>
           <a:xfrm>
-            <a:off x="548640" y="182880"/>
-            <a:ext cx="10058400" cy="640080"/>
+            <a:off x="731520" y="137160"/>
+            <a:ext cx="10728655" cy="640080"/>
           </a:xfrm>
           <a:prstGeom prst="rect">
             <a:avLst/>
@@ -8167,9 +8425,9 @@
           <a:lstStyle/>
           <a:p>
             <a:pPr algn="l">
-              <a:defRPr sz="2600" b="1">
+              <a:defRPr sz="2400" b="1">
                 <a:solidFill>
-                  <a:srgbClr val="FFFFFF"/>
+                  <a:srgbClr val="F0F4FC"/>
                 </a:solidFill>
                 <a:latin typeface="Microsoft YaHei"/>
               </a:defRPr>
@@ -8182,20 +8440,20 @@
       </p:sp>
       <p:sp>
         <p:nvSpPr>
-          <p:cNvPr id="5" name="Rectangle 4"/>
-          <p:cNvSpPr/>
-          <p:nvPr/>
-        </p:nvSpPr>
-        <p:spPr>
-          <a:xfrm>
-            <a:off x="0" y="1051560"/>
-            <a:ext cx="12191695" cy="25400"/>
-          </a:xfrm>
-          <a:prstGeom prst="rect">
-            <a:avLst/>
-          </a:prstGeom>
-          <a:solidFill>
-            <a:srgbClr val="EF4444"/>
+          <p:cNvPr id="6" name="Rectangle 5"/>
+          <p:cNvSpPr/>
+          <p:nvPr/>
+        </p:nvSpPr>
+        <p:spPr>
+          <a:xfrm>
+            <a:off x="0" y="1078992"/>
+            <a:ext cx="12191695" cy="12700"/>
+          </a:xfrm>
+          <a:prstGeom prst="rect">
+            <a:avLst/>
+          </a:prstGeom>
+          <a:solidFill>
+            <a:srgbClr val="253350"/>
           </a:solidFill>
           <a:ln>
             <a:noFill/>
@@ -8225,20 +8483,20 @@
       </p:sp>
       <p:sp>
         <p:nvSpPr>
-          <p:cNvPr id="6" name="Rounded Rectangle 5"/>
-          <p:cNvSpPr/>
-          <p:nvPr/>
-        </p:nvSpPr>
-        <p:spPr>
-          <a:xfrm>
-            <a:off x="457200" y="1325880"/>
-            <a:ext cx="11247120" cy="731520"/>
+          <p:cNvPr id="7" name="Rounded Rectangle 6"/>
+          <p:cNvSpPr/>
+          <p:nvPr/>
+        </p:nvSpPr>
+        <p:spPr>
+          <a:xfrm>
+            <a:off x="457200" y="1280160"/>
+            <a:ext cx="11247120" cy="685800"/>
           </a:xfrm>
           <a:prstGeom prst="roundRect">
             <a:avLst/>
           </a:prstGeom>
           <a:solidFill>
-            <a:srgbClr val="141E33"/>
+            <a:srgbClr val="161F35"/>
           </a:solidFill>
           <a:ln>
             <a:noFill/>
@@ -8268,20 +8526,20 @@
       </p:sp>
       <p:sp>
         <p:nvSpPr>
-          <p:cNvPr id="7" name="Rectangle 6"/>
-          <p:cNvSpPr/>
-          <p:nvPr/>
-        </p:nvSpPr>
-        <p:spPr>
-          <a:xfrm>
-            <a:off x="457200" y="1325880"/>
-            <a:ext cx="73152" cy="731520"/>
-          </a:xfrm>
-          <a:prstGeom prst="rect">
-            <a:avLst/>
-          </a:prstGeom>
-          <a:solidFill>
-            <a:srgbClr val="EF4444"/>
+          <p:cNvPr id="8" name="Rectangle 7"/>
+          <p:cNvSpPr/>
+          <p:nvPr/>
+        </p:nvSpPr>
+        <p:spPr>
+          <a:xfrm>
+            <a:off x="457200" y="1280160"/>
+            <a:ext cx="54864" cy="685800"/>
+          </a:xfrm>
+          <a:prstGeom prst="rect">
+            <a:avLst/>
+          </a:prstGeom>
+          <a:solidFill>
+            <a:srgbClr val="F43F5E"/>
           </a:solidFill>
           <a:ln>
             <a:noFill/>
@@ -8311,20 +8569,20 @@
       </p:sp>
       <p:sp>
         <p:nvSpPr>
-          <p:cNvPr id="8" name="Oval 7"/>
-          <p:cNvSpPr/>
-          <p:nvPr/>
-        </p:nvSpPr>
-        <p:spPr>
-          <a:xfrm>
-            <a:off x="731520" y="1490472"/>
-            <a:ext cx="365760" cy="365760"/>
+          <p:cNvPr id="9" name="Oval 8"/>
+          <p:cNvSpPr/>
+          <p:nvPr/>
+        </p:nvSpPr>
+        <p:spPr>
+          <a:xfrm>
+            <a:off x="685800" y="1463040"/>
+            <a:ext cx="320040" cy="320040"/>
           </a:xfrm>
           <a:prstGeom prst="ellipse">
             <a:avLst/>
           </a:prstGeom>
           <a:solidFill>
-            <a:srgbClr val="EF4444"/>
+            <a:srgbClr val="F43F5E"/>
           </a:solidFill>
           <a:ln>
             <a:noFill/>
@@ -8354,14 +8612,14 @@
       </p:sp>
       <p:sp>
         <p:nvSpPr>
-          <p:cNvPr id="9" name="TextBox 8"/>
+          <p:cNvPr id="10" name="TextBox 9"/>
           <p:cNvSpPr txBox="1"/>
           <p:nvPr/>
         </p:nvSpPr>
         <p:spPr>
           <a:xfrm>
-            <a:off x="731520" y="1490472"/>
-            <a:ext cx="365760" cy="365760"/>
+            <a:off x="685800" y="1463040"/>
+            <a:ext cx="320040" cy="320040"/>
           </a:xfrm>
           <a:prstGeom prst="rect">
             <a:avLst/>
@@ -8375,9 +8633,9 @@
           <a:lstStyle/>
           <a:p>
             <a:pPr algn="ctr">
-              <a:defRPr sz="1100" b="1">
+              <a:defRPr sz="1000" b="1">
                 <a:solidFill>
-                  <a:srgbClr val="FFFFFF"/>
+                  <a:srgbClr val="F0F4FC"/>
                 </a:solidFill>
                 <a:latin typeface="Microsoft YaHei"/>
               </a:defRPr>
@@ -8390,14 +8648,14 @@
       </p:sp>
       <p:sp>
         <p:nvSpPr>
-          <p:cNvPr id="10" name="TextBox 9"/>
+          <p:cNvPr id="11" name="TextBox 10"/>
           <p:cNvSpPr txBox="1"/>
           <p:nvPr/>
         </p:nvSpPr>
         <p:spPr>
           <a:xfrm>
-            <a:off x="1280160" y="1417320"/>
-            <a:ext cx="10058400" cy="548640"/>
+            <a:off x="1188720" y="1440180"/>
+            <a:ext cx="10058400" cy="365760"/>
           </a:xfrm>
           <a:prstGeom prst="rect">
             <a:avLst/>
@@ -8411,9 +8669,9 @@
           <a:lstStyle/>
           <a:p>
             <a:pPr algn="l">
-              <a:defRPr sz="1500" b="0">
+              <a:defRPr sz="1400" b="0">
                 <a:solidFill>
-                  <a:srgbClr val="CBD5E8"/>
+                  <a:srgbClr val="A0AEC4"/>
                 </a:solidFill>
                 <a:latin typeface="Microsoft YaHei"/>
               </a:defRPr>
@@ -8426,20 +8684,20 @@
       </p:sp>
       <p:sp>
         <p:nvSpPr>
-          <p:cNvPr id="11" name="Rounded Rectangle 10"/>
-          <p:cNvSpPr/>
-          <p:nvPr/>
-        </p:nvSpPr>
-        <p:spPr>
-          <a:xfrm>
-            <a:off x="457200" y="2194560"/>
-            <a:ext cx="11247120" cy="731520"/>
+          <p:cNvPr id="12" name="Rounded Rectangle 11"/>
+          <p:cNvSpPr/>
+          <p:nvPr/>
+        </p:nvSpPr>
+        <p:spPr>
+          <a:xfrm>
+            <a:off x="457200" y="2093976"/>
+            <a:ext cx="11247120" cy="685800"/>
           </a:xfrm>
           <a:prstGeom prst="roundRect">
             <a:avLst/>
           </a:prstGeom>
           <a:solidFill>
-            <a:srgbClr val="141E33"/>
+            <a:srgbClr val="161F35"/>
           </a:solidFill>
           <a:ln>
             <a:noFill/>
@@ -8469,20 +8727,20 @@
       </p:sp>
       <p:sp>
         <p:nvSpPr>
-          <p:cNvPr id="12" name="Rectangle 11"/>
-          <p:cNvSpPr/>
-          <p:nvPr/>
-        </p:nvSpPr>
-        <p:spPr>
-          <a:xfrm>
-            <a:off x="457200" y="2194560"/>
-            <a:ext cx="73152" cy="731520"/>
-          </a:xfrm>
-          <a:prstGeom prst="rect">
-            <a:avLst/>
-          </a:prstGeom>
-          <a:solidFill>
-            <a:srgbClr val="EF4444"/>
+          <p:cNvPr id="13" name="Rectangle 12"/>
+          <p:cNvSpPr/>
+          <p:nvPr/>
+        </p:nvSpPr>
+        <p:spPr>
+          <a:xfrm>
+            <a:off x="457200" y="2093976"/>
+            <a:ext cx="54864" cy="685800"/>
+          </a:xfrm>
+          <a:prstGeom prst="rect">
+            <a:avLst/>
+          </a:prstGeom>
+          <a:solidFill>
+            <a:srgbClr val="F43F5E"/>
           </a:solidFill>
           <a:ln>
             <a:noFill/>
@@ -8512,20 +8770,20 @@
       </p:sp>
       <p:sp>
         <p:nvSpPr>
-          <p:cNvPr id="13" name="Oval 12"/>
-          <p:cNvSpPr/>
-          <p:nvPr/>
-        </p:nvSpPr>
-        <p:spPr>
-          <a:xfrm>
-            <a:off x="731520" y="2359152"/>
-            <a:ext cx="365760" cy="365760"/>
+          <p:cNvPr id="14" name="Oval 13"/>
+          <p:cNvSpPr/>
+          <p:nvPr/>
+        </p:nvSpPr>
+        <p:spPr>
+          <a:xfrm>
+            <a:off x="685800" y="2276856"/>
+            <a:ext cx="320040" cy="320040"/>
           </a:xfrm>
           <a:prstGeom prst="ellipse">
             <a:avLst/>
           </a:prstGeom>
           <a:solidFill>
-            <a:srgbClr val="EF4444"/>
+            <a:srgbClr val="F43F5E"/>
           </a:solidFill>
           <a:ln>
             <a:noFill/>
@@ -8555,14 +8813,14 @@
       </p:sp>
       <p:sp>
         <p:nvSpPr>
-          <p:cNvPr id="14" name="TextBox 13"/>
+          <p:cNvPr id="15" name="TextBox 14"/>
           <p:cNvSpPr txBox="1"/>
           <p:nvPr/>
         </p:nvSpPr>
         <p:spPr>
           <a:xfrm>
-            <a:off x="731520" y="2359152"/>
-            <a:ext cx="365760" cy="365760"/>
+            <a:off x="685800" y="2276856"/>
+            <a:ext cx="320040" cy="320040"/>
           </a:xfrm>
           <a:prstGeom prst="rect">
             <a:avLst/>
@@ -8576,9 +8834,9 @@
           <a:lstStyle/>
           <a:p>
             <a:pPr algn="ctr">
-              <a:defRPr sz="1100" b="1">
+              <a:defRPr sz="1000" b="1">
                 <a:solidFill>
-                  <a:srgbClr val="FFFFFF"/>
+                  <a:srgbClr val="F0F4FC"/>
                 </a:solidFill>
                 <a:latin typeface="Microsoft YaHei"/>
               </a:defRPr>
@@ -8591,14 +8849,14 @@
       </p:sp>
       <p:sp>
         <p:nvSpPr>
-          <p:cNvPr id="15" name="TextBox 14"/>
+          <p:cNvPr id="16" name="TextBox 15"/>
           <p:cNvSpPr txBox="1"/>
           <p:nvPr/>
         </p:nvSpPr>
         <p:spPr>
           <a:xfrm>
-            <a:off x="1280160" y="2286000"/>
-            <a:ext cx="10058400" cy="548640"/>
+            <a:off x="1188720" y="2253996"/>
+            <a:ext cx="10058400" cy="365760"/>
           </a:xfrm>
           <a:prstGeom prst="rect">
             <a:avLst/>
@@ -8612,9 +8870,9 @@
           <a:lstStyle/>
           <a:p>
             <a:pPr algn="l">
-              <a:defRPr sz="1500" b="0">
+              <a:defRPr sz="1400" b="0">
                 <a:solidFill>
-                  <a:srgbClr val="CBD5E8"/>
+                  <a:srgbClr val="A0AEC4"/>
                 </a:solidFill>
                 <a:latin typeface="Microsoft YaHei"/>
               </a:defRPr>
@@ -8627,20 +8885,20 @@
       </p:sp>
       <p:sp>
         <p:nvSpPr>
-          <p:cNvPr id="16" name="Rounded Rectangle 15"/>
-          <p:cNvSpPr/>
-          <p:nvPr/>
-        </p:nvSpPr>
-        <p:spPr>
-          <a:xfrm>
-            <a:off x="457200" y="3063240"/>
-            <a:ext cx="11247120" cy="731520"/>
+          <p:cNvPr id="17" name="Rounded Rectangle 16"/>
+          <p:cNvSpPr/>
+          <p:nvPr/>
+        </p:nvSpPr>
+        <p:spPr>
+          <a:xfrm>
+            <a:off x="457200" y="2907792"/>
+            <a:ext cx="11247120" cy="685800"/>
           </a:xfrm>
           <a:prstGeom prst="roundRect">
             <a:avLst/>
           </a:prstGeom>
           <a:solidFill>
-            <a:srgbClr val="141E33"/>
+            <a:srgbClr val="161F35"/>
           </a:solidFill>
           <a:ln>
             <a:noFill/>
@@ -8670,20 +8928,20 @@
       </p:sp>
       <p:sp>
         <p:nvSpPr>
-          <p:cNvPr id="17" name="Rectangle 16"/>
-          <p:cNvSpPr/>
-          <p:nvPr/>
-        </p:nvSpPr>
-        <p:spPr>
-          <a:xfrm>
-            <a:off x="457200" y="3063240"/>
-            <a:ext cx="73152" cy="731520"/>
-          </a:xfrm>
-          <a:prstGeom prst="rect">
-            <a:avLst/>
-          </a:prstGeom>
-          <a:solidFill>
-            <a:srgbClr val="EF4444"/>
+          <p:cNvPr id="18" name="Rectangle 17"/>
+          <p:cNvSpPr/>
+          <p:nvPr/>
+        </p:nvSpPr>
+        <p:spPr>
+          <a:xfrm>
+            <a:off x="457200" y="2907792"/>
+            <a:ext cx="54864" cy="685800"/>
+          </a:xfrm>
+          <a:prstGeom prst="rect">
+            <a:avLst/>
+          </a:prstGeom>
+          <a:solidFill>
+            <a:srgbClr val="F43F5E"/>
           </a:solidFill>
           <a:ln>
             <a:noFill/>
@@ -8713,20 +8971,20 @@
       </p:sp>
       <p:sp>
         <p:nvSpPr>
-          <p:cNvPr id="18" name="Oval 17"/>
-          <p:cNvSpPr/>
-          <p:nvPr/>
-        </p:nvSpPr>
-        <p:spPr>
-          <a:xfrm>
-            <a:off x="731520" y="3227832"/>
-            <a:ext cx="365760" cy="365760"/>
+          <p:cNvPr id="19" name="Oval 18"/>
+          <p:cNvSpPr/>
+          <p:nvPr/>
+        </p:nvSpPr>
+        <p:spPr>
+          <a:xfrm>
+            <a:off x="685800" y="3090672"/>
+            <a:ext cx="320040" cy="320040"/>
           </a:xfrm>
           <a:prstGeom prst="ellipse">
             <a:avLst/>
           </a:prstGeom>
           <a:solidFill>
-            <a:srgbClr val="EF4444"/>
+            <a:srgbClr val="F43F5E"/>
           </a:solidFill>
           <a:ln>
             <a:noFill/>
@@ -8756,14 +9014,14 @@
       </p:sp>
       <p:sp>
         <p:nvSpPr>
-          <p:cNvPr id="19" name="TextBox 18"/>
+          <p:cNvPr id="20" name="TextBox 19"/>
           <p:cNvSpPr txBox="1"/>
           <p:nvPr/>
         </p:nvSpPr>
         <p:spPr>
           <a:xfrm>
-            <a:off x="731520" y="3227832"/>
-            <a:ext cx="365760" cy="365760"/>
+            <a:off x="685800" y="3090672"/>
+            <a:ext cx="320040" cy="320040"/>
           </a:xfrm>
           <a:prstGeom prst="rect">
             <a:avLst/>
@@ -8777,9 +9035,9 @@
           <a:lstStyle/>
           <a:p>
             <a:pPr algn="ctr">
-              <a:defRPr sz="1100" b="1">
+              <a:defRPr sz="1000" b="1">
                 <a:solidFill>
-                  <a:srgbClr val="FFFFFF"/>
+                  <a:srgbClr val="F0F4FC"/>
                 </a:solidFill>
                 <a:latin typeface="Microsoft YaHei"/>
               </a:defRPr>
@@ -8792,14 +9050,14 @@
       </p:sp>
       <p:sp>
         <p:nvSpPr>
-          <p:cNvPr id="20" name="TextBox 19"/>
+          <p:cNvPr id="21" name="TextBox 20"/>
           <p:cNvSpPr txBox="1"/>
           <p:nvPr/>
         </p:nvSpPr>
         <p:spPr>
           <a:xfrm>
-            <a:off x="1280160" y="3154680"/>
-            <a:ext cx="10058400" cy="548640"/>
+            <a:off x="1188720" y="3067812"/>
+            <a:ext cx="10058400" cy="365760"/>
           </a:xfrm>
           <a:prstGeom prst="rect">
             <a:avLst/>
@@ -8813,9 +9071,9 @@
           <a:lstStyle/>
           <a:p>
             <a:pPr algn="l">
-              <a:defRPr sz="1500" b="0">
+              <a:defRPr sz="1400" b="0">
                 <a:solidFill>
-                  <a:srgbClr val="CBD5E8"/>
+                  <a:srgbClr val="A0AEC4"/>
                 </a:solidFill>
                 <a:latin typeface="Microsoft YaHei"/>
               </a:defRPr>
@@ -8828,20 +9086,20 @@
       </p:sp>
       <p:sp>
         <p:nvSpPr>
-          <p:cNvPr id="21" name="Rounded Rectangle 20"/>
-          <p:cNvSpPr/>
-          <p:nvPr/>
-        </p:nvSpPr>
-        <p:spPr>
-          <a:xfrm>
-            <a:off x="457200" y="3931919"/>
-            <a:ext cx="11247120" cy="731520"/>
+          <p:cNvPr id="22" name="Rounded Rectangle 21"/>
+          <p:cNvSpPr/>
+          <p:nvPr/>
+        </p:nvSpPr>
+        <p:spPr>
+          <a:xfrm>
+            <a:off x="457200" y="3721608"/>
+            <a:ext cx="11247120" cy="685800"/>
           </a:xfrm>
           <a:prstGeom prst="roundRect">
             <a:avLst/>
           </a:prstGeom>
           <a:solidFill>
-            <a:srgbClr val="141E33"/>
+            <a:srgbClr val="161F35"/>
           </a:solidFill>
           <a:ln>
             <a:noFill/>
@@ -8871,20 +9129,20 @@
       </p:sp>
       <p:sp>
         <p:nvSpPr>
-          <p:cNvPr id="22" name="Rectangle 21"/>
-          <p:cNvSpPr/>
-          <p:nvPr/>
-        </p:nvSpPr>
-        <p:spPr>
-          <a:xfrm>
-            <a:off x="457200" y="3931919"/>
-            <a:ext cx="73152" cy="731520"/>
-          </a:xfrm>
-          <a:prstGeom prst="rect">
-            <a:avLst/>
-          </a:prstGeom>
-          <a:solidFill>
-            <a:srgbClr val="EF4444"/>
+          <p:cNvPr id="23" name="Rectangle 22"/>
+          <p:cNvSpPr/>
+          <p:nvPr/>
+        </p:nvSpPr>
+        <p:spPr>
+          <a:xfrm>
+            <a:off x="457200" y="3721608"/>
+            <a:ext cx="54864" cy="685800"/>
+          </a:xfrm>
+          <a:prstGeom prst="rect">
+            <a:avLst/>
+          </a:prstGeom>
+          <a:solidFill>
+            <a:srgbClr val="F43F5E"/>
           </a:solidFill>
           <a:ln>
             <a:noFill/>
@@ -8914,20 +9172,20 @@
       </p:sp>
       <p:sp>
         <p:nvSpPr>
-          <p:cNvPr id="23" name="Oval 22"/>
-          <p:cNvSpPr/>
-          <p:nvPr/>
-        </p:nvSpPr>
-        <p:spPr>
-          <a:xfrm>
-            <a:off x="731520" y="4096511"/>
-            <a:ext cx="365760" cy="365760"/>
+          <p:cNvPr id="24" name="Oval 23"/>
+          <p:cNvSpPr/>
+          <p:nvPr/>
+        </p:nvSpPr>
+        <p:spPr>
+          <a:xfrm>
+            <a:off x="685800" y="3904488"/>
+            <a:ext cx="320040" cy="320040"/>
           </a:xfrm>
           <a:prstGeom prst="ellipse">
             <a:avLst/>
           </a:prstGeom>
           <a:solidFill>
-            <a:srgbClr val="EF4444"/>
+            <a:srgbClr val="F43F5E"/>
           </a:solidFill>
           <a:ln>
             <a:noFill/>
@@ -8957,14 +9215,14 @@
       </p:sp>
       <p:sp>
         <p:nvSpPr>
-          <p:cNvPr id="24" name="TextBox 23"/>
+          <p:cNvPr id="25" name="TextBox 24"/>
           <p:cNvSpPr txBox="1"/>
           <p:nvPr/>
         </p:nvSpPr>
         <p:spPr>
           <a:xfrm>
-            <a:off x="731520" y="4096511"/>
-            <a:ext cx="365760" cy="365760"/>
+            <a:off x="685800" y="3904488"/>
+            <a:ext cx="320040" cy="320040"/>
           </a:xfrm>
           <a:prstGeom prst="rect">
             <a:avLst/>
@@ -8978,9 +9236,9 @@
           <a:lstStyle/>
           <a:p>
             <a:pPr algn="ctr">
-              <a:defRPr sz="1100" b="1">
+              <a:defRPr sz="1000" b="1">
                 <a:solidFill>
-                  <a:srgbClr val="FFFFFF"/>
+                  <a:srgbClr val="F0F4FC"/>
                 </a:solidFill>
                 <a:latin typeface="Microsoft YaHei"/>
               </a:defRPr>
@@ -8993,14 +9251,14 @@
       </p:sp>
       <p:sp>
         <p:nvSpPr>
-          <p:cNvPr id="25" name="TextBox 24"/>
+          <p:cNvPr id="26" name="TextBox 25"/>
           <p:cNvSpPr txBox="1"/>
           <p:nvPr/>
         </p:nvSpPr>
         <p:spPr>
           <a:xfrm>
-            <a:off x="1280160" y="4023359"/>
-            <a:ext cx="10058400" cy="548640"/>
+            <a:off x="1188720" y="3881628"/>
+            <a:ext cx="10058400" cy="365760"/>
           </a:xfrm>
           <a:prstGeom prst="rect">
             <a:avLst/>
@@ -9014,9 +9272,9 @@
           <a:lstStyle/>
           <a:p>
             <a:pPr algn="l">
-              <a:defRPr sz="1500" b="0">
+              <a:defRPr sz="1400" b="0">
                 <a:solidFill>
-                  <a:srgbClr val="CBD5E8"/>
+                  <a:srgbClr val="A0AEC4"/>
                 </a:solidFill>
                 <a:latin typeface="Microsoft YaHei"/>
               </a:defRPr>
@@ -9029,20 +9287,20 @@
       </p:sp>
       <p:sp>
         <p:nvSpPr>
-          <p:cNvPr id="26" name="Rounded Rectangle 25"/>
-          <p:cNvSpPr/>
-          <p:nvPr/>
-        </p:nvSpPr>
-        <p:spPr>
-          <a:xfrm>
-            <a:off x="457200" y="4800600"/>
-            <a:ext cx="11247120" cy="731520"/>
+          <p:cNvPr id="27" name="Rounded Rectangle 26"/>
+          <p:cNvSpPr/>
+          <p:nvPr/>
+        </p:nvSpPr>
+        <p:spPr>
+          <a:xfrm>
+            <a:off x="457200" y="4535424"/>
+            <a:ext cx="11247120" cy="685800"/>
           </a:xfrm>
           <a:prstGeom prst="roundRect">
             <a:avLst/>
           </a:prstGeom>
           <a:solidFill>
-            <a:srgbClr val="141E33"/>
+            <a:srgbClr val="161F35"/>
           </a:solidFill>
           <a:ln>
             <a:noFill/>
@@ -9072,20 +9330,20 @@
       </p:sp>
       <p:sp>
         <p:nvSpPr>
-          <p:cNvPr id="27" name="Rectangle 26"/>
-          <p:cNvSpPr/>
-          <p:nvPr/>
-        </p:nvSpPr>
-        <p:spPr>
-          <a:xfrm>
-            <a:off x="457200" y="4800600"/>
-            <a:ext cx="73152" cy="731520"/>
-          </a:xfrm>
-          <a:prstGeom prst="rect">
-            <a:avLst/>
-          </a:prstGeom>
-          <a:solidFill>
-            <a:srgbClr val="EF4444"/>
+          <p:cNvPr id="28" name="Rectangle 27"/>
+          <p:cNvSpPr/>
+          <p:nvPr/>
+        </p:nvSpPr>
+        <p:spPr>
+          <a:xfrm>
+            <a:off x="457200" y="4535424"/>
+            <a:ext cx="54864" cy="685800"/>
+          </a:xfrm>
+          <a:prstGeom prst="rect">
+            <a:avLst/>
+          </a:prstGeom>
+          <a:solidFill>
+            <a:srgbClr val="F43F5E"/>
           </a:solidFill>
           <a:ln>
             <a:noFill/>
@@ -9115,20 +9373,20 @@
       </p:sp>
       <p:sp>
         <p:nvSpPr>
-          <p:cNvPr id="28" name="Oval 27"/>
-          <p:cNvSpPr/>
-          <p:nvPr/>
-        </p:nvSpPr>
-        <p:spPr>
-          <a:xfrm>
-            <a:off x="731520" y="4965192"/>
-            <a:ext cx="365760" cy="365760"/>
+          <p:cNvPr id="29" name="Oval 28"/>
+          <p:cNvSpPr/>
+          <p:nvPr/>
+        </p:nvSpPr>
+        <p:spPr>
+          <a:xfrm>
+            <a:off x="685800" y="4718304"/>
+            <a:ext cx="320040" cy="320040"/>
           </a:xfrm>
           <a:prstGeom prst="ellipse">
             <a:avLst/>
           </a:prstGeom>
           <a:solidFill>
-            <a:srgbClr val="EF4444"/>
+            <a:srgbClr val="F43F5E"/>
           </a:solidFill>
           <a:ln>
             <a:noFill/>
@@ -9158,14 +9416,14 @@
       </p:sp>
       <p:sp>
         <p:nvSpPr>
-          <p:cNvPr id="29" name="TextBox 28"/>
+          <p:cNvPr id="30" name="TextBox 29"/>
           <p:cNvSpPr txBox="1"/>
           <p:nvPr/>
         </p:nvSpPr>
         <p:spPr>
           <a:xfrm>
-            <a:off x="731520" y="4965192"/>
-            <a:ext cx="365760" cy="365760"/>
+            <a:off x="685800" y="4718304"/>
+            <a:ext cx="320040" cy="320040"/>
           </a:xfrm>
           <a:prstGeom prst="rect">
             <a:avLst/>
@@ -9179,9 +9437,9 @@
           <a:lstStyle/>
           <a:p>
             <a:pPr algn="ctr">
-              <a:defRPr sz="1100" b="1">
+              <a:defRPr sz="1000" b="1">
                 <a:solidFill>
-                  <a:srgbClr val="FFFFFF"/>
+                  <a:srgbClr val="F0F4FC"/>
                 </a:solidFill>
                 <a:latin typeface="Microsoft YaHei"/>
               </a:defRPr>
@@ -9194,14 +9452,14 @@
       </p:sp>
       <p:sp>
         <p:nvSpPr>
-          <p:cNvPr id="30" name="TextBox 29"/>
+          <p:cNvPr id="31" name="TextBox 30"/>
           <p:cNvSpPr txBox="1"/>
           <p:nvPr/>
         </p:nvSpPr>
         <p:spPr>
           <a:xfrm>
-            <a:off x="1280160" y="4892040"/>
-            <a:ext cx="10058400" cy="548640"/>
+            <a:off x="1188720" y="4695444"/>
+            <a:ext cx="10058400" cy="365760"/>
           </a:xfrm>
           <a:prstGeom prst="rect">
             <a:avLst/>
@@ -9215,9 +9473,9 @@
           <a:lstStyle/>
           <a:p>
             <a:pPr algn="l">
-              <a:defRPr sz="1500" b="0">
+              <a:defRPr sz="1400" b="0">
                 <a:solidFill>
-                  <a:srgbClr val="CBD5E8"/>
+                  <a:srgbClr val="A0AEC4"/>
                 </a:solidFill>
                 <a:latin typeface="Microsoft YaHei"/>
               </a:defRPr>
@@ -9230,20 +9488,20 @@
       </p:sp>
       <p:sp>
         <p:nvSpPr>
-          <p:cNvPr id="31" name="Rounded Rectangle 30"/>
-          <p:cNvSpPr/>
-          <p:nvPr/>
-        </p:nvSpPr>
-        <p:spPr>
-          <a:xfrm>
-            <a:off x="457200" y="5669280"/>
-            <a:ext cx="11247120" cy="731520"/>
+          <p:cNvPr id="32" name="Rounded Rectangle 31"/>
+          <p:cNvSpPr/>
+          <p:nvPr/>
+        </p:nvSpPr>
+        <p:spPr>
+          <a:xfrm>
+            <a:off x="457200" y="5349240"/>
+            <a:ext cx="11247120" cy="685800"/>
           </a:xfrm>
           <a:prstGeom prst="roundRect">
             <a:avLst/>
           </a:prstGeom>
           <a:solidFill>
-            <a:srgbClr val="141E33"/>
+            <a:srgbClr val="161F35"/>
           </a:solidFill>
           <a:ln>
             <a:noFill/>
@@ -9273,20 +9531,20 @@
       </p:sp>
       <p:sp>
         <p:nvSpPr>
-          <p:cNvPr id="32" name="Rectangle 31"/>
-          <p:cNvSpPr/>
-          <p:nvPr/>
-        </p:nvSpPr>
-        <p:spPr>
-          <a:xfrm>
-            <a:off x="457200" y="5669280"/>
-            <a:ext cx="73152" cy="731520"/>
-          </a:xfrm>
-          <a:prstGeom prst="rect">
-            <a:avLst/>
-          </a:prstGeom>
-          <a:solidFill>
-            <a:srgbClr val="EF4444"/>
+          <p:cNvPr id="33" name="Rectangle 32"/>
+          <p:cNvSpPr/>
+          <p:nvPr/>
+        </p:nvSpPr>
+        <p:spPr>
+          <a:xfrm>
+            <a:off x="457200" y="5349240"/>
+            <a:ext cx="54864" cy="685800"/>
+          </a:xfrm>
+          <a:prstGeom prst="rect">
+            <a:avLst/>
+          </a:prstGeom>
+          <a:solidFill>
+            <a:srgbClr val="F43F5E"/>
           </a:solidFill>
           <a:ln>
             <a:noFill/>
@@ -9316,20 +9574,20 @@
       </p:sp>
       <p:sp>
         <p:nvSpPr>
-          <p:cNvPr id="33" name="Oval 32"/>
-          <p:cNvSpPr/>
-          <p:nvPr/>
-        </p:nvSpPr>
-        <p:spPr>
-          <a:xfrm>
-            <a:off x="731520" y="5833872"/>
-            <a:ext cx="365760" cy="365760"/>
+          <p:cNvPr id="34" name="Oval 33"/>
+          <p:cNvSpPr/>
+          <p:nvPr/>
+        </p:nvSpPr>
+        <p:spPr>
+          <a:xfrm>
+            <a:off x="685800" y="5532120"/>
+            <a:ext cx="320040" cy="320040"/>
           </a:xfrm>
           <a:prstGeom prst="ellipse">
             <a:avLst/>
           </a:prstGeom>
           <a:solidFill>
-            <a:srgbClr val="EF4444"/>
+            <a:srgbClr val="F43F5E"/>
           </a:solidFill>
           <a:ln>
             <a:noFill/>
@@ -9359,14 +9617,14 @@
       </p:sp>
       <p:sp>
         <p:nvSpPr>
-          <p:cNvPr id="34" name="TextBox 33"/>
+          <p:cNvPr id="35" name="TextBox 34"/>
           <p:cNvSpPr txBox="1"/>
           <p:nvPr/>
         </p:nvSpPr>
         <p:spPr>
           <a:xfrm>
-            <a:off x="731520" y="5833872"/>
-            <a:ext cx="365760" cy="365760"/>
+            <a:off x="685800" y="5532120"/>
+            <a:ext cx="320040" cy="320040"/>
           </a:xfrm>
           <a:prstGeom prst="rect">
             <a:avLst/>
@@ -9380,9 +9638,9 @@
           <a:lstStyle/>
           <a:p>
             <a:pPr algn="ctr">
-              <a:defRPr sz="1100" b="1">
+              <a:defRPr sz="1000" b="1">
                 <a:solidFill>
-                  <a:srgbClr val="FFFFFF"/>
+                  <a:srgbClr val="F0F4FC"/>
                 </a:solidFill>
                 <a:latin typeface="Microsoft YaHei"/>
               </a:defRPr>
@@ -9395,14 +9653,14 @@
       </p:sp>
       <p:sp>
         <p:nvSpPr>
-          <p:cNvPr id="35" name="TextBox 34"/>
+          <p:cNvPr id="36" name="TextBox 35"/>
           <p:cNvSpPr txBox="1"/>
           <p:nvPr/>
         </p:nvSpPr>
         <p:spPr>
           <a:xfrm>
-            <a:off x="1280160" y="5760720"/>
-            <a:ext cx="10058400" cy="548640"/>
+            <a:off x="1188720" y="5509260"/>
+            <a:ext cx="10058400" cy="365760"/>
           </a:xfrm>
           <a:prstGeom prst="rect">
             <a:avLst/>
@@ -9416,9 +9674,9 @@
           <a:lstStyle/>
           <a:p>
             <a:pPr algn="l">
-              <a:defRPr sz="1500" b="0">
+              <a:defRPr sz="1400" b="0">
                 <a:solidFill>
-                  <a:srgbClr val="CBD5E8"/>
+                  <a:srgbClr val="A0AEC4"/>
                 </a:solidFill>
                 <a:latin typeface="Microsoft YaHei"/>
               </a:defRPr>
@@ -9431,20 +9689,20 @@
       </p:sp>
       <p:sp>
         <p:nvSpPr>
-          <p:cNvPr id="36" name="Rectangle 35"/>
+          <p:cNvPr id="37" name="Rectangle 36"/>
           <p:cNvSpPr/>
           <p:nvPr/>
         </p:nvSpPr>
         <p:spPr>
           <a:xfrm>
             <a:off x="0" y="6446520"/>
-            <a:ext cx="12191695" cy="19050"/>
-          </a:xfrm>
-          <a:prstGeom prst="rect">
-            <a:avLst/>
-          </a:prstGeom>
-          <a:solidFill>
-            <a:srgbClr val="2D3B55"/>
+            <a:ext cx="12191695" cy="12700"/>
+          </a:xfrm>
+          <a:prstGeom prst="rect">
+            <a:avLst/>
+          </a:prstGeom>
+          <a:solidFill>
+            <a:srgbClr val="253350"/>
           </a:solidFill>
           <a:ln>
             <a:noFill/>
@@ -9474,14 +9732,14 @@
       </p:sp>
       <p:sp>
         <p:nvSpPr>
-          <p:cNvPr id="37" name="TextBox 36"/>
+          <p:cNvPr id="38" name="TextBox 37"/>
           <p:cNvSpPr txBox="1"/>
           <p:nvPr/>
         </p:nvSpPr>
         <p:spPr>
           <a:xfrm>
-            <a:off x="457200" y="6492240"/>
-            <a:ext cx="5486400" cy="274320"/>
+            <a:off x="731520" y="6492240"/>
+            <a:ext cx="4572000" cy="274320"/>
           </a:xfrm>
           <a:prstGeom prst="rect">
             <a:avLst/>
@@ -9497,20 +9755,20 @@
             <a:pPr algn="l">
               <a:defRPr sz="900" b="0">
                 <a:solidFill>
-                  <a:srgbClr val="6B7B9E"/>
+                  <a:srgbClr val="607090"/>
                 </a:solidFill>
                 <a:latin typeface="Microsoft YaHei"/>
               </a:defRPr>
             </a:pPr>
             <a:r>
-              <a:t>模块16：合规规范</a:t>
-            </a:r>
-          </a:p>
-        </p:txBody>
-      </p:sp>
-      <p:sp>
-        <p:nvSpPr>
-          <p:cNvPr id="38" name="TextBox 37"/>
+              <a:t>模块16 · 合规规范</a:t>
+            </a:r>
+          </a:p>
+        </p:txBody>
+      </p:sp>
+      <p:sp>
+        <p:nvSpPr>
+          <p:cNvPr id="39" name="TextBox 38"/>
           <p:cNvSpPr txBox="1"/>
           <p:nvPr/>
         </p:nvSpPr>
@@ -9533,7 +9791,7 @@
             <a:pPr algn="r">
               <a:defRPr sz="900" b="0">
                 <a:solidFill>
-                  <a:srgbClr val="6B7B9E"/>
+                  <a:srgbClr val="607090"/>
                 </a:solidFill>
                 <a:latin typeface="Microsoft YaHei"/>
               </a:defRPr>
@@ -9558,7 +9816,7 @@
     <p:bg>
       <p:bgPr>
         <a:solidFill>
-          <a:srgbClr val="0B1120"/>
+          <a:srgbClr val="0A0E1A"/>
         </a:solidFill>
         <a:effectLst/>
       </p:bgPr>
@@ -9579,13 +9837,13 @@
         <p:spPr>
           <a:xfrm>
             <a:off x="0" y="0"/>
-            <a:ext cx="12191695" cy="1051560"/>
-          </a:xfrm>
-          <a:prstGeom prst="rect">
-            <a:avLst/>
-          </a:prstGeom>
-          <a:solidFill>
-            <a:srgbClr val="141E33"/>
+            <a:ext cx="12191695" cy="38100"/>
+          </a:xfrm>
+          <a:prstGeom prst="rect">
+            <a:avLst/>
+          </a:prstGeom>
+          <a:solidFill>
+            <a:srgbClr val="F43F5E"/>
           </a:solidFill>
           <a:ln>
             <a:noFill/>
@@ -9621,14 +9879,14 @@
         </p:nvSpPr>
         <p:spPr>
           <a:xfrm>
-            <a:off x="0" y="0"/>
-            <a:ext cx="109728" cy="1051560"/>
-          </a:xfrm>
-          <a:prstGeom prst="rect">
-            <a:avLst/>
-          </a:prstGeom>
-          <a:solidFill>
-            <a:srgbClr val="EF4444"/>
+            <a:off x="0" y="38100"/>
+            <a:ext cx="12191695" cy="914400"/>
+          </a:xfrm>
+          <a:prstGeom prst="rect">
+            <a:avLst/>
+          </a:prstGeom>
+          <a:solidFill>
+            <a:srgbClr val="161F35"/>
           </a:solidFill>
           <a:ln>
             <a:noFill/>
@@ -9658,14 +9916,57 @@
       </p:sp>
       <p:sp>
         <p:nvSpPr>
-          <p:cNvPr id="4" name="TextBox 3"/>
+          <p:cNvPr id="4" name="Rectangle 3"/>
+          <p:cNvSpPr/>
+          <p:nvPr/>
+        </p:nvSpPr>
+        <p:spPr>
+          <a:xfrm>
+            <a:off x="0" y="38100"/>
+            <a:ext cx="91440" cy="914400"/>
+          </a:xfrm>
+          <a:prstGeom prst="rect">
+            <a:avLst/>
+          </a:prstGeom>
+          <a:solidFill>
+            <a:srgbClr val="F43F5E"/>
+          </a:solidFill>
+          <a:ln>
+            <a:noFill/>
+          </a:ln>
+        </p:spPr>
+        <p:style>
+          <a:lnRef idx="1">
+            <a:schemeClr val="accent1"/>
+          </a:lnRef>
+          <a:fillRef idx="3">
+            <a:schemeClr val="accent1"/>
+          </a:fillRef>
+          <a:effectRef idx="2">
+            <a:schemeClr val="accent1"/>
+          </a:effectRef>
+          <a:fontRef idx="minor">
+            <a:schemeClr val="lt1"/>
+          </a:fontRef>
+        </p:style>
+        <p:txBody>
+          <a:bodyPr rtlCol="0" anchor="ctr"/>
+          <a:lstStyle/>
+          <a:p>
+            <a:pPr algn="ctr"/>
+          </a:p>
+        </p:txBody>
+      </p:sp>
+      <p:sp>
+        <p:nvSpPr>
+          <p:cNvPr id="5" name="TextBox 4"/>
           <p:cNvSpPr txBox="1"/>
           <p:nvPr/>
         </p:nvSpPr>
         <p:spPr>
           <a:xfrm>
-            <a:off x="548640" y="182880"/>
-            <a:ext cx="10058400" cy="640080"/>
+            <a:off x="731520" y="137160"/>
+            <a:ext cx="10728655" cy="640080"/>
           </a:xfrm>
           <a:prstGeom prst="rect">
             <a:avLst/>
@@ -9679,9 +9980,9 @@
           <a:lstStyle/>
           <a:p>
             <a:pPr algn="l">
-              <a:defRPr sz="2600" b="1">
+              <a:defRPr sz="2400" b="1">
                 <a:solidFill>
-                  <a:srgbClr val="FFFFFF"/>
+                  <a:srgbClr val="F0F4FC"/>
                 </a:solidFill>
                 <a:latin typeface="Microsoft YaHei"/>
               </a:defRPr>
@@ -9694,20 +9995,20 @@
       </p:sp>
       <p:sp>
         <p:nvSpPr>
-          <p:cNvPr id="5" name="Rectangle 4"/>
-          <p:cNvSpPr/>
-          <p:nvPr/>
-        </p:nvSpPr>
-        <p:spPr>
-          <a:xfrm>
-            <a:off x="0" y="1051560"/>
-            <a:ext cx="12191695" cy="25400"/>
-          </a:xfrm>
-          <a:prstGeom prst="rect">
-            <a:avLst/>
-          </a:prstGeom>
-          <a:solidFill>
-            <a:srgbClr val="EF4444"/>
+          <p:cNvPr id="6" name="Rectangle 5"/>
+          <p:cNvSpPr/>
+          <p:nvPr/>
+        </p:nvSpPr>
+        <p:spPr>
+          <a:xfrm>
+            <a:off x="0" y="1078992"/>
+            <a:ext cx="12191695" cy="12700"/>
+          </a:xfrm>
+          <a:prstGeom prst="rect">
+            <a:avLst/>
+          </a:prstGeom>
+          <a:solidFill>
+            <a:srgbClr val="253350"/>
           </a:solidFill>
           <a:ln>
             <a:noFill/>
@@ -9737,20 +10038,20 @@
       </p:sp>
       <p:sp>
         <p:nvSpPr>
-          <p:cNvPr id="6" name="Rounded Rectangle 5"/>
+          <p:cNvPr id="7" name="Rounded Rectangle 6"/>
           <p:cNvSpPr/>
           <p:nvPr/>
         </p:nvSpPr>
         <p:spPr>
           <a:xfrm>
             <a:off x="457200" y="1371600"/>
-            <a:ext cx="2583180" cy="4572000"/>
+            <a:ext cx="2628900" cy="4572000"/>
           </a:xfrm>
           <a:prstGeom prst="roundRect">
             <a:avLst/>
           </a:prstGeom>
           <a:solidFill>
-            <a:srgbClr val="141E33"/>
+            <a:srgbClr val="161F35"/>
           </a:solidFill>
           <a:ln>
             <a:noFill/>
@@ -9780,20 +10081,20 @@
       </p:sp>
       <p:sp>
         <p:nvSpPr>
-          <p:cNvPr id="7" name="Rectangle 6"/>
+          <p:cNvPr id="8" name="Rectangle 7"/>
           <p:cNvSpPr/>
           <p:nvPr/>
         </p:nvSpPr>
         <p:spPr>
           <a:xfrm>
             <a:off x="457200" y="1371600"/>
-            <a:ext cx="2583180" cy="73152"/>
-          </a:xfrm>
-          <a:prstGeom prst="rect">
-            <a:avLst/>
-          </a:prstGeom>
-          <a:solidFill>
-            <a:srgbClr val="00D4FF"/>
+            <a:ext cx="2628900" cy="38100"/>
+          </a:xfrm>
+          <a:prstGeom prst="rect">
+            <a:avLst/>
+          </a:prstGeom>
+          <a:solidFill>
+            <a:srgbClr val="00C8F0"/>
           </a:solidFill>
           <a:ln>
             <a:noFill/>
@@ -9823,20 +10124,20 @@
       </p:sp>
       <p:sp>
         <p:nvSpPr>
-          <p:cNvPr id="8" name="Oval 7"/>
-          <p:cNvSpPr/>
-          <p:nvPr/>
-        </p:nvSpPr>
-        <p:spPr>
-          <a:xfrm>
-            <a:off x="1474470" y="1737360"/>
-            <a:ext cx="548640" cy="548640"/>
+          <p:cNvPr id="9" name="Oval 8"/>
+          <p:cNvSpPr/>
+          <p:nvPr/>
+        </p:nvSpPr>
+        <p:spPr>
+          <a:xfrm>
+            <a:off x="1520190" y="1828800"/>
+            <a:ext cx="502920" cy="502920"/>
           </a:xfrm>
           <a:prstGeom prst="ellipse">
             <a:avLst/>
           </a:prstGeom>
           <a:solidFill>
-            <a:srgbClr val="00D4FF"/>
+            <a:srgbClr val="00C8F0"/>
           </a:solidFill>
           <a:ln>
             <a:noFill/>
@@ -9866,14 +10167,14 @@
       </p:sp>
       <p:sp>
         <p:nvSpPr>
-          <p:cNvPr id="9" name="TextBox 8"/>
+          <p:cNvPr id="10" name="TextBox 9"/>
           <p:cNvSpPr txBox="1"/>
           <p:nvPr/>
         </p:nvSpPr>
         <p:spPr>
           <a:xfrm>
-            <a:off x="1474470" y="1737360"/>
-            <a:ext cx="548640" cy="548640"/>
+            <a:off x="1520190" y="1828800"/>
+            <a:ext cx="502920" cy="502920"/>
           </a:xfrm>
           <a:prstGeom prst="rect">
             <a:avLst/>
@@ -9887,9 +10188,9 @@
           <a:lstStyle/>
           <a:p>
             <a:pPr algn="ctr">
-              <a:defRPr sz="1800" b="1">
+              <a:defRPr sz="1600" b="1">
                 <a:solidFill>
-                  <a:srgbClr val="FFFFFF"/>
+                  <a:srgbClr val="F0F4FC"/>
                 </a:solidFill>
                 <a:latin typeface="Microsoft YaHei"/>
               </a:defRPr>
@@ -9902,14 +10203,14 @@
       </p:sp>
       <p:sp>
         <p:nvSpPr>
-          <p:cNvPr id="10" name="TextBox 9"/>
+          <p:cNvPr id="11" name="TextBox 10"/>
           <p:cNvSpPr txBox="1"/>
           <p:nvPr/>
         </p:nvSpPr>
         <p:spPr>
           <a:xfrm>
             <a:off x="640080" y="2560320"/>
-            <a:ext cx="2217420" cy="3200400"/>
+            <a:ext cx="2263140" cy="3200400"/>
           </a:xfrm>
           <a:prstGeom prst="rect">
             <a:avLst/>
@@ -9925,7 +10226,7 @@
             <a:pPr algn="l">
               <a:defRPr sz="1400" b="0">
                 <a:solidFill>
-                  <a:srgbClr val="CBD5E8"/>
+                  <a:srgbClr val="A0AEC4"/>
                 </a:solidFill>
                 <a:latin typeface="Microsoft YaHei"/>
               </a:defRPr>
@@ -9938,14 +10239,14 @@
       </p:sp>
       <p:sp>
         <p:nvSpPr>
-          <p:cNvPr id="11" name="TextBox 10"/>
+          <p:cNvPr id="12" name="TextBox 11"/>
           <p:cNvSpPr txBox="1"/>
           <p:nvPr/>
         </p:nvSpPr>
         <p:spPr>
           <a:xfrm>
-            <a:off x="3058668" y="3474720"/>
-            <a:ext cx="228600" cy="365760"/>
+            <a:off x="3104388" y="3474720"/>
+            <a:ext cx="182880" cy="365760"/>
           </a:xfrm>
           <a:prstGeom prst="rect">
             <a:avLst/>
@@ -9958,36 +10259,36 @@
           </a:bodyPr>
           <a:lstStyle/>
           <a:p>
-            <a:pPr algn="l">
-              <a:defRPr sz="1800" b="1">
+            <a:pPr algn="ctr">
+              <a:defRPr sz="2000" b="1">
                 <a:solidFill>
-                  <a:srgbClr val="00D4FF"/>
+                  <a:srgbClr val="00C8F0"/>
                 </a:solidFill>
                 <a:latin typeface="Microsoft YaHei"/>
               </a:defRPr>
             </a:pPr>
             <a:r>
-              <a:t>→</a:t>
-            </a:r>
-          </a:p>
-        </p:txBody>
-      </p:sp>
-      <p:sp>
-        <p:nvSpPr>
-          <p:cNvPr id="12" name="Rounded Rectangle 11"/>
+              <a:t>›</a:t>
+            </a:r>
+          </a:p>
+        </p:txBody>
+      </p:sp>
+      <p:sp>
+        <p:nvSpPr>
+          <p:cNvPr id="13" name="Rounded Rectangle 12"/>
           <p:cNvSpPr/>
           <p:nvPr/>
         </p:nvSpPr>
         <p:spPr>
           <a:xfrm>
             <a:off x="3314700" y="1371600"/>
-            <a:ext cx="2583180" cy="4572000"/>
+            <a:ext cx="2628900" cy="4572000"/>
           </a:xfrm>
           <a:prstGeom prst="roundRect">
             <a:avLst/>
           </a:prstGeom>
           <a:solidFill>
-            <a:srgbClr val="141E33"/>
+            <a:srgbClr val="161F35"/>
           </a:solidFill>
           <a:ln>
             <a:noFill/>
@@ -10017,20 +10318,20 @@
       </p:sp>
       <p:sp>
         <p:nvSpPr>
-          <p:cNvPr id="13" name="Rectangle 12"/>
+          <p:cNvPr id="14" name="Rectangle 13"/>
           <p:cNvSpPr/>
           <p:nvPr/>
         </p:nvSpPr>
         <p:spPr>
           <a:xfrm>
             <a:off x="3314700" y="1371600"/>
-            <a:ext cx="2583180" cy="73152"/>
-          </a:xfrm>
-          <a:prstGeom prst="rect">
-            <a:avLst/>
-          </a:prstGeom>
-          <a:solidFill>
-            <a:srgbClr val="7C3AED"/>
+            <a:ext cx="2628900" cy="38100"/>
+          </a:xfrm>
+          <a:prstGeom prst="rect">
+            <a:avLst/>
+          </a:prstGeom>
+          <a:solidFill>
+            <a:srgbClr val="8B5CF6"/>
           </a:solidFill>
           <a:ln>
             <a:noFill/>
@@ -10060,20 +10361,20 @@
       </p:sp>
       <p:sp>
         <p:nvSpPr>
-          <p:cNvPr id="14" name="Oval 13"/>
-          <p:cNvSpPr/>
-          <p:nvPr/>
-        </p:nvSpPr>
-        <p:spPr>
-          <a:xfrm>
-            <a:off x="4331970" y="1737360"/>
-            <a:ext cx="548640" cy="548640"/>
+          <p:cNvPr id="15" name="Oval 14"/>
+          <p:cNvSpPr/>
+          <p:nvPr/>
+        </p:nvSpPr>
+        <p:spPr>
+          <a:xfrm>
+            <a:off x="4377690" y="1828800"/>
+            <a:ext cx="502920" cy="502920"/>
           </a:xfrm>
           <a:prstGeom prst="ellipse">
             <a:avLst/>
           </a:prstGeom>
           <a:solidFill>
-            <a:srgbClr val="7C3AED"/>
+            <a:srgbClr val="8B5CF6"/>
           </a:solidFill>
           <a:ln>
             <a:noFill/>
@@ -10103,14 +10404,14 @@
       </p:sp>
       <p:sp>
         <p:nvSpPr>
-          <p:cNvPr id="15" name="TextBox 14"/>
+          <p:cNvPr id="16" name="TextBox 15"/>
           <p:cNvSpPr txBox="1"/>
           <p:nvPr/>
         </p:nvSpPr>
         <p:spPr>
           <a:xfrm>
-            <a:off x="4331970" y="1737360"/>
-            <a:ext cx="548640" cy="548640"/>
+            <a:off x="4377690" y="1828800"/>
+            <a:ext cx="502920" cy="502920"/>
           </a:xfrm>
           <a:prstGeom prst="rect">
             <a:avLst/>
@@ -10124,9 +10425,9 @@
           <a:lstStyle/>
           <a:p>
             <a:pPr algn="ctr">
-              <a:defRPr sz="1800" b="1">
+              <a:defRPr sz="1600" b="1">
                 <a:solidFill>
-                  <a:srgbClr val="FFFFFF"/>
+                  <a:srgbClr val="F0F4FC"/>
                 </a:solidFill>
                 <a:latin typeface="Microsoft YaHei"/>
               </a:defRPr>
@@ -10139,14 +10440,14 @@
       </p:sp>
       <p:sp>
         <p:nvSpPr>
-          <p:cNvPr id="16" name="TextBox 15"/>
+          <p:cNvPr id="17" name="TextBox 16"/>
           <p:cNvSpPr txBox="1"/>
           <p:nvPr/>
         </p:nvSpPr>
         <p:spPr>
           <a:xfrm>
             <a:off x="3497580" y="2560320"/>
-            <a:ext cx="2217420" cy="3200400"/>
+            <a:ext cx="2263140" cy="3200400"/>
           </a:xfrm>
           <a:prstGeom prst="rect">
             <a:avLst/>
@@ -10162,7 +10463,7 @@
             <a:pPr algn="l">
               <a:defRPr sz="1400" b="0">
                 <a:solidFill>
-                  <a:srgbClr val="CBD5E8"/>
+                  <a:srgbClr val="A0AEC4"/>
                 </a:solidFill>
                 <a:latin typeface="Microsoft YaHei"/>
               </a:defRPr>
@@ -10175,14 +10476,14 @@
       </p:sp>
       <p:sp>
         <p:nvSpPr>
-          <p:cNvPr id="17" name="TextBox 16"/>
+          <p:cNvPr id="18" name="TextBox 17"/>
           <p:cNvSpPr txBox="1"/>
           <p:nvPr/>
         </p:nvSpPr>
         <p:spPr>
           <a:xfrm>
-            <a:off x="5916168" y="3474720"/>
-            <a:ext cx="228600" cy="365760"/>
+            <a:off x="5961888" y="3474720"/>
+            <a:ext cx="182880" cy="365760"/>
           </a:xfrm>
           <a:prstGeom prst="rect">
             <a:avLst/>
@@ -10195,36 +10496,36 @@
           </a:bodyPr>
           <a:lstStyle/>
           <a:p>
-            <a:pPr algn="l">
-              <a:defRPr sz="1800" b="1">
+            <a:pPr algn="ctr">
+              <a:defRPr sz="2000" b="1">
                 <a:solidFill>
-                  <a:srgbClr val="7C3AED"/>
+                  <a:srgbClr val="8B5CF6"/>
                 </a:solidFill>
                 <a:latin typeface="Microsoft YaHei"/>
               </a:defRPr>
             </a:pPr>
             <a:r>
-              <a:t>→</a:t>
-            </a:r>
-          </a:p>
-        </p:txBody>
-      </p:sp>
-      <p:sp>
-        <p:nvSpPr>
-          <p:cNvPr id="18" name="Rounded Rectangle 17"/>
+              <a:t>›</a:t>
+            </a:r>
+          </a:p>
+        </p:txBody>
+      </p:sp>
+      <p:sp>
+        <p:nvSpPr>
+          <p:cNvPr id="19" name="Rounded Rectangle 18"/>
           <p:cNvSpPr/>
           <p:nvPr/>
         </p:nvSpPr>
         <p:spPr>
           <a:xfrm>
             <a:off x="6172200" y="1371600"/>
-            <a:ext cx="2583180" cy="4572000"/>
+            <a:ext cx="2628900" cy="4572000"/>
           </a:xfrm>
           <a:prstGeom prst="roundRect">
             <a:avLst/>
           </a:prstGeom>
           <a:solidFill>
-            <a:srgbClr val="141E33"/>
+            <a:srgbClr val="161F35"/>
           </a:solidFill>
           <a:ln>
             <a:noFill/>
@@ -10254,20 +10555,20 @@
       </p:sp>
       <p:sp>
         <p:nvSpPr>
-          <p:cNvPr id="19" name="Rectangle 18"/>
+          <p:cNvPr id="20" name="Rectangle 19"/>
           <p:cNvSpPr/>
           <p:nvPr/>
         </p:nvSpPr>
         <p:spPr>
           <a:xfrm>
             <a:off x="6172200" y="1371600"/>
-            <a:ext cx="2583180" cy="73152"/>
-          </a:xfrm>
-          <a:prstGeom prst="rect">
-            <a:avLst/>
-          </a:prstGeom>
-          <a:solidFill>
-            <a:srgbClr val="FF6B35"/>
+            <a:ext cx="2628900" cy="38100"/>
+          </a:xfrm>
+          <a:prstGeom prst="rect">
+            <a:avLst/>
+          </a:prstGeom>
+          <a:solidFill>
+            <a:srgbClr val="F07A35"/>
           </a:solidFill>
           <a:ln>
             <a:noFill/>
@@ -10297,20 +10598,20 @@
       </p:sp>
       <p:sp>
         <p:nvSpPr>
-          <p:cNvPr id="20" name="Oval 19"/>
-          <p:cNvSpPr/>
-          <p:nvPr/>
-        </p:nvSpPr>
-        <p:spPr>
-          <a:xfrm>
-            <a:off x="7189470" y="1737360"/>
-            <a:ext cx="548640" cy="548640"/>
+          <p:cNvPr id="21" name="Oval 20"/>
+          <p:cNvSpPr/>
+          <p:nvPr/>
+        </p:nvSpPr>
+        <p:spPr>
+          <a:xfrm>
+            <a:off x="7235190" y="1828800"/>
+            <a:ext cx="502920" cy="502920"/>
           </a:xfrm>
           <a:prstGeom prst="ellipse">
             <a:avLst/>
           </a:prstGeom>
           <a:solidFill>
-            <a:srgbClr val="FF6B35"/>
+            <a:srgbClr val="F07A35"/>
           </a:solidFill>
           <a:ln>
             <a:noFill/>
@@ -10340,14 +10641,14 @@
       </p:sp>
       <p:sp>
         <p:nvSpPr>
-          <p:cNvPr id="21" name="TextBox 20"/>
+          <p:cNvPr id="22" name="TextBox 21"/>
           <p:cNvSpPr txBox="1"/>
           <p:nvPr/>
         </p:nvSpPr>
         <p:spPr>
           <a:xfrm>
-            <a:off x="7189470" y="1737360"/>
-            <a:ext cx="548640" cy="548640"/>
+            <a:off x="7235190" y="1828800"/>
+            <a:ext cx="502920" cy="502920"/>
           </a:xfrm>
           <a:prstGeom prst="rect">
             <a:avLst/>
@@ -10361,9 +10662,9 @@
           <a:lstStyle/>
           <a:p>
             <a:pPr algn="ctr">
-              <a:defRPr sz="1800" b="1">
+              <a:defRPr sz="1600" b="1">
                 <a:solidFill>
-                  <a:srgbClr val="FFFFFF"/>
+                  <a:srgbClr val="F0F4FC"/>
                 </a:solidFill>
                 <a:latin typeface="Microsoft YaHei"/>
               </a:defRPr>
@@ -10376,14 +10677,14 @@
       </p:sp>
       <p:sp>
         <p:nvSpPr>
-          <p:cNvPr id="22" name="TextBox 21"/>
+          <p:cNvPr id="23" name="TextBox 22"/>
           <p:cNvSpPr txBox="1"/>
           <p:nvPr/>
         </p:nvSpPr>
         <p:spPr>
           <a:xfrm>
             <a:off x="6355080" y="2560320"/>
-            <a:ext cx="2217420" cy="3200400"/>
+            <a:ext cx="2263140" cy="3200400"/>
           </a:xfrm>
           <a:prstGeom prst="rect">
             <a:avLst/>
@@ -10399,7 +10700,7 @@
             <a:pPr algn="l">
               <a:defRPr sz="1400" b="0">
                 <a:solidFill>
-                  <a:srgbClr val="CBD5E8"/>
+                  <a:srgbClr val="A0AEC4"/>
                 </a:solidFill>
                 <a:latin typeface="Microsoft YaHei"/>
               </a:defRPr>
@@ -10412,14 +10713,14 @@
       </p:sp>
       <p:sp>
         <p:nvSpPr>
-          <p:cNvPr id="23" name="TextBox 22"/>
+          <p:cNvPr id="24" name="TextBox 23"/>
           <p:cNvSpPr txBox="1"/>
           <p:nvPr/>
         </p:nvSpPr>
         <p:spPr>
           <a:xfrm>
-            <a:off x="8773668" y="3474720"/>
-            <a:ext cx="228600" cy="365760"/>
+            <a:off x="8819388" y="3474720"/>
+            <a:ext cx="182880" cy="365760"/>
           </a:xfrm>
           <a:prstGeom prst="rect">
             <a:avLst/>
@@ -10432,36 +10733,36 @@
           </a:bodyPr>
           <a:lstStyle/>
           <a:p>
-            <a:pPr algn="l">
-              <a:defRPr sz="1800" b="1">
+            <a:pPr algn="ctr">
+              <a:defRPr sz="2000" b="1">
                 <a:solidFill>
-                  <a:srgbClr val="FF6B35"/>
+                  <a:srgbClr val="F07A35"/>
                 </a:solidFill>
                 <a:latin typeface="Microsoft YaHei"/>
               </a:defRPr>
             </a:pPr>
             <a:r>
-              <a:t>→</a:t>
-            </a:r>
-          </a:p>
-        </p:txBody>
-      </p:sp>
-      <p:sp>
-        <p:nvSpPr>
-          <p:cNvPr id="24" name="Rounded Rectangle 23"/>
+              <a:t>›</a:t>
+            </a:r>
+          </a:p>
+        </p:txBody>
+      </p:sp>
+      <p:sp>
+        <p:nvSpPr>
+          <p:cNvPr id="25" name="Rounded Rectangle 24"/>
           <p:cNvSpPr/>
           <p:nvPr/>
         </p:nvSpPr>
         <p:spPr>
           <a:xfrm>
             <a:off x="9029700" y="1371600"/>
-            <a:ext cx="2583180" cy="4572000"/>
+            <a:ext cx="2628900" cy="4572000"/>
           </a:xfrm>
           <a:prstGeom prst="roundRect">
             <a:avLst/>
           </a:prstGeom>
           <a:solidFill>
-            <a:srgbClr val="141E33"/>
+            <a:srgbClr val="161F35"/>
           </a:solidFill>
           <a:ln>
             <a:noFill/>
@@ -10491,14 +10792,14 @@
       </p:sp>
       <p:sp>
         <p:nvSpPr>
-          <p:cNvPr id="25" name="Rectangle 24"/>
+          <p:cNvPr id="26" name="Rectangle 25"/>
           <p:cNvSpPr/>
           <p:nvPr/>
         </p:nvSpPr>
         <p:spPr>
           <a:xfrm>
             <a:off x="9029700" y="1371600"/>
-            <a:ext cx="2583180" cy="73152"/>
+            <a:ext cx="2628900" cy="38100"/>
           </a:xfrm>
           <a:prstGeom prst="rect">
             <a:avLst/>
@@ -10534,14 +10835,14 @@
       </p:sp>
       <p:sp>
         <p:nvSpPr>
-          <p:cNvPr id="26" name="Oval 25"/>
-          <p:cNvSpPr/>
-          <p:nvPr/>
-        </p:nvSpPr>
-        <p:spPr>
-          <a:xfrm>
-            <a:off x="10046970" y="1737360"/>
-            <a:ext cx="548640" cy="548640"/>
+          <p:cNvPr id="27" name="Oval 26"/>
+          <p:cNvSpPr/>
+          <p:nvPr/>
+        </p:nvSpPr>
+        <p:spPr>
+          <a:xfrm>
+            <a:off x="10092690" y="1828800"/>
+            <a:ext cx="502920" cy="502920"/>
           </a:xfrm>
           <a:prstGeom prst="ellipse">
             <a:avLst/>
@@ -10577,14 +10878,14 @@
       </p:sp>
       <p:sp>
         <p:nvSpPr>
-          <p:cNvPr id="27" name="TextBox 26"/>
+          <p:cNvPr id="28" name="TextBox 27"/>
           <p:cNvSpPr txBox="1"/>
           <p:nvPr/>
         </p:nvSpPr>
         <p:spPr>
           <a:xfrm>
-            <a:off x="10046970" y="1737360"/>
-            <a:ext cx="548640" cy="548640"/>
+            <a:off x="10092690" y="1828800"/>
+            <a:ext cx="502920" cy="502920"/>
           </a:xfrm>
           <a:prstGeom prst="rect">
             <a:avLst/>
@@ -10598,9 +10899,9 @@
           <a:lstStyle/>
           <a:p>
             <a:pPr algn="ctr">
-              <a:defRPr sz="1800" b="1">
+              <a:defRPr sz="1600" b="1">
                 <a:solidFill>
-                  <a:srgbClr val="FFFFFF"/>
+                  <a:srgbClr val="F0F4FC"/>
                 </a:solidFill>
                 <a:latin typeface="Microsoft YaHei"/>
               </a:defRPr>
@@ -10613,14 +10914,14 @@
       </p:sp>
       <p:sp>
         <p:nvSpPr>
-          <p:cNvPr id="28" name="TextBox 27"/>
+          <p:cNvPr id="29" name="TextBox 28"/>
           <p:cNvSpPr txBox="1"/>
           <p:nvPr/>
         </p:nvSpPr>
         <p:spPr>
           <a:xfrm>
             <a:off x="9212580" y="2560320"/>
-            <a:ext cx="2217420" cy="3200400"/>
+            <a:ext cx="2263140" cy="3200400"/>
           </a:xfrm>
           <a:prstGeom prst="rect">
             <a:avLst/>
@@ -10636,7 +10937,7 @@
             <a:pPr algn="l">
               <a:defRPr sz="1400" b="0">
                 <a:solidFill>
-                  <a:srgbClr val="CBD5E8"/>
+                  <a:srgbClr val="A0AEC4"/>
                 </a:solidFill>
                 <a:latin typeface="Microsoft YaHei"/>
               </a:defRPr>
@@ -10649,20 +10950,20 @@
       </p:sp>
       <p:sp>
         <p:nvSpPr>
-          <p:cNvPr id="29" name="Rectangle 28"/>
+          <p:cNvPr id="30" name="Rectangle 29"/>
           <p:cNvSpPr/>
           <p:nvPr/>
         </p:nvSpPr>
         <p:spPr>
           <a:xfrm>
             <a:off x="0" y="6446520"/>
-            <a:ext cx="12191695" cy="19050"/>
-          </a:xfrm>
-          <a:prstGeom prst="rect">
-            <a:avLst/>
-          </a:prstGeom>
-          <a:solidFill>
-            <a:srgbClr val="2D3B55"/>
+            <a:ext cx="12191695" cy="12700"/>
+          </a:xfrm>
+          <a:prstGeom prst="rect">
+            <a:avLst/>
+          </a:prstGeom>
+          <a:solidFill>
+            <a:srgbClr val="253350"/>
           </a:solidFill>
           <a:ln>
             <a:noFill/>
@@ -10692,14 +10993,14 @@
       </p:sp>
       <p:sp>
         <p:nvSpPr>
-          <p:cNvPr id="30" name="TextBox 29"/>
+          <p:cNvPr id="31" name="TextBox 30"/>
           <p:cNvSpPr txBox="1"/>
           <p:nvPr/>
         </p:nvSpPr>
         <p:spPr>
           <a:xfrm>
-            <a:off x="457200" y="6492240"/>
-            <a:ext cx="5486400" cy="274320"/>
+            <a:off x="731520" y="6492240"/>
+            <a:ext cx="4572000" cy="274320"/>
           </a:xfrm>
           <a:prstGeom prst="rect">
             <a:avLst/>
@@ -10715,20 +11016,20 @@
             <a:pPr algn="l">
               <a:defRPr sz="900" b="0">
                 <a:solidFill>
-                  <a:srgbClr val="6B7B9E"/>
+                  <a:srgbClr val="607090"/>
                 </a:solidFill>
                 <a:latin typeface="Microsoft YaHei"/>
               </a:defRPr>
             </a:pPr>
             <a:r>
-              <a:t>模块16：合规规范</a:t>
-            </a:r>
-          </a:p>
-        </p:txBody>
-      </p:sp>
-      <p:sp>
-        <p:nvSpPr>
-          <p:cNvPr id="31" name="TextBox 30"/>
+              <a:t>模块16 · 合规规范</a:t>
+            </a:r>
+          </a:p>
+        </p:txBody>
+      </p:sp>
+      <p:sp>
+        <p:nvSpPr>
+          <p:cNvPr id="32" name="TextBox 31"/>
           <p:cNvSpPr txBox="1"/>
           <p:nvPr/>
         </p:nvSpPr>
@@ -10751,7 +11052,7 @@
             <a:pPr algn="r">
               <a:defRPr sz="900" b="0">
                 <a:solidFill>
-                  <a:srgbClr val="6B7B9E"/>
+                  <a:srgbClr val="607090"/>
                 </a:solidFill>
                 <a:latin typeface="Microsoft YaHei"/>
               </a:defRPr>
@@ -10776,7 +11077,7 @@
     <p:bg>
       <p:bgPr>
         <a:solidFill>
-          <a:srgbClr val="0B1120"/>
+          <a:srgbClr val="0A0E1A"/>
         </a:solidFill>
         <a:effectLst/>
       </p:bgPr>
@@ -10797,13 +11098,13 @@
         <p:spPr>
           <a:xfrm>
             <a:off x="0" y="0"/>
-            <a:ext cx="12191695" cy="1051560"/>
-          </a:xfrm>
-          <a:prstGeom prst="rect">
-            <a:avLst/>
-          </a:prstGeom>
-          <a:solidFill>
-            <a:srgbClr val="141E33"/>
+            <a:ext cx="12191695" cy="38100"/>
+          </a:xfrm>
+          <a:prstGeom prst="rect">
+            <a:avLst/>
+          </a:prstGeom>
+          <a:solidFill>
+            <a:srgbClr val="F43F5E"/>
           </a:solidFill>
           <a:ln>
             <a:noFill/>
@@ -10839,14 +11140,14 @@
         </p:nvSpPr>
         <p:spPr>
           <a:xfrm>
-            <a:off x="0" y="0"/>
-            <a:ext cx="109728" cy="1051560"/>
-          </a:xfrm>
-          <a:prstGeom prst="rect">
-            <a:avLst/>
-          </a:prstGeom>
-          <a:solidFill>
-            <a:srgbClr val="EF4444"/>
+            <a:off x="0" y="38100"/>
+            <a:ext cx="12191695" cy="914400"/>
+          </a:xfrm>
+          <a:prstGeom prst="rect">
+            <a:avLst/>
+          </a:prstGeom>
+          <a:solidFill>
+            <a:srgbClr val="161F35"/>
           </a:solidFill>
           <a:ln>
             <a:noFill/>
@@ -10876,14 +11177,57 @@
       </p:sp>
       <p:sp>
         <p:nvSpPr>
-          <p:cNvPr id="4" name="TextBox 3"/>
+          <p:cNvPr id="4" name="Rectangle 3"/>
+          <p:cNvSpPr/>
+          <p:nvPr/>
+        </p:nvSpPr>
+        <p:spPr>
+          <a:xfrm>
+            <a:off x="0" y="38100"/>
+            <a:ext cx="91440" cy="914400"/>
+          </a:xfrm>
+          <a:prstGeom prst="rect">
+            <a:avLst/>
+          </a:prstGeom>
+          <a:solidFill>
+            <a:srgbClr val="F43F5E"/>
+          </a:solidFill>
+          <a:ln>
+            <a:noFill/>
+          </a:ln>
+        </p:spPr>
+        <p:style>
+          <a:lnRef idx="1">
+            <a:schemeClr val="accent1"/>
+          </a:lnRef>
+          <a:fillRef idx="3">
+            <a:schemeClr val="accent1"/>
+          </a:fillRef>
+          <a:effectRef idx="2">
+            <a:schemeClr val="accent1"/>
+          </a:effectRef>
+          <a:fontRef idx="minor">
+            <a:schemeClr val="lt1"/>
+          </a:fontRef>
+        </p:style>
+        <p:txBody>
+          <a:bodyPr rtlCol="0" anchor="ctr"/>
+          <a:lstStyle/>
+          <a:p>
+            <a:pPr algn="ctr"/>
+          </a:p>
+        </p:txBody>
+      </p:sp>
+      <p:sp>
+        <p:nvSpPr>
+          <p:cNvPr id="5" name="TextBox 4"/>
           <p:cNvSpPr txBox="1"/>
           <p:nvPr/>
         </p:nvSpPr>
         <p:spPr>
           <a:xfrm>
-            <a:off x="548640" y="182880"/>
-            <a:ext cx="10058400" cy="640080"/>
+            <a:off x="731520" y="137160"/>
+            <a:ext cx="10728655" cy="640080"/>
           </a:xfrm>
           <a:prstGeom prst="rect">
             <a:avLst/>
@@ -10897,9 +11241,9 @@
           <a:lstStyle/>
           <a:p>
             <a:pPr algn="l">
-              <a:defRPr sz="2600" b="1">
+              <a:defRPr sz="2400" b="1">
                 <a:solidFill>
-                  <a:srgbClr val="FFFFFF"/>
+                  <a:srgbClr val="F0F4FC"/>
                 </a:solidFill>
                 <a:latin typeface="Microsoft YaHei"/>
               </a:defRPr>
@@ -10912,20 +11256,20 @@
       </p:sp>
       <p:sp>
         <p:nvSpPr>
-          <p:cNvPr id="5" name="Rectangle 4"/>
-          <p:cNvSpPr/>
-          <p:nvPr/>
-        </p:nvSpPr>
-        <p:spPr>
-          <a:xfrm>
-            <a:off x="0" y="1051560"/>
-            <a:ext cx="12191695" cy="25400"/>
-          </a:xfrm>
-          <a:prstGeom prst="rect">
-            <a:avLst/>
-          </a:prstGeom>
-          <a:solidFill>
-            <a:srgbClr val="EF4444"/>
+          <p:cNvPr id="6" name="Rectangle 5"/>
+          <p:cNvSpPr/>
+          <p:nvPr/>
+        </p:nvSpPr>
+        <p:spPr>
+          <a:xfrm>
+            <a:off x="0" y="1078992"/>
+            <a:ext cx="12191695" cy="12700"/>
+          </a:xfrm>
+          <a:prstGeom prst="rect">
+            <a:avLst/>
+          </a:prstGeom>
+          <a:solidFill>
+            <a:srgbClr val="253350"/>
           </a:solidFill>
           <a:ln>
             <a:noFill/>
@@ -10955,20 +11299,20 @@
       </p:sp>
       <p:sp>
         <p:nvSpPr>
-          <p:cNvPr id="6" name="Rounded Rectangle 5"/>
-          <p:cNvSpPr/>
-          <p:nvPr/>
-        </p:nvSpPr>
-        <p:spPr>
-          <a:xfrm>
-            <a:off x="365760" y="1371600"/>
-            <a:ext cx="5486400" cy="4846320"/>
+          <p:cNvPr id="7" name="Rounded Rectangle 6"/>
+          <p:cNvSpPr/>
+          <p:nvPr/>
+        </p:nvSpPr>
+        <p:spPr>
+          <a:xfrm>
+            <a:off x="457200" y="1371600"/>
+            <a:ext cx="5349240" cy="4754880"/>
           </a:xfrm>
           <a:prstGeom prst="roundRect">
             <a:avLst/>
           </a:prstGeom>
           <a:solidFill>
-            <a:srgbClr val="141E33"/>
+            <a:srgbClr val="161F35"/>
           </a:solidFill>
           <a:ln>
             <a:noFill/>
@@ -10998,20 +11342,20 @@
       </p:sp>
       <p:sp>
         <p:nvSpPr>
-          <p:cNvPr id="7" name="Rectangle 6"/>
-          <p:cNvSpPr/>
-          <p:nvPr/>
-        </p:nvSpPr>
-        <p:spPr>
-          <a:xfrm>
-            <a:off x="365760" y="1371600"/>
-            <a:ext cx="5486400" cy="73152"/>
-          </a:xfrm>
-          <a:prstGeom prst="rect">
-            <a:avLst/>
-          </a:prstGeom>
-          <a:solidFill>
-            <a:srgbClr val="EF4444"/>
+          <p:cNvPr id="8" name="Rectangle 7"/>
+          <p:cNvSpPr/>
+          <p:nvPr/>
+        </p:nvSpPr>
+        <p:spPr>
+          <a:xfrm>
+            <a:off x="457200" y="1371600"/>
+            <a:ext cx="5349240" cy="38100"/>
+          </a:xfrm>
+          <a:prstGeom prst="rect">
+            <a:avLst/>
+          </a:prstGeom>
+          <a:solidFill>
+            <a:srgbClr val="F43F5E"/>
           </a:solidFill>
           <a:ln>
             <a:noFill/>
@@ -11041,14 +11385,14 @@
       </p:sp>
       <p:sp>
         <p:nvSpPr>
-          <p:cNvPr id="8" name="TextBox 7"/>
+          <p:cNvPr id="9" name="TextBox 8"/>
           <p:cNvSpPr txBox="1"/>
           <p:nvPr/>
         </p:nvSpPr>
         <p:spPr>
           <a:xfrm>
-            <a:off x="640080" y="1645920"/>
-            <a:ext cx="4937760" cy="457200"/>
+            <a:off x="731520" y="1600200"/>
+            <a:ext cx="4754880" cy="411480"/>
           </a:xfrm>
           <a:prstGeom prst="rect">
             <a:avLst/>
@@ -11062,9 +11406,9 @@
           <a:lstStyle/>
           <a:p>
             <a:pPr algn="l">
-              <a:defRPr sz="2000" b="1">
+              <a:defRPr sz="1800" b="1">
                 <a:solidFill>
-                  <a:srgbClr val="EF4444"/>
+                  <a:srgbClr val="F43F5E"/>
                 </a:solidFill>
                 <a:latin typeface="Microsoft YaHei"/>
               </a:defRPr>
@@ -11077,20 +11421,20 @@
       </p:sp>
       <p:sp>
         <p:nvSpPr>
-          <p:cNvPr id="9" name="Rectangle 8"/>
-          <p:cNvSpPr/>
-          <p:nvPr/>
-        </p:nvSpPr>
-        <p:spPr>
-          <a:xfrm>
-            <a:off x="640080" y="2194560"/>
-            <a:ext cx="1371600" cy="38100"/>
-          </a:xfrm>
-          <a:prstGeom prst="rect">
-            <a:avLst/>
-          </a:prstGeom>
-          <a:solidFill>
-            <a:srgbClr val="EF4444"/>
+          <p:cNvPr id="10" name="Rectangle 9"/>
+          <p:cNvSpPr/>
+          <p:nvPr/>
+        </p:nvSpPr>
+        <p:spPr>
+          <a:xfrm>
+            <a:off x="731520" y="2103120"/>
+            <a:ext cx="1097280" cy="25400"/>
+          </a:xfrm>
+          <a:prstGeom prst="rect">
+            <a:avLst/>
+          </a:prstGeom>
+          <a:solidFill>
+            <a:srgbClr val="F43F5E"/>
           </a:solidFill>
           <a:ln>
             <a:noFill/>
@@ -11120,20 +11464,20 @@
       </p:sp>
       <p:sp>
         <p:nvSpPr>
-          <p:cNvPr id="10" name="Oval 9"/>
-          <p:cNvSpPr/>
-          <p:nvPr/>
-        </p:nvSpPr>
-        <p:spPr>
-          <a:xfrm>
-            <a:off x="731520" y="2542032"/>
-            <a:ext cx="182880" cy="182880"/>
+          <p:cNvPr id="11" name="Oval 10"/>
+          <p:cNvSpPr/>
+          <p:nvPr/>
+        </p:nvSpPr>
+        <p:spPr>
+          <a:xfrm>
+            <a:off x="731520" y="2432304"/>
+            <a:ext cx="164592" cy="164592"/>
           </a:xfrm>
           <a:prstGeom prst="ellipse">
             <a:avLst/>
           </a:prstGeom>
           <a:solidFill>
-            <a:srgbClr val="EF4444"/>
+            <a:srgbClr val="F43F5E"/>
           </a:solidFill>
           <a:ln>
             <a:noFill/>
@@ -11163,14 +11507,14 @@
       </p:sp>
       <p:sp>
         <p:nvSpPr>
-          <p:cNvPr id="11" name="TextBox 10"/>
+          <p:cNvPr id="12" name="TextBox 11"/>
           <p:cNvSpPr txBox="1"/>
           <p:nvPr/>
         </p:nvSpPr>
         <p:spPr>
           <a:xfrm>
-            <a:off x="1051560" y="2468880"/>
-            <a:ext cx="4572000" cy="502920"/>
+            <a:off x="1051560" y="2377440"/>
+            <a:ext cx="4572000" cy="411480"/>
           </a:xfrm>
           <a:prstGeom prst="rect">
             <a:avLst/>
@@ -11186,7 +11530,7 @@
             <a:pPr algn="l">
               <a:defRPr sz="1400" b="0">
                 <a:solidFill>
-                  <a:srgbClr val="CBD5E8"/>
+                  <a:srgbClr val="A0AEC4"/>
                 </a:solidFill>
                 <a:latin typeface="Microsoft YaHei"/>
               </a:defRPr>
@@ -11199,20 +11543,20 @@
       </p:sp>
       <p:sp>
         <p:nvSpPr>
-          <p:cNvPr id="12" name="Oval 11"/>
-          <p:cNvSpPr/>
-          <p:nvPr/>
-        </p:nvSpPr>
-        <p:spPr>
-          <a:xfrm>
-            <a:off x="731520" y="3136392"/>
-            <a:ext cx="182880" cy="182880"/>
+          <p:cNvPr id="13" name="Oval 12"/>
+          <p:cNvSpPr/>
+          <p:nvPr/>
+        </p:nvSpPr>
+        <p:spPr>
+          <a:xfrm>
+            <a:off x="731520" y="2935224"/>
+            <a:ext cx="164592" cy="164592"/>
           </a:xfrm>
           <a:prstGeom prst="ellipse">
             <a:avLst/>
           </a:prstGeom>
           <a:solidFill>
-            <a:srgbClr val="EF4444"/>
+            <a:srgbClr val="F43F5E"/>
           </a:solidFill>
           <a:ln>
             <a:noFill/>
@@ -11242,14 +11586,14 @@
       </p:sp>
       <p:sp>
         <p:nvSpPr>
-          <p:cNvPr id="13" name="TextBox 12"/>
+          <p:cNvPr id="14" name="TextBox 13"/>
           <p:cNvSpPr txBox="1"/>
           <p:nvPr/>
         </p:nvSpPr>
         <p:spPr>
           <a:xfrm>
-            <a:off x="1051560" y="3063240"/>
-            <a:ext cx="4572000" cy="502920"/>
+            <a:off x="1051560" y="2880360"/>
+            <a:ext cx="4572000" cy="411480"/>
           </a:xfrm>
           <a:prstGeom prst="rect">
             <a:avLst/>
@@ -11265,7 +11609,7 @@
             <a:pPr algn="l">
               <a:defRPr sz="1400" b="0">
                 <a:solidFill>
-                  <a:srgbClr val="CBD5E8"/>
+                  <a:srgbClr val="A0AEC4"/>
                 </a:solidFill>
                 <a:latin typeface="Microsoft YaHei"/>
               </a:defRPr>
@@ -11278,20 +11622,20 @@
       </p:sp>
       <p:sp>
         <p:nvSpPr>
-          <p:cNvPr id="14" name="Oval 13"/>
-          <p:cNvSpPr/>
-          <p:nvPr/>
-        </p:nvSpPr>
-        <p:spPr>
-          <a:xfrm>
-            <a:off x="731520" y="3730752"/>
-            <a:ext cx="182880" cy="182880"/>
+          <p:cNvPr id="15" name="Oval 14"/>
+          <p:cNvSpPr/>
+          <p:nvPr/>
+        </p:nvSpPr>
+        <p:spPr>
+          <a:xfrm>
+            <a:off x="731520" y="3438144"/>
+            <a:ext cx="164592" cy="164592"/>
           </a:xfrm>
           <a:prstGeom prst="ellipse">
             <a:avLst/>
           </a:prstGeom>
           <a:solidFill>
-            <a:srgbClr val="EF4444"/>
+            <a:srgbClr val="F43F5E"/>
           </a:solidFill>
           <a:ln>
             <a:noFill/>
@@ -11321,14 +11665,14 @@
       </p:sp>
       <p:sp>
         <p:nvSpPr>
-          <p:cNvPr id="15" name="TextBox 14"/>
+          <p:cNvPr id="16" name="TextBox 15"/>
           <p:cNvSpPr txBox="1"/>
           <p:nvPr/>
         </p:nvSpPr>
         <p:spPr>
           <a:xfrm>
-            <a:off x="1051560" y="3657600"/>
-            <a:ext cx="4572000" cy="502920"/>
+            <a:off x="1051560" y="3383280"/>
+            <a:ext cx="4572000" cy="411480"/>
           </a:xfrm>
           <a:prstGeom prst="rect">
             <a:avLst/>
@@ -11344,7 +11688,7 @@
             <a:pPr algn="l">
               <a:defRPr sz="1400" b="0">
                 <a:solidFill>
-                  <a:srgbClr val="CBD5E8"/>
+                  <a:srgbClr val="A0AEC4"/>
                 </a:solidFill>
                 <a:latin typeface="Microsoft YaHei"/>
               </a:defRPr>
@@ -11357,20 +11701,20 @@
       </p:sp>
       <p:sp>
         <p:nvSpPr>
-          <p:cNvPr id="16" name="Oval 15"/>
-          <p:cNvSpPr/>
-          <p:nvPr/>
-        </p:nvSpPr>
-        <p:spPr>
-          <a:xfrm>
-            <a:off x="731520" y="4325112"/>
-            <a:ext cx="182880" cy="182880"/>
+          <p:cNvPr id="17" name="Oval 16"/>
+          <p:cNvSpPr/>
+          <p:nvPr/>
+        </p:nvSpPr>
+        <p:spPr>
+          <a:xfrm>
+            <a:off x="731520" y="3941064"/>
+            <a:ext cx="164592" cy="164592"/>
           </a:xfrm>
           <a:prstGeom prst="ellipse">
             <a:avLst/>
           </a:prstGeom>
           <a:solidFill>
-            <a:srgbClr val="EF4444"/>
+            <a:srgbClr val="F43F5E"/>
           </a:solidFill>
           <a:ln>
             <a:noFill/>
@@ -11400,14 +11744,14 @@
       </p:sp>
       <p:sp>
         <p:nvSpPr>
-          <p:cNvPr id="17" name="TextBox 16"/>
+          <p:cNvPr id="18" name="TextBox 17"/>
           <p:cNvSpPr txBox="1"/>
           <p:nvPr/>
         </p:nvSpPr>
         <p:spPr>
           <a:xfrm>
-            <a:off x="1051560" y="4251960"/>
-            <a:ext cx="4572000" cy="502920"/>
+            <a:off x="1051560" y="3886200"/>
+            <a:ext cx="4572000" cy="411480"/>
           </a:xfrm>
           <a:prstGeom prst="rect">
             <a:avLst/>
@@ -11423,7 +11767,7 @@
             <a:pPr algn="l">
               <a:defRPr sz="1400" b="0">
                 <a:solidFill>
-                  <a:srgbClr val="CBD5E8"/>
+                  <a:srgbClr val="A0AEC4"/>
                 </a:solidFill>
                 <a:latin typeface="Microsoft YaHei"/>
               </a:defRPr>
@@ -11436,20 +11780,20 @@
       </p:sp>
       <p:sp>
         <p:nvSpPr>
-          <p:cNvPr id="18" name="Rounded Rectangle 17"/>
-          <p:cNvSpPr/>
-          <p:nvPr/>
-        </p:nvSpPr>
-        <p:spPr>
-          <a:xfrm>
-            <a:off x="6217920" y="1371600"/>
-            <a:ext cx="5486400" cy="4846320"/>
+          <p:cNvPr id="19" name="Rounded Rectangle 18"/>
+          <p:cNvSpPr/>
+          <p:nvPr/>
+        </p:nvSpPr>
+        <p:spPr>
+          <a:xfrm>
+            <a:off x="6263640" y="1371600"/>
+            <a:ext cx="5349240" cy="4754880"/>
           </a:xfrm>
           <a:prstGeom prst="roundRect">
             <a:avLst/>
           </a:prstGeom>
           <a:solidFill>
-            <a:srgbClr val="141E33"/>
+            <a:srgbClr val="161F35"/>
           </a:solidFill>
           <a:ln>
             <a:noFill/>
@@ -11479,20 +11823,20 @@
       </p:sp>
       <p:sp>
         <p:nvSpPr>
-          <p:cNvPr id="19" name="Rectangle 18"/>
-          <p:cNvSpPr/>
-          <p:nvPr/>
-        </p:nvSpPr>
-        <p:spPr>
-          <a:xfrm>
-            <a:off x="6217920" y="1371600"/>
-            <a:ext cx="5486400" cy="73152"/>
-          </a:xfrm>
-          <a:prstGeom prst="rect">
-            <a:avLst/>
-          </a:prstGeom>
-          <a:solidFill>
-            <a:srgbClr val="7C3AED"/>
+          <p:cNvPr id="20" name="Rectangle 19"/>
+          <p:cNvSpPr/>
+          <p:nvPr/>
+        </p:nvSpPr>
+        <p:spPr>
+          <a:xfrm>
+            <a:off x="6263640" y="1371600"/>
+            <a:ext cx="5349240" cy="38100"/>
+          </a:xfrm>
+          <a:prstGeom prst="rect">
+            <a:avLst/>
+          </a:prstGeom>
+          <a:solidFill>
+            <a:srgbClr val="8B5CF6"/>
           </a:solidFill>
           <a:ln>
             <a:noFill/>
@@ -11522,14 +11866,14 @@
       </p:sp>
       <p:sp>
         <p:nvSpPr>
-          <p:cNvPr id="20" name="TextBox 19"/>
+          <p:cNvPr id="21" name="TextBox 20"/>
           <p:cNvSpPr txBox="1"/>
           <p:nvPr/>
         </p:nvSpPr>
         <p:spPr>
           <a:xfrm>
-            <a:off x="6492240" y="1645920"/>
-            <a:ext cx="4937760" cy="457200"/>
+            <a:off x="6537960" y="1600200"/>
+            <a:ext cx="4754880" cy="411480"/>
           </a:xfrm>
           <a:prstGeom prst="rect">
             <a:avLst/>
@@ -11543,9 +11887,9 @@
           <a:lstStyle/>
           <a:p>
             <a:pPr algn="l">
-              <a:defRPr sz="2000" b="1">
+              <a:defRPr sz="1800" b="1">
                 <a:solidFill>
-                  <a:srgbClr val="7C3AED"/>
+                  <a:srgbClr val="8B5CF6"/>
                 </a:solidFill>
                 <a:latin typeface="Microsoft YaHei"/>
               </a:defRPr>
@@ -11558,20 +11902,20 @@
       </p:sp>
       <p:sp>
         <p:nvSpPr>
-          <p:cNvPr id="21" name="Rectangle 20"/>
-          <p:cNvSpPr/>
-          <p:nvPr/>
-        </p:nvSpPr>
-        <p:spPr>
-          <a:xfrm>
-            <a:off x="6492240" y="2194560"/>
-            <a:ext cx="1371600" cy="38100"/>
-          </a:xfrm>
-          <a:prstGeom prst="rect">
-            <a:avLst/>
-          </a:prstGeom>
-          <a:solidFill>
-            <a:srgbClr val="7C3AED"/>
+          <p:cNvPr id="22" name="Rectangle 21"/>
+          <p:cNvSpPr/>
+          <p:nvPr/>
+        </p:nvSpPr>
+        <p:spPr>
+          <a:xfrm>
+            <a:off x="6537960" y="2103120"/>
+            <a:ext cx="1097280" cy="25400"/>
+          </a:xfrm>
+          <a:prstGeom prst="rect">
+            <a:avLst/>
+          </a:prstGeom>
+          <a:solidFill>
+            <a:srgbClr val="8B5CF6"/>
           </a:solidFill>
           <a:ln>
             <a:noFill/>
@@ -11601,20 +11945,20 @@
       </p:sp>
       <p:sp>
         <p:nvSpPr>
-          <p:cNvPr id="22" name="Oval 21"/>
-          <p:cNvSpPr/>
-          <p:nvPr/>
-        </p:nvSpPr>
-        <p:spPr>
-          <a:xfrm>
-            <a:off x="6583680" y="2542032"/>
-            <a:ext cx="182880" cy="182880"/>
+          <p:cNvPr id="23" name="Oval 22"/>
+          <p:cNvSpPr/>
+          <p:nvPr/>
+        </p:nvSpPr>
+        <p:spPr>
+          <a:xfrm>
+            <a:off x="6537960" y="2432304"/>
+            <a:ext cx="164592" cy="164592"/>
           </a:xfrm>
           <a:prstGeom prst="ellipse">
             <a:avLst/>
           </a:prstGeom>
           <a:solidFill>
-            <a:srgbClr val="7C3AED"/>
+            <a:srgbClr val="8B5CF6"/>
           </a:solidFill>
           <a:ln>
             <a:noFill/>
@@ -11644,14 +11988,14 @@
       </p:sp>
       <p:sp>
         <p:nvSpPr>
-          <p:cNvPr id="23" name="TextBox 22"/>
+          <p:cNvPr id="24" name="TextBox 23"/>
           <p:cNvSpPr txBox="1"/>
           <p:nvPr/>
         </p:nvSpPr>
         <p:spPr>
           <a:xfrm>
-            <a:off x="6903720" y="2468880"/>
-            <a:ext cx="4572000" cy="502920"/>
+            <a:off x="6858000" y="2377440"/>
+            <a:ext cx="4572000" cy="411480"/>
           </a:xfrm>
           <a:prstGeom prst="rect">
             <a:avLst/>
@@ -11667,7 +12011,7 @@
             <a:pPr algn="l">
               <a:defRPr sz="1400" b="0">
                 <a:solidFill>
-                  <a:srgbClr val="CBD5E8"/>
+                  <a:srgbClr val="A0AEC4"/>
                 </a:solidFill>
                 <a:latin typeface="Microsoft YaHei"/>
               </a:defRPr>
@@ -11680,20 +12024,20 @@
       </p:sp>
       <p:sp>
         <p:nvSpPr>
-          <p:cNvPr id="24" name="Oval 23"/>
-          <p:cNvSpPr/>
-          <p:nvPr/>
-        </p:nvSpPr>
-        <p:spPr>
-          <a:xfrm>
-            <a:off x="6583680" y="3136392"/>
-            <a:ext cx="182880" cy="182880"/>
+          <p:cNvPr id="25" name="Oval 24"/>
+          <p:cNvSpPr/>
+          <p:nvPr/>
+        </p:nvSpPr>
+        <p:spPr>
+          <a:xfrm>
+            <a:off x="6537960" y="2935224"/>
+            <a:ext cx="164592" cy="164592"/>
           </a:xfrm>
           <a:prstGeom prst="ellipse">
             <a:avLst/>
           </a:prstGeom>
           <a:solidFill>
-            <a:srgbClr val="7C3AED"/>
+            <a:srgbClr val="8B5CF6"/>
           </a:solidFill>
           <a:ln>
             <a:noFill/>
@@ -11723,14 +12067,14 @@
       </p:sp>
       <p:sp>
         <p:nvSpPr>
-          <p:cNvPr id="25" name="TextBox 24"/>
+          <p:cNvPr id="26" name="TextBox 25"/>
           <p:cNvSpPr txBox="1"/>
           <p:nvPr/>
         </p:nvSpPr>
         <p:spPr>
           <a:xfrm>
-            <a:off x="6903720" y="3063240"/>
-            <a:ext cx="4572000" cy="502920"/>
+            <a:off x="6858000" y="2880360"/>
+            <a:ext cx="4572000" cy="411480"/>
           </a:xfrm>
           <a:prstGeom prst="rect">
             <a:avLst/>
@@ -11746,7 +12090,7 @@
             <a:pPr algn="l">
               <a:defRPr sz="1400" b="0">
                 <a:solidFill>
-                  <a:srgbClr val="CBD5E8"/>
+                  <a:srgbClr val="A0AEC4"/>
                 </a:solidFill>
                 <a:latin typeface="Microsoft YaHei"/>
               </a:defRPr>
@@ -11759,20 +12103,20 @@
       </p:sp>
       <p:sp>
         <p:nvSpPr>
-          <p:cNvPr id="26" name="Oval 25"/>
-          <p:cNvSpPr/>
-          <p:nvPr/>
-        </p:nvSpPr>
-        <p:spPr>
-          <a:xfrm>
-            <a:off x="6583680" y="3730752"/>
-            <a:ext cx="182880" cy="182880"/>
+          <p:cNvPr id="27" name="Oval 26"/>
+          <p:cNvSpPr/>
+          <p:nvPr/>
+        </p:nvSpPr>
+        <p:spPr>
+          <a:xfrm>
+            <a:off x="6537960" y="3438144"/>
+            <a:ext cx="164592" cy="164592"/>
           </a:xfrm>
           <a:prstGeom prst="ellipse">
             <a:avLst/>
           </a:prstGeom>
           <a:solidFill>
-            <a:srgbClr val="7C3AED"/>
+            <a:srgbClr val="8B5CF6"/>
           </a:solidFill>
           <a:ln>
             <a:noFill/>
@@ -11802,14 +12146,14 @@
       </p:sp>
       <p:sp>
         <p:nvSpPr>
-          <p:cNvPr id="27" name="TextBox 26"/>
+          <p:cNvPr id="28" name="TextBox 27"/>
           <p:cNvSpPr txBox="1"/>
           <p:nvPr/>
         </p:nvSpPr>
         <p:spPr>
           <a:xfrm>
-            <a:off x="6903720" y="3657600"/>
-            <a:ext cx="4572000" cy="502920"/>
+            <a:off x="6858000" y="3383280"/>
+            <a:ext cx="4572000" cy="411480"/>
           </a:xfrm>
           <a:prstGeom prst="rect">
             <a:avLst/>
@@ -11825,7 +12169,7 @@
             <a:pPr algn="l">
               <a:defRPr sz="1400" b="0">
                 <a:solidFill>
-                  <a:srgbClr val="CBD5E8"/>
+                  <a:srgbClr val="A0AEC4"/>
                 </a:solidFill>
                 <a:latin typeface="Microsoft YaHei"/>
               </a:defRPr>
@@ -11838,20 +12182,20 @@
       </p:sp>
       <p:sp>
         <p:nvSpPr>
-          <p:cNvPr id="28" name="Oval 27"/>
-          <p:cNvSpPr/>
-          <p:nvPr/>
-        </p:nvSpPr>
-        <p:spPr>
-          <a:xfrm>
-            <a:off x="6583680" y="4325112"/>
-            <a:ext cx="182880" cy="182880"/>
+          <p:cNvPr id="29" name="Oval 28"/>
+          <p:cNvSpPr/>
+          <p:nvPr/>
+        </p:nvSpPr>
+        <p:spPr>
+          <a:xfrm>
+            <a:off x="6537960" y="3941064"/>
+            <a:ext cx="164592" cy="164592"/>
           </a:xfrm>
           <a:prstGeom prst="ellipse">
             <a:avLst/>
           </a:prstGeom>
           <a:solidFill>
-            <a:srgbClr val="7C3AED"/>
+            <a:srgbClr val="8B5CF6"/>
           </a:solidFill>
           <a:ln>
             <a:noFill/>
@@ -11881,14 +12225,14 @@
       </p:sp>
       <p:sp>
         <p:nvSpPr>
-          <p:cNvPr id="29" name="TextBox 28"/>
+          <p:cNvPr id="30" name="TextBox 29"/>
           <p:cNvSpPr txBox="1"/>
           <p:nvPr/>
         </p:nvSpPr>
         <p:spPr>
           <a:xfrm>
-            <a:off x="6903720" y="4251960"/>
-            <a:ext cx="4572000" cy="502920"/>
+            <a:off x="6858000" y="3886200"/>
+            <a:ext cx="4572000" cy="411480"/>
           </a:xfrm>
           <a:prstGeom prst="rect">
             <a:avLst/>
@@ -11904,7 +12248,7 @@
             <a:pPr algn="l">
               <a:defRPr sz="1400" b="0">
                 <a:solidFill>
-                  <a:srgbClr val="CBD5E8"/>
+                  <a:srgbClr val="A0AEC4"/>
                 </a:solidFill>
                 <a:latin typeface="Microsoft YaHei"/>
               </a:defRPr>
@@ -11917,20 +12261,20 @@
       </p:sp>
       <p:sp>
         <p:nvSpPr>
-          <p:cNvPr id="30" name="Rectangle 29"/>
+          <p:cNvPr id="31" name="Rectangle 30"/>
           <p:cNvSpPr/>
           <p:nvPr/>
         </p:nvSpPr>
         <p:spPr>
           <a:xfrm>
             <a:off x="0" y="6446520"/>
-            <a:ext cx="12191695" cy="19050"/>
-          </a:xfrm>
-          <a:prstGeom prst="rect">
-            <a:avLst/>
-          </a:prstGeom>
-          <a:solidFill>
-            <a:srgbClr val="2D3B55"/>
+            <a:ext cx="12191695" cy="12700"/>
+          </a:xfrm>
+          <a:prstGeom prst="rect">
+            <a:avLst/>
+          </a:prstGeom>
+          <a:solidFill>
+            <a:srgbClr val="253350"/>
           </a:solidFill>
           <a:ln>
             <a:noFill/>
@@ -11960,14 +12304,14 @@
       </p:sp>
       <p:sp>
         <p:nvSpPr>
-          <p:cNvPr id="31" name="TextBox 30"/>
+          <p:cNvPr id="32" name="TextBox 31"/>
           <p:cNvSpPr txBox="1"/>
           <p:nvPr/>
         </p:nvSpPr>
         <p:spPr>
           <a:xfrm>
-            <a:off x="457200" y="6492240"/>
-            <a:ext cx="5486400" cy="274320"/>
+            <a:off x="731520" y="6492240"/>
+            <a:ext cx="4572000" cy="274320"/>
           </a:xfrm>
           <a:prstGeom prst="rect">
             <a:avLst/>
@@ -11983,20 +12327,20 @@
             <a:pPr algn="l">
               <a:defRPr sz="900" b="0">
                 <a:solidFill>
-                  <a:srgbClr val="6B7B9E"/>
+                  <a:srgbClr val="607090"/>
                 </a:solidFill>
                 <a:latin typeface="Microsoft YaHei"/>
               </a:defRPr>
             </a:pPr>
             <a:r>
-              <a:t>模块16：合规规范</a:t>
-            </a:r>
-          </a:p>
-        </p:txBody>
-      </p:sp>
-      <p:sp>
-        <p:nvSpPr>
-          <p:cNvPr id="32" name="TextBox 31"/>
+              <a:t>模块16 · 合规规范</a:t>
+            </a:r>
+          </a:p>
+        </p:txBody>
+      </p:sp>
+      <p:sp>
+        <p:nvSpPr>
+          <p:cNvPr id="33" name="TextBox 32"/>
           <p:cNvSpPr txBox="1"/>
           <p:nvPr/>
         </p:nvSpPr>
@@ -12019,7 +12363,7 @@
             <a:pPr algn="r">
               <a:defRPr sz="900" b="0">
                 <a:solidFill>
-                  <a:srgbClr val="6B7B9E"/>
+                  <a:srgbClr val="607090"/>
                 </a:solidFill>
                 <a:latin typeface="Microsoft YaHei"/>
               </a:defRPr>
@@ -12044,7 +12388,7 @@
     <p:bg>
       <p:bgPr>
         <a:solidFill>
-          <a:srgbClr val="0B1120"/>
+          <a:srgbClr val="0A0E1A"/>
         </a:solidFill>
         <a:effectLst/>
       </p:bgPr>
@@ -12065,13 +12409,13 @@
         <p:spPr>
           <a:xfrm>
             <a:off x="0" y="0"/>
-            <a:ext cx="12191695" cy="1051560"/>
-          </a:xfrm>
-          <a:prstGeom prst="rect">
-            <a:avLst/>
-          </a:prstGeom>
-          <a:solidFill>
-            <a:srgbClr val="141E33"/>
+            <a:ext cx="12191695" cy="38100"/>
+          </a:xfrm>
+          <a:prstGeom prst="rect">
+            <a:avLst/>
+          </a:prstGeom>
+          <a:solidFill>
+            <a:srgbClr val="F43F5E"/>
           </a:solidFill>
           <a:ln>
             <a:noFill/>
@@ -12107,14 +12451,14 @@
         </p:nvSpPr>
         <p:spPr>
           <a:xfrm>
-            <a:off x="0" y="0"/>
-            <a:ext cx="109728" cy="1051560"/>
-          </a:xfrm>
-          <a:prstGeom prst="rect">
-            <a:avLst/>
-          </a:prstGeom>
-          <a:solidFill>
-            <a:srgbClr val="EF4444"/>
+            <a:off x="0" y="38100"/>
+            <a:ext cx="12191695" cy="914400"/>
+          </a:xfrm>
+          <a:prstGeom prst="rect">
+            <a:avLst/>
+          </a:prstGeom>
+          <a:solidFill>
+            <a:srgbClr val="161F35"/>
           </a:solidFill>
           <a:ln>
             <a:noFill/>
@@ -12144,14 +12488,57 @@
       </p:sp>
       <p:sp>
         <p:nvSpPr>
-          <p:cNvPr id="4" name="TextBox 3"/>
+          <p:cNvPr id="4" name="Rectangle 3"/>
+          <p:cNvSpPr/>
+          <p:nvPr/>
+        </p:nvSpPr>
+        <p:spPr>
+          <a:xfrm>
+            <a:off x="0" y="38100"/>
+            <a:ext cx="91440" cy="914400"/>
+          </a:xfrm>
+          <a:prstGeom prst="rect">
+            <a:avLst/>
+          </a:prstGeom>
+          <a:solidFill>
+            <a:srgbClr val="F43F5E"/>
+          </a:solidFill>
+          <a:ln>
+            <a:noFill/>
+          </a:ln>
+        </p:spPr>
+        <p:style>
+          <a:lnRef idx="1">
+            <a:schemeClr val="accent1"/>
+          </a:lnRef>
+          <a:fillRef idx="3">
+            <a:schemeClr val="accent1"/>
+          </a:fillRef>
+          <a:effectRef idx="2">
+            <a:schemeClr val="accent1"/>
+          </a:effectRef>
+          <a:fontRef idx="minor">
+            <a:schemeClr val="lt1"/>
+          </a:fontRef>
+        </p:style>
+        <p:txBody>
+          <a:bodyPr rtlCol="0" anchor="ctr"/>
+          <a:lstStyle/>
+          <a:p>
+            <a:pPr algn="ctr"/>
+          </a:p>
+        </p:txBody>
+      </p:sp>
+      <p:sp>
+        <p:nvSpPr>
+          <p:cNvPr id="5" name="TextBox 4"/>
           <p:cNvSpPr txBox="1"/>
           <p:nvPr/>
         </p:nvSpPr>
         <p:spPr>
           <a:xfrm>
-            <a:off x="548640" y="182880"/>
-            <a:ext cx="10058400" cy="640080"/>
+            <a:off x="731520" y="137160"/>
+            <a:ext cx="10728655" cy="640080"/>
           </a:xfrm>
           <a:prstGeom prst="rect">
             <a:avLst/>
@@ -12165,35 +12552,35 @@
           <a:lstStyle/>
           <a:p>
             <a:pPr algn="l">
-              <a:defRPr sz="2600" b="1">
+              <a:defRPr sz="2400" b="1">
                 <a:solidFill>
-                  <a:srgbClr val="FFFFFF"/>
+                  <a:srgbClr val="F0F4FC"/>
                 </a:solidFill>
                 <a:latin typeface="Microsoft YaHei"/>
               </a:defRPr>
             </a:pPr>
             <a:r>
-              <a:t>标识违规后果</a:t>
-            </a:r>
-          </a:p>
-        </p:txBody>
-      </p:sp>
-      <p:sp>
-        <p:nvSpPr>
-          <p:cNvPr id="5" name="Rectangle 4"/>
-          <p:cNvSpPr/>
-          <p:nvPr/>
-        </p:nvSpPr>
-        <p:spPr>
-          <a:xfrm>
-            <a:off x="0" y="1051560"/>
-            <a:ext cx="12191695" cy="25400"/>
-          </a:xfrm>
-          <a:prstGeom prst="rect">
-            <a:avLst/>
-          </a:prstGeom>
-          <a:solidFill>
-            <a:srgbClr val="EF4444"/>
+              <a:t>💡 标识违规后果</a:t>
+            </a:r>
+          </a:p>
+        </p:txBody>
+      </p:sp>
+      <p:sp>
+        <p:nvSpPr>
+          <p:cNvPr id="6" name="Rectangle 5"/>
+          <p:cNvSpPr/>
+          <p:nvPr/>
+        </p:nvSpPr>
+        <p:spPr>
+          <a:xfrm>
+            <a:off x="0" y="1078992"/>
+            <a:ext cx="12191695" cy="12700"/>
+          </a:xfrm>
+          <a:prstGeom prst="rect">
+            <a:avLst/>
+          </a:prstGeom>
+          <a:solidFill>
+            <a:srgbClr val="253350"/>
           </a:solidFill>
           <a:ln>
             <a:noFill/>
@@ -12223,20 +12610,20 @@
       </p:sp>
       <p:sp>
         <p:nvSpPr>
-          <p:cNvPr id="6" name="Rounded Rectangle 5"/>
-          <p:cNvSpPr/>
-          <p:nvPr/>
-        </p:nvSpPr>
-        <p:spPr>
-          <a:xfrm>
-            <a:off x="731520" y="1645920"/>
-            <a:ext cx="10698480" cy="2743200"/>
+          <p:cNvPr id="7" name="Rounded Rectangle 6"/>
+          <p:cNvSpPr/>
+          <p:nvPr/>
+        </p:nvSpPr>
+        <p:spPr>
+          <a:xfrm>
+            <a:off x="731520" y="1463040"/>
+            <a:ext cx="10698480" cy="2926080"/>
           </a:xfrm>
           <a:prstGeom prst="roundRect">
             <a:avLst/>
           </a:prstGeom>
           <a:solidFill>
-            <a:srgbClr val="141E33"/>
+            <a:srgbClr val="161F35"/>
           </a:solidFill>
           <a:ln>
             <a:noFill/>
@@ -12266,20 +12653,20 @@
       </p:sp>
       <p:sp>
         <p:nvSpPr>
-          <p:cNvPr id="7" name="Rectangle 6"/>
-          <p:cNvSpPr/>
-          <p:nvPr/>
-        </p:nvSpPr>
-        <p:spPr>
-          <a:xfrm>
-            <a:off x="731520" y="1645920"/>
-            <a:ext cx="10698480" cy="91440"/>
-          </a:xfrm>
-          <a:prstGeom prst="rect">
-            <a:avLst/>
-          </a:prstGeom>
-          <a:solidFill>
-            <a:srgbClr val="EF4444"/>
+          <p:cNvPr id="8" name="Rectangle 7"/>
+          <p:cNvSpPr/>
+          <p:nvPr/>
+        </p:nvSpPr>
+        <p:spPr>
+          <a:xfrm>
+            <a:off x="731520" y="1463040"/>
+            <a:ext cx="10698480" cy="50800"/>
+          </a:xfrm>
+          <a:prstGeom prst="rect">
+            <a:avLst/>
+          </a:prstGeom>
+          <a:solidFill>
+            <a:srgbClr val="F43F5E"/>
           </a:solidFill>
           <a:ln>
             <a:noFill/>
@@ -12309,20 +12696,20 @@
       </p:sp>
       <p:sp>
         <p:nvSpPr>
-          <p:cNvPr id="8" name="Rectangle 7"/>
-          <p:cNvSpPr/>
-          <p:nvPr/>
-        </p:nvSpPr>
-        <p:spPr>
-          <a:xfrm>
-            <a:off x="731520" y="1645920"/>
-            <a:ext cx="109728" cy="2743200"/>
-          </a:xfrm>
-          <a:prstGeom prst="rect">
-            <a:avLst/>
-          </a:prstGeom>
-          <a:solidFill>
-            <a:srgbClr val="EF4444"/>
+          <p:cNvPr id="9" name="Rectangle 8"/>
+          <p:cNvSpPr/>
+          <p:nvPr/>
+        </p:nvSpPr>
+        <p:spPr>
+          <a:xfrm>
+            <a:off x="731520" y="1463040"/>
+            <a:ext cx="63500" cy="2926080"/>
+          </a:xfrm>
+          <a:prstGeom prst="rect">
+            <a:avLst/>
+          </a:prstGeom>
+          <a:solidFill>
+            <a:srgbClr val="F43F5E"/>
           </a:solidFill>
           <a:ln>
             <a:noFill/>
@@ -12352,14 +12739,14 @@
       </p:sp>
       <p:sp>
         <p:nvSpPr>
-          <p:cNvPr id="9" name="TextBox 8"/>
+          <p:cNvPr id="10" name="TextBox 9"/>
           <p:cNvSpPr txBox="1"/>
           <p:nvPr/>
         </p:nvSpPr>
         <p:spPr>
           <a:xfrm>
-            <a:off x="1097280" y="1920240"/>
-            <a:ext cx="914400" cy="548640"/>
+            <a:off x="1188720" y="1920240"/>
+            <a:ext cx="9784080" cy="2011680"/>
           </a:xfrm>
           <a:prstGeom prst="rect">
             <a:avLst/>
@@ -12373,29 +12760,115 @@
           <a:lstStyle/>
           <a:p>
             <a:pPr algn="l">
-              <a:defRPr sz="3200" b="0">
+              <a:defRPr sz="3200" b="1">
                 <a:solidFill>
-                  <a:srgbClr val="EF4444"/>
+                  <a:srgbClr val="F0F4FC"/>
                 </a:solidFill>
                 <a:latin typeface="Microsoft YaHei"/>
               </a:defRPr>
             </a:pPr>
             <a:r>
-              <a:t>💡</a:t>
-            </a:r>
-          </a:p>
-        </p:txBody>
-      </p:sp>
-      <p:sp>
-        <p:nvSpPr>
-          <p:cNvPr id="10" name="TextBox 9"/>
+              <a:t>未标识/删除标识/伪造标识将面临限流、下架、封号、追责</a:t>
+            </a:r>
+          </a:p>
+        </p:txBody>
+      </p:sp>
+      <p:sp>
+        <p:nvSpPr>
+          <p:cNvPr id="11" name="Rounded Rectangle 10"/>
+          <p:cNvSpPr/>
+          <p:nvPr/>
+        </p:nvSpPr>
+        <p:spPr>
+          <a:xfrm>
+            <a:off x="731520" y="4663440"/>
+            <a:ext cx="10698480" cy="1463040"/>
+          </a:xfrm>
+          <a:prstGeom prst="roundRect">
+            <a:avLst/>
+          </a:prstGeom>
+          <a:solidFill>
+            <a:srgbClr val="1C2842"/>
+          </a:solidFill>
+          <a:ln>
+            <a:noFill/>
+          </a:ln>
+        </p:spPr>
+        <p:style>
+          <a:lnRef idx="1">
+            <a:schemeClr val="accent1"/>
+          </a:lnRef>
+          <a:fillRef idx="3">
+            <a:schemeClr val="accent1"/>
+          </a:fillRef>
+          <a:effectRef idx="2">
+            <a:schemeClr val="accent1"/>
+          </a:effectRef>
+          <a:fontRef idx="minor">
+            <a:schemeClr val="lt1"/>
+          </a:fontRef>
+        </p:style>
+        <p:txBody>
+          <a:bodyPr rtlCol="0" anchor="ctr"/>
+          <a:lstStyle/>
+          <a:p>
+            <a:pPr algn="ctr"/>
+          </a:p>
+        </p:txBody>
+      </p:sp>
+      <p:sp>
+        <p:nvSpPr>
+          <p:cNvPr id="12" name="Rectangle 11"/>
+          <p:cNvSpPr/>
+          <p:nvPr/>
+        </p:nvSpPr>
+        <p:spPr>
+          <a:xfrm>
+            <a:off x="731520" y="4663440"/>
+            <a:ext cx="50800" cy="1463040"/>
+          </a:xfrm>
+          <a:prstGeom prst="rect">
+            <a:avLst/>
+          </a:prstGeom>
+          <a:solidFill>
+            <a:srgbClr val="607090"/>
+          </a:solidFill>
+          <a:ln>
+            <a:noFill/>
+          </a:ln>
+        </p:spPr>
+        <p:style>
+          <a:lnRef idx="1">
+            <a:schemeClr val="accent1"/>
+          </a:lnRef>
+          <a:fillRef idx="3">
+            <a:schemeClr val="accent1"/>
+          </a:fillRef>
+          <a:effectRef idx="2">
+            <a:schemeClr val="accent1"/>
+          </a:effectRef>
+          <a:fontRef idx="minor">
+            <a:schemeClr val="lt1"/>
+          </a:fontRef>
+        </p:style>
+        <p:txBody>
+          <a:bodyPr rtlCol="0" anchor="ctr"/>
+          <a:lstStyle/>
+          <a:p>
+            <a:pPr algn="ctr"/>
+          </a:p>
+        </p:txBody>
+      </p:sp>
+      <p:sp>
+        <p:nvSpPr>
+          <p:cNvPr id="13" name="TextBox 12"/>
           <p:cNvSpPr txBox="1"/>
           <p:nvPr/>
         </p:nvSpPr>
         <p:spPr>
           <a:xfrm>
-            <a:off x="1645920" y="1965960"/>
-            <a:ext cx="2743200" cy="457200"/>
+            <a:off x="1188720" y="4800600"/>
+            <a:ext cx="9875520" cy="1188720"/>
           </a:xfrm>
           <a:prstGeom prst="rect">
             <a:avLst/>
@@ -12409,29 +12882,72 @@
           <a:lstStyle/>
           <a:p>
             <a:pPr algn="l">
-              <a:defRPr sz="1600" b="1">
+              <a:defRPr sz="1400" b="0">
                 <a:solidFill>
-                  <a:srgbClr val="EF4444"/>
+                  <a:srgbClr val="A0AEC4"/>
                 </a:solidFill>
                 <a:latin typeface="Microsoft YaHei"/>
               </a:defRPr>
             </a:pPr>
             <a:r>
-              <a:t>核心要点</a:t>
-            </a:r>
-          </a:p>
-        </p:txBody>
-      </p:sp>
-      <p:sp>
-        <p:nvSpPr>
-          <p:cNvPr id="11" name="TextBox 10"/>
+              <a:t>推荐方案：片头3-5秒文字声明"本作品使用AI技术辅助制作" + 右下角持续水印 + 简介详细说明AI工具使用情况。主动标识是合规底线，也是建立用户信任的基础。</a:t>
+            </a:r>
+          </a:p>
+        </p:txBody>
+      </p:sp>
+      <p:sp>
+        <p:nvSpPr>
+          <p:cNvPr id="14" name="Rectangle 13"/>
+          <p:cNvSpPr/>
+          <p:nvPr/>
+        </p:nvSpPr>
+        <p:spPr>
+          <a:xfrm>
+            <a:off x="0" y="6446520"/>
+            <a:ext cx="12191695" cy="12700"/>
+          </a:xfrm>
+          <a:prstGeom prst="rect">
+            <a:avLst/>
+          </a:prstGeom>
+          <a:solidFill>
+            <a:srgbClr val="253350"/>
+          </a:solidFill>
+          <a:ln>
+            <a:noFill/>
+          </a:ln>
+        </p:spPr>
+        <p:style>
+          <a:lnRef idx="1">
+            <a:schemeClr val="accent1"/>
+          </a:lnRef>
+          <a:fillRef idx="3">
+            <a:schemeClr val="accent1"/>
+          </a:fillRef>
+          <a:effectRef idx="2">
+            <a:schemeClr val="accent1"/>
+          </a:effectRef>
+          <a:fontRef idx="minor">
+            <a:schemeClr val="lt1"/>
+          </a:fontRef>
+        </p:style>
+        <p:txBody>
+          <a:bodyPr rtlCol="0" anchor="ctr"/>
+          <a:lstStyle/>
+          <a:p>
+            <a:pPr algn="ctr"/>
+          </a:p>
+        </p:txBody>
+      </p:sp>
+      <p:sp>
+        <p:nvSpPr>
+          <p:cNvPr id="15" name="TextBox 14"/>
           <p:cNvSpPr txBox="1"/>
           <p:nvPr/>
         </p:nvSpPr>
         <p:spPr>
           <a:xfrm>
-            <a:off x="1188720" y="2560320"/>
-            <a:ext cx="9784080" cy="1371600"/>
+            <a:off x="731520" y="6492240"/>
+            <a:ext cx="4572000" cy="274320"/>
           </a:xfrm>
           <a:prstGeom prst="rect">
             <a:avLst/>
@@ -12445,115 +12961,29 @@
           <a:lstStyle/>
           <a:p>
             <a:pPr algn="l">
-              <a:defRPr sz="2400" b="1">
+              <a:defRPr sz="900" b="0">
                 <a:solidFill>
-                  <a:srgbClr val="FFFFFF"/>
+                  <a:srgbClr val="607090"/>
                 </a:solidFill>
                 <a:latin typeface="Microsoft YaHei"/>
               </a:defRPr>
             </a:pPr>
             <a:r>
-              <a:t>未标识/删除标识/伪造标识将面临限流、下架、封号、追责</a:t>
-            </a:r>
-          </a:p>
-        </p:txBody>
-      </p:sp>
-      <p:sp>
-        <p:nvSpPr>
-          <p:cNvPr id="12" name="Rounded Rectangle 11"/>
-          <p:cNvSpPr/>
-          <p:nvPr/>
-        </p:nvSpPr>
-        <p:spPr>
-          <a:xfrm>
-            <a:off x="731520" y="4754880"/>
-            <a:ext cx="10698480" cy="1371600"/>
-          </a:xfrm>
-          <a:prstGeom prst="roundRect">
-            <a:avLst/>
-          </a:prstGeom>
-          <a:solidFill>
-            <a:srgbClr val="1A2842"/>
-          </a:solidFill>
-          <a:ln>
-            <a:noFill/>
-          </a:ln>
-        </p:spPr>
-        <p:style>
-          <a:lnRef idx="1">
-            <a:schemeClr val="accent1"/>
-          </a:lnRef>
-          <a:fillRef idx="3">
-            <a:schemeClr val="accent1"/>
-          </a:fillRef>
-          <a:effectRef idx="2">
-            <a:schemeClr val="accent1"/>
-          </a:effectRef>
-          <a:fontRef idx="minor">
-            <a:schemeClr val="lt1"/>
-          </a:fontRef>
-        </p:style>
-        <p:txBody>
-          <a:bodyPr rtlCol="0" anchor="ctr"/>
-          <a:lstStyle/>
-          <a:p>
-            <a:pPr algn="ctr"/>
-          </a:p>
-        </p:txBody>
-      </p:sp>
-      <p:sp>
-        <p:nvSpPr>
-          <p:cNvPr id="13" name="Rectangle 12"/>
-          <p:cNvSpPr/>
-          <p:nvPr/>
-        </p:nvSpPr>
-        <p:spPr>
-          <a:xfrm>
-            <a:off x="731520" y="4754880"/>
-            <a:ext cx="73152" cy="1371600"/>
-          </a:xfrm>
-          <a:prstGeom prst="rect">
-            <a:avLst/>
-          </a:prstGeom>
-          <a:solidFill>
-            <a:srgbClr val="6B7B9E"/>
-          </a:solidFill>
-          <a:ln>
-            <a:noFill/>
-          </a:ln>
-        </p:spPr>
-        <p:style>
-          <a:lnRef idx="1">
-            <a:schemeClr val="accent1"/>
-          </a:lnRef>
-          <a:fillRef idx="3">
-            <a:schemeClr val="accent1"/>
-          </a:fillRef>
-          <a:effectRef idx="2">
-            <a:schemeClr val="accent1"/>
-          </a:effectRef>
-          <a:fontRef idx="minor">
-            <a:schemeClr val="lt1"/>
-          </a:fontRef>
-        </p:style>
-        <p:txBody>
-          <a:bodyPr rtlCol="0" anchor="ctr"/>
-          <a:lstStyle/>
-          <a:p>
-            <a:pPr algn="ctr"/>
-          </a:p>
-        </p:txBody>
-      </p:sp>
-      <p:sp>
-        <p:nvSpPr>
-          <p:cNvPr id="14" name="TextBox 13"/>
+              <a:t>模块16 · 合规规范</a:t>
+            </a:r>
+          </a:p>
+        </p:txBody>
+      </p:sp>
+      <p:sp>
+        <p:nvSpPr>
+          <p:cNvPr id="16" name="TextBox 15"/>
           <p:cNvSpPr txBox="1"/>
           <p:nvPr/>
         </p:nvSpPr>
         <p:spPr>
           <a:xfrm>
-            <a:off x="1097280" y="4892040"/>
-            <a:ext cx="10058400" cy="1097280"/>
+            <a:off x="10515600" y="6492240"/>
+            <a:ext cx="1371600" cy="274320"/>
           </a:xfrm>
           <a:prstGeom prst="rect">
             <a:avLst/>
@@ -12566,125 +12996,10 @@
           </a:bodyPr>
           <a:lstStyle/>
           <a:p>
-            <a:pPr algn="l">
-              <a:defRPr sz="1400" b="0">
-                <a:solidFill>
-                  <a:srgbClr val="CBD5E8"/>
-                </a:solidFill>
-                <a:latin typeface="Microsoft YaHei"/>
-              </a:defRPr>
-            </a:pPr>
-            <a:r>
-              <a:t>推荐方案：片头3-5秒文字声明"本作品使用AI技术辅助制作" + 右下角持续水印 + 简介详细说明AI工具使用情况。主动标识是合规底线，也是建立用户信任的基础。</a:t>
-            </a:r>
-          </a:p>
-        </p:txBody>
-      </p:sp>
-      <p:sp>
-        <p:nvSpPr>
-          <p:cNvPr id="15" name="Rectangle 14"/>
-          <p:cNvSpPr/>
-          <p:nvPr/>
-        </p:nvSpPr>
-        <p:spPr>
-          <a:xfrm>
-            <a:off x="0" y="6446520"/>
-            <a:ext cx="12191695" cy="19050"/>
-          </a:xfrm>
-          <a:prstGeom prst="rect">
-            <a:avLst/>
-          </a:prstGeom>
-          <a:solidFill>
-            <a:srgbClr val="2D3B55"/>
-          </a:solidFill>
-          <a:ln>
-            <a:noFill/>
-          </a:ln>
-        </p:spPr>
-        <p:style>
-          <a:lnRef idx="1">
-            <a:schemeClr val="accent1"/>
-          </a:lnRef>
-          <a:fillRef idx="3">
-            <a:schemeClr val="accent1"/>
-          </a:fillRef>
-          <a:effectRef idx="2">
-            <a:schemeClr val="accent1"/>
-          </a:effectRef>
-          <a:fontRef idx="minor">
-            <a:schemeClr val="lt1"/>
-          </a:fontRef>
-        </p:style>
-        <p:txBody>
-          <a:bodyPr rtlCol="0" anchor="ctr"/>
-          <a:lstStyle/>
-          <a:p>
-            <a:pPr algn="ctr"/>
-          </a:p>
-        </p:txBody>
-      </p:sp>
-      <p:sp>
-        <p:nvSpPr>
-          <p:cNvPr id="16" name="TextBox 15"/>
-          <p:cNvSpPr txBox="1"/>
-          <p:nvPr/>
-        </p:nvSpPr>
-        <p:spPr>
-          <a:xfrm>
-            <a:off x="457200" y="6492240"/>
-            <a:ext cx="5486400" cy="274320"/>
-          </a:xfrm>
-          <a:prstGeom prst="rect">
-            <a:avLst/>
-          </a:prstGeom>
-          <a:noFill/>
-        </p:spPr>
-        <p:txBody>
-          <a:bodyPr wrap="square">
-            <a:spAutoFit/>
-          </a:bodyPr>
-          <a:lstStyle/>
-          <a:p>
-            <a:pPr algn="l">
-              <a:defRPr sz="900" b="0">
-                <a:solidFill>
-                  <a:srgbClr val="6B7B9E"/>
-                </a:solidFill>
-                <a:latin typeface="Microsoft YaHei"/>
-              </a:defRPr>
-            </a:pPr>
-            <a:r>
-              <a:t>模块16：合规规范</a:t>
-            </a:r>
-          </a:p>
-        </p:txBody>
-      </p:sp>
-      <p:sp>
-        <p:nvSpPr>
-          <p:cNvPr id="17" name="TextBox 16"/>
-          <p:cNvSpPr txBox="1"/>
-          <p:nvPr/>
-        </p:nvSpPr>
-        <p:spPr>
-          <a:xfrm>
-            <a:off x="10515600" y="6492240"/>
-            <a:ext cx="1371600" cy="274320"/>
-          </a:xfrm>
-          <a:prstGeom prst="rect">
-            <a:avLst/>
-          </a:prstGeom>
-          <a:noFill/>
-        </p:spPr>
-        <p:txBody>
-          <a:bodyPr wrap="square">
-            <a:spAutoFit/>
-          </a:bodyPr>
-          <a:lstStyle/>
-          <a:p>
             <a:pPr algn="r">
               <a:defRPr sz="900" b="0">
                 <a:solidFill>
-                  <a:srgbClr val="6B7B9E"/>
+                  <a:srgbClr val="607090"/>
                 </a:solidFill>
                 <a:latin typeface="Microsoft YaHei"/>
               </a:defRPr>
@@ -12709,7 +13024,7 @@
     <p:bg>
       <p:bgPr>
         <a:solidFill>
-          <a:srgbClr val="0B1120"/>
+          <a:srgbClr val="0A0E1A"/>
         </a:solidFill>
         <a:effectLst/>
       </p:bgPr>
@@ -12730,13 +13045,13 @@
         <p:spPr>
           <a:xfrm>
             <a:off x="0" y="0"/>
-            <a:ext cx="12191695" cy="1051560"/>
-          </a:xfrm>
-          <a:prstGeom prst="rect">
-            <a:avLst/>
-          </a:prstGeom>
-          <a:solidFill>
-            <a:srgbClr val="141E33"/>
+            <a:ext cx="12191695" cy="38100"/>
+          </a:xfrm>
+          <a:prstGeom prst="rect">
+            <a:avLst/>
+          </a:prstGeom>
+          <a:solidFill>
+            <a:srgbClr val="F43F5E"/>
           </a:solidFill>
           <a:ln>
             <a:noFill/>
@@ -12772,14 +13087,14 @@
         </p:nvSpPr>
         <p:spPr>
           <a:xfrm>
-            <a:off x="0" y="0"/>
-            <a:ext cx="109728" cy="1051560"/>
-          </a:xfrm>
-          <a:prstGeom prst="rect">
-            <a:avLst/>
-          </a:prstGeom>
-          <a:solidFill>
-            <a:srgbClr val="EF4444"/>
+            <a:off x="0" y="38100"/>
+            <a:ext cx="12191695" cy="914400"/>
+          </a:xfrm>
+          <a:prstGeom prst="rect">
+            <a:avLst/>
+          </a:prstGeom>
+          <a:solidFill>
+            <a:srgbClr val="161F35"/>
           </a:solidFill>
           <a:ln>
             <a:noFill/>
@@ -12809,14 +13124,57 @@
       </p:sp>
       <p:sp>
         <p:nvSpPr>
-          <p:cNvPr id="4" name="TextBox 3"/>
+          <p:cNvPr id="4" name="Rectangle 3"/>
+          <p:cNvSpPr/>
+          <p:nvPr/>
+        </p:nvSpPr>
+        <p:spPr>
+          <a:xfrm>
+            <a:off x="0" y="38100"/>
+            <a:ext cx="91440" cy="914400"/>
+          </a:xfrm>
+          <a:prstGeom prst="rect">
+            <a:avLst/>
+          </a:prstGeom>
+          <a:solidFill>
+            <a:srgbClr val="F43F5E"/>
+          </a:solidFill>
+          <a:ln>
+            <a:noFill/>
+          </a:ln>
+        </p:spPr>
+        <p:style>
+          <a:lnRef idx="1">
+            <a:schemeClr val="accent1"/>
+          </a:lnRef>
+          <a:fillRef idx="3">
+            <a:schemeClr val="accent1"/>
+          </a:fillRef>
+          <a:effectRef idx="2">
+            <a:schemeClr val="accent1"/>
+          </a:effectRef>
+          <a:fontRef idx="minor">
+            <a:schemeClr val="lt1"/>
+          </a:fontRef>
+        </p:style>
+        <p:txBody>
+          <a:bodyPr rtlCol="0" anchor="ctr"/>
+          <a:lstStyle/>
+          <a:p>
+            <a:pPr algn="ctr"/>
+          </a:p>
+        </p:txBody>
+      </p:sp>
+      <p:sp>
+        <p:nvSpPr>
+          <p:cNvPr id="5" name="TextBox 4"/>
           <p:cNvSpPr txBox="1"/>
           <p:nvPr/>
         </p:nvSpPr>
         <p:spPr>
           <a:xfrm>
-            <a:off x="548640" y="182880"/>
-            <a:ext cx="10058400" cy="640080"/>
+            <a:off x="731520" y="137160"/>
+            <a:ext cx="10728655" cy="640080"/>
           </a:xfrm>
           <a:prstGeom prst="rect">
             <a:avLst/>
@@ -12830,9 +13188,9 @@
           <a:lstStyle/>
           <a:p>
             <a:pPr algn="l">
-              <a:defRPr sz="2600" b="1">
+              <a:defRPr sz="2400" b="1">
                 <a:solidFill>
-                  <a:srgbClr val="FFFFFF"/>
+                  <a:srgbClr val="F0F4FC"/>
                 </a:solidFill>
                 <a:latin typeface="Microsoft YaHei"/>
               </a:defRPr>
@@ -12845,20 +13203,20 @@
       </p:sp>
       <p:sp>
         <p:nvSpPr>
-          <p:cNvPr id="5" name="Rectangle 4"/>
-          <p:cNvSpPr/>
-          <p:nvPr/>
-        </p:nvSpPr>
-        <p:spPr>
-          <a:xfrm>
-            <a:off x="0" y="1051560"/>
-            <a:ext cx="12191695" cy="25400"/>
-          </a:xfrm>
-          <a:prstGeom prst="rect">
-            <a:avLst/>
-          </a:prstGeom>
-          <a:solidFill>
-            <a:srgbClr val="EF4444"/>
+          <p:cNvPr id="6" name="Rectangle 5"/>
+          <p:cNvSpPr/>
+          <p:nvPr/>
+        </p:nvSpPr>
+        <p:spPr>
+          <a:xfrm>
+            <a:off x="0" y="1078992"/>
+            <a:ext cx="12191695" cy="12700"/>
+          </a:xfrm>
+          <a:prstGeom prst="rect">
+            <a:avLst/>
+          </a:prstGeom>
+          <a:solidFill>
+            <a:srgbClr val="253350"/>
           </a:solidFill>
           <a:ln>
             <a:noFill/>
@@ -12888,15 +13246,15 @@
       </p:sp>
       <p:graphicFrame>
         <p:nvGraphicFramePr>
-          <p:cNvPr id="6" name="Table 5"/>
+          <p:cNvPr id="7" name="Table 6"/>
           <p:cNvGraphicFramePr>
             <a:graphicFrameLocks noGrp="1"/>
           </p:cNvGraphicFramePr>
           <p:nvPr/>
         </p:nvGraphicFramePr>
         <p:xfrm>
-          <a:off x="548640" y="1463040"/>
-          <a:ext cx="11064240" cy="2377440"/>
+          <a:off x="548640" y="1371600"/>
+          <a:ext cx="11064240" cy="2194560"/>
         </p:xfrm>
         <a:graphic>
           <a:graphicData uri="http://schemas.openxmlformats.org/drawingml/2006/table">
@@ -12909,16 +13267,16 @@
                 <a:gridCol w="3688080"/>
                 <a:gridCol w="3688080"/>
               </a:tblGrid>
-              <a:tr h="594360">
+              <a:tr h="548640">
                 <a:tc>
                   <a:txBody>
                     <a:bodyPr/>
                     <a:lstStyle/>
                     <a:p>
                       <a:pPr algn="ctr">
-                        <a:defRPr sz="1400" b="1">
+                        <a:defRPr sz="1300" b="1">
                           <a:solidFill>
-                            <a:srgbClr val="FFFFFF"/>
+                            <a:srgbClr val="F0F4FC"/>
                           </a:solidFill>
                           <a:latin typeface="Microsoft YaHei"/>
                         </a:defRPr>
@@ -12930,7 +13288,7 @@
                   </a:txBody>
                   <a:tcPr anchor="ctr">
                     <a:solidFill>
-                      <a:srgbClr val="EF4444"/>
+                      <a:srgbClr val="F43F5E"/>
                     </a:solidFill>
                   </a:tcPr>
                 </a:tc>
@@ -12940,9 +13298,9 @@
                     <a:lstStyle/>
                     <a:p>
                       <a:pPr algn="ctr">
-                        <a:defRPr sz="1400" b="1">
+                        <a:defRPr sz="1300" b="1">
                           <a:solidFill>
-                            <a:srgbClr val="FFFFFF"/>
+                            <a:srgbClr val="F0F4FC"/>
                           </a:solidFill>
                           <a:latin typeface="Microsoft YaHei"/>
                         </a:defRPr>
@@ -12954,7 +13312,7 @@
                   </a:txBody>
                   <a:tcPr anchor="ctr">
                     <a:solidFill>
-                      <a:srgbClr val="EF4444"/>
+                      <a:srgbClr val="F43F5E"/>
                     </a:solidFill>
                   </a:tcPr>
                 </a:tc>
@@ -12964,9 +13322,9 @@
                     <a:lstStyle/>
                     <a:p>
                       <a:pPr algn="ctr">
-                        <a:defRPr sz="1400" b="1">
+                        <a:defRPr sz="1300" b="1">
                           <a:solidFill>
-                            <a:srgbClr val="FFFFFF"/>
+                            <a:srgbClr val="F0F4FC"/>
                           </a:solidFill>
                           <a:latin typeface="Microsoft YaHei"/>
                         </a:defRPr>
@@ -12978,21 +13336,21 @@
                   </a:txBody>
                   <a:tcPr anchor="ctr">
                     <a:solidFill>
-                      <a:srgbClr val="EF4444"/>
+                      <a:srgbClr val="F43F5E"/>
                     </a:solidFill>
                   </a:tcPr>
                 </a:tc>
               </a:tr>
-              <a:tr h="594360">
+              <a:tr h="548640">
                 <a:tc>
                   <a:txBody>
                     <a:bodyPr/>
                     <a:lstStyle/>
                     <a:p>
                       <a:pPr algn="ctr">
-                        <a:defRPr sz="1300">
+                        <a:defRPr sz="1200">
                           <a:solidFill>
-                            <a:srgbClr val="CBD5E8"/>
+                            <a:srgbClr val="A0AEC4"/>
                           </a:solidFill>
                           <a:latin typeface="Microsoft YaHei"/>
                         </a:defRPr>
@@ -13004,7 +13362,7 @@
                   </a:txBody>
                   <a:tcPr anchor="ctr">
                     <a:solidFill>
-                      <a:srgbClr val="141E33"/>
+                      <a:srgbClr val="161F35"/>
                     </a:solidFill>
                   </a:tcPr>
                 </a:tc>
@@ -13014,9 +13372,9 @@
                     <a:lstStyle/>
                     <a:p>
                       <a:pPr algn="ctr">
-                        <a:defRPr sz="1300">
+                        <a:defRPr sz="1200">
                           <a:solidFill>
-                            <a:srgbClr val="CBD5E8"/>
+                            <a:srgbClr val="A0AEC4"/>
                           </a:solidFill>
                           <a:latin typeface="Microsoft YaHei"/>
                         </a:defRPr>
@@ -13028,7 +13386,7 @@
                   </a:txBody>
                   <a:tcPr anchor="ctr">
                     <a:solidFill>
-                      <a:srgbClr val="141E33"/>
+                      <a:srgbClr val="161F35"/>
                     </a:solidFill>
                   </a:tcPr>
                 </a:tc>
@@ -13038,9 +13396,9 @@
                     <a:lstStyle/>
                     <a:p>
                       <a:pPr algn="ctr">
-                        <a:defRPr sz="1300">
+                        <a:defRPr sz="1200">
                           <a:solidFill>
-                            <a:srgbClr val="CBD5E8"/>
+                            <a:srgbClr val="A0AEC4"/>
                           </a:solidFill>
                           <a:latin typeface="Microsoft YaHei"/>
                         </a:defRPr>
@@ -13052,21 +13410,21 @@
                   </a:txBody>
                   <a:tcPr anchor="ctr">
                     <a:solidFill>
-                      <a:srgbClr val="141E33"/>
+                      <a:srgbClr val="161F35"/>
                     </a:solidFill>
                   </a:tcPr>
                 </a:tc>
               </a:tr>
-              <a:tr h="594360">
+              <a:tr h="548640">
                 <a:tc>
                   <a:txBody>
                     <a:bodyPr/>
                     <a:lstStyle/>
                     <a:p>
                       <a:pPr algn="ctr">
-                        <a:defRPr sz="1300">
+                        <a:defRPr sz="1200">
                           <a:solidFill>
-                            <a:srgbClr val="CBD5E8"/>
+                            <a:srgbClr val="A0AEC4"/>
                           </a:solidFill>
                           <a:latin typeface="Microsoft YaHei"/>
                         </a:defRPr>
@@ -13078,7 +13436,7 @@
                   </a:txBody>
                   <a:tcPr anchor="ctr">
                     <a:solidFill>
-                      <a:srgbClr val="1A2842"/>
+                      <a:srgbClr val="1C2842"/>
                     </a:solidFill>
                   </a:tcPr>
                 </a:tc>
@@ -13088,9 +13446,9 @@
                     <a:lstStyle/>
                     <a:p>
                       <a:pPr algn="ctr">
-                        <a:defRPr sz="1300">
+                        <a:defRPr sz="1200">
                           <a:solidFill>
-                            <a:srgbClr val="CBD5E8"/>
+                            <a:srgbClr val="A0AEC4"/>
                           </a:solidFill>
                           <a:latin typeface="Microsoft YaHei"/>
                         </a:defRPr>
@@ -13102,7 +13460,7 @@
                   </a:txBody>
                   <a:tcPr anchor="ctr">
                     <a:solidFill>
-                      <a:srgbClr val="1A2842"/>
+                      <a:srgbClr val="1C2842"/>
                     </a:solidFill>
                   </a:tcPr>
                 </a:tc>
@@ -13112,9 +13470,9 @@
                     <a:lstStyle/>
                     <a:p>
                       <a:pPr algn="ctr">
-                        <a:defRPr sz="1300">
+                        <a:defRPr sz="1200">
                           <a:solidFill>
-                            <a:srgbClr val="CBD5E8"/>
+                            <a:srgbClr val="A0AEC4"/>
                           </a:solidFill>
                           <a:latin typeface="Microsoft YaHei"/>
                         </a:defRPr>
@@ -13126,21 +13484,21 @@
                   </a:txBody>
                   <a:tcPr anchor="ctr">
                     <a:solidFill>
-                      <a:srgbClr val="1A2842"/>
+                      <a:srgbClr val="1C2842"/>
                     </a:solidFill>
                   </a:tcPr>
                 </a:tc>
               </a:tr>
-              <a:tr h="594360">
+              <a:tr h="548640">
                 <a:tc>
                   <a:txBody>
                     <a:bodyPr/>
                     <a:lstStyle/>
                     <a:p>
                       <a:pPr algn="ctr">
-                        <a:defRPr sz="1300">
+                        <a:defRPr sz="1200">
                           <a:solidFill>
-                            <a:srgbClr val="CBD5E8"/>
+                            <a:srgbClr val="A0AEC4"/>
                           </a:solidFill>
                           <a:latin typeface="Microsoft YaHei"/>
                         </a:defRPr>
@@ -13152,7 +13510,7 @@
                   </a:txBody>
                   <a:tcPr anchor="ctr">
                     <a:solidFill>
-                      <a:srgbClr val="141E33"/>
+                      <a:srgbClr val="161F35"/>
                     </a:solidFill>
                   </a:tcPr>
                 </a:tc>
@@ -13162,9 +13520,9 @@
                     <a:lstStyle/>
                     <a:p>
                       <a:pPr algn="ctr">
-                        <a:defRPr sz="1300">
+                        <a:defRPr sz="1200">
                           <a:solidFill>
-                            <a:srgbClr val="CBD5E8"/>
+                            <a:srgbClr val="A0AEC4"/>
                           </a:solidFill>
                           <a:latin typeface="Microsoft YaHei"/>
                         </a:defRPr>
@@ -13176,7 +13534,7 @@
                   </a:txBody>
                   <a:tcPr anchor="ctr">
                     <a:solidFill>
-                      <a:srgbClr val="141E33"/>
+                      <a:srgbClr val="161F35"/>
                     </a:solidFill>
                   </a:tcPr>
                 </a:tc>
@@ -13186,9 +13544,9 @@
                     <a:lstStyle/>
                     <a:p>
                       <a:pPr algn="ctr">
-                        <a:defRPr sz="1300">
+                        <a:defRPr sz="1200">
                           <a:solidFill>
-                            <a:srgbClr val="CBD5E8"/>
+                            <a:srgbClr val="A0AEC4"/>
                           </a:solidFill>
                           <a:latin typeface="Microsoft YaHei"/>
                         </a:defRPr>
@@ -13200,7 +13558,7 @@
                   </a:txBody>
                   <a:tcPr anchor="ctr">
                     <a:solidFill>
-                      <a:srgbClr val="141E33"/>
+                      <a:srgbClr val="161F35"/>
                     </a:solidFill>
                   </a:tcPr>
                 </a:tc>
@@ -13211,20 +13569,20 @@
       </p:graphicFrame>
       <p:sp>
         <p:nvSpPr>
-          <p:cNvPr id="7" name="Rectangle 6"/>
+          <p:cNvPr id="8" name="Rectangle 7"/>
           <p:cNvSpPr/>
           <p:nvPr/>
         </p:nvSpPr>
         <p:spPr>
           <a:xfrm>
             <a:off x="0" y="6446520"/>
-            <a:ext cx="12191695" cy="19050"/>
-          </a:xfrm>
-          <a:prstGeom prst="rect">
-            <a:avLst/>
-          </a:prstGeom>
-          <a:solidFill>
-            <a:srgbClr val="2D3B55"/>
+            <a:ext cx="12191695" cy="12700"/>
+          </a:xfrm>
+          <a:prstGeom prst="rect">
+            <a:avLst/>
+          </a:prstGeom>
+          <a:solidFill>
+            <a:srgbClr val="253350"/>
           </a:solidFill>
           <a:ln>
             <a:noFill/>
@@ -13254,14 +13612,14 @@
       </p:sp>
       <p:sp>
         <p:nvSpPr>
-          <p:cNvPr id="8" name="TextBox 7"/>
+          <p:cNvPr id="9" name="TextBox 8"/>
           <p:cNvSpPr txBox="1"/>
           <p:nvPr/>
         </p:nvSpPr>
         <p:spPr>
           <a:xfrm>
-            <a:off x="457200" y="6492240"/>
-            <a:ext cx="5486400" cy="274320"/>
+            <a:off x="731520" y="6492240"/>
+            <a:ext cx="4572000" cy="274320"/>
           </a:xfrm>
           <a:prstGeom prst="rect">
             <a:avLst/>
@@ -13277,20 +13635,20 @@
             <a:pPr algn="l">
               <a:defRPr sz="900" b="0">
                 <a:solidFill>
-                  <a:srgbClr val="6B7B9E"/>
+                  <a:srgbClr val="607090"/>
                 </a:solidFill>
                 <a:latin typeface="Microsoft YaHei"/>
               </a:defRPr>
             </a:pPr>
             <a:r>
-              <a:t>模块16：合规规范</a:t>
-            </a:r>
-          </a:p>
-        </p:txBody>
-      </p:sp>
-      <p:sp>
-        <p:nvSpPr>
-          <p:cNvPr id="9" name="TextBox 8"/>
+              <a:t>模块16 · 合规规范</a:t>
+            </a:r>
+          </a:p>
+        </p:txBody>
+      </p:sp>
+      <p:sp>
+        <p:nvSpPr>
+          <p:cNvPr id="10" name="TextBox 9"/>
           <p:cNvSpPr txBox="1"/>
           <p:nvPr/>
         </p:nvSpPr>
@@ -13313,7 +13671,7 @@
             <a:pPr algn="r">
               <a:defRPr sz="900" b="0">
                 <a:solidFill>
-                  <a:srgbClr val="6B7B9E"/>
+                  <a:srgbClr val="607090"/>
                 </a:solidFill>
                 <a:latin typeface="Microsoft YaHei"/>
               </a:defRPr>
@@ -13338,7 +13696,7 @@
     <p:bg>
       <p:bgPr>
         <a:solidFill>
-          <a:srgbClr val="0B1120"/>
+          <a:srgbClr val="0A0E1A"/>
         </a:solidFill>
         <a:effectLst/>
       </p:bgPr>
@@ -13359,13 +13717,13 @@
         <p:spPr>
           <a:xfrm>
             <a:off x="0" y="0"/>
-            <a:ext cx="12191695" cy="1051560"/>
-          </a:xfrm>
-          <a:prstGeom prst="rect">
-            <a:avLst/>
-          </a:prstGeom>
-          <a:solidFill>
-            <a:srgbClr val="141E33"/>
+            <a:ext cx="12191695" cy="38100"/>
+          </a:xfrm>
+          <a:prstGeom prst="rect">
+            <a:avLst/>
+          </a:prstGeom>
+          <a:solidFill>
+            <a:srgbClr val="F43F5E"/>
           </a:solidFill>
           <a:ln>
             <a:noFill/>
@@ -13401,14 +13759,14 @@
         </p:nvSpPr>
         <p:spPr>
           <a:xfrm>
-            <a:off x="0" y="0"/>
-            <a:ext cx="109728" cy="1051560"/>
-          </a:xfrm>
-          <a:prstGeom prst="rect">
-            <a:avLst/>
-          </a:prstGeom>
-          <a:solidFill>
-            <a:srgbClr val="EF4444"/>
+            <a:off x="0" y="38100"/>
+            <a:ext cx="12191695" cy="914400"/>
+          </a:xfrm>
+          <a:prstGeom prst="rect">
+            <a:avLst/>
+          </a:prstGeom>
+          <a:solidFill>
+            <a:srgbClr val="161F35"/>
           </a:solidFill>
           <a:ln>
             <a:noFill/>
@@ -13438,14 +13796,57 @@
       </p:sp>
       <p:sp>
         <p:nvSpPr>
-          <p:cNvPr id="4" name="TextBox 3"/>
+          <p:cNvPr id="4" name="Rectangle 3"/>
+          <p:cNvSpPr/>
+          <p:nvPr/>
+        </p:nvSpPr>
+        <p:spPr>
+          <a:xfrm>
+            <a:off x="0" y="38100"/>
+            <a:ext cx="91440" cy="914400"/>
+          </a:xfrm>
+          <a:prstGeom prst="rect">
+            <a:avLst/>
+          </a:prstGeom>
+          <a:solidFill>
+            <a:srgbClr val="F43F5E"/>
+          </a:solidFill>
+          <a:ln>
+            <a:noFill/>
+          </a:ln>
+        </p:spPr>
+        <p:style>
+          <a:lnRef idx="1">
+            <a:schemeClr val="accent1"/>
+          </a:lnRef>
+          <a:fillRef idx="3">
+            <a:schemeClr val="accent1"/>
+          </a:fillRef>
+          <a:effectRef idx="2">
+            <a:schemeClr val="accent1"/>
+          </a:effectRef>
+          <a:fontRef idx="minor">
+            <a:schemeClr val="lt1"/>
+          </a:fontRef>
+        </p:style>
+        <p:txBody>
+          <a:bodyPr rtlCol="0" anchor="ctr"/>
+          <a:lstStyle/>
+          <a:p>
+            <a:pPr algn="ctr"/>
+          </a:p>
+        </p:txBody>
+      </p:sp>
+      <p:sp>
+        <p:nvSpPr>
+          <p:cNvPr id="5" name="TextBox 4"/>
           <p:cNvSpPr txBox="1"/>
           <p:nvPr/>
         </p:nvSpPr>
         <p:spPr>
           <a:xfrm>
-            <a:off x="548640" y="182880"/>
-            <a:ext cx="10058400" cy="640080"/>
+            <a:off x="731520" y="137160"/>
+            <a:ext cx="10728655" cy="640080"/>
           </a:xfrm>
           <a:prstGeom prst="rect">
             <a:avLst/>
@@ -13459,9 +13860,9 @@
           <a:lstStyle/>
           <a:p>
             <a:pPr algn="l">
-              <a:defRPr sz="2600" b="1">
+              <a:defRPr sz="2400" b="1">
                 <a:solidFill>
-                  <a:srgbClr val="FFFFFF"/>
+                  <a:srgbClr val="F0F4FC"/>
                 </a:solidFill>
                 <a:latin typeface="Microsoft YaHei"/>
               </a:defRPr>
@@ -13474,20 +13875,20 @@
       </p:sp>
       <p:sp>
         <p:nvSpPr>
-          <p:cNvPr id="5" name="Rectangle 4"/>
-          <p:cNvSpPr/>
-          <p:nvPr/>
-        </p:nvSpPr>
-        <p:spPr>
-          <a:xfrm>
-            <a:off x="0" y="1051560"/>
-            <a:ext cx="12191695" cy="25400"/>
-          </a:xfrm>
-          <a:prstGeom prst="rect">
-            <a:avLst/>
-          </a:prstGeom>
-          <a:solidFill>
-            <a:srgbClr val="EF4444"/>
+          <p:cNvPr id="6" name="Rectangle 5"/>
+          <p:cNvSpPr/>
+          <p:nvPr/>
+        </p:nvSpPr>
+        <p:spPr>
+          <a:xfrm>
+            <a:off x="0" y="1078992"/>
+            <a:ext cx="12191695" cy="12700"/>
+          </a:xfrm>
+          <a:prstGeom prst="rect">
+            <a:avLst/>
+          </a:prstGeom>
+          <a:solidFill>
+            <a:srgbClr val="253350"/>
           </a:solidFill>
           <a:ln>
             <a:noFill/>
@@ -13517,20 +13918,20 @@
       </p:sp>
       <p:sp>
         <p:nvSpPr>
-          <p:cNvPr id="6" name="Rounded Rectangle 5"/>
-          <p:cNvSpPr/>
-          <p:nvPr/>
-        </p:nvSpPr>
-        <p:spPr>
-          <a:xfrm>
-            <a:off x="457200" y="1325880"/>
-            <a:ext cx="11247120" cy="731520"/>
+          <p:cNvPr id="7" name="Rounded Rectangle 6"/>
+          <p:cNvSpPr/>
+          <p:nvPr/>
+        </p:nvSpPr>
+        <p:spPr>
+          <a:xfrm>
+            <a:off x="457200" y="1280160"/>
+            <a:ext cx="11247120" cy="685800"/>
           </a:xfrm>
           <a:prstGeom prst="roundRect">
             <a:avLst/>
           </a:prstGeom>
           <a:solidFill>
-            <a:srgbClr val="141E33"/>
+            <a:srgbClr val="161F35"/>
           </a:solidFill>
           <a:ln>
             <a:noFill/>
@@ -13560,20 +13961,20 @@
       </p:sp>
       <p:sp>
         <p:nvSpPr>
-          <p:cNvPr id="7" name="Rectangle 6"/>
-          <p:cNvSpPr/>
-          <p:nvPr/>
-        </p:nvSpPr>
-        <p:spPr>
-          <a:xfrm>
-            <a:off x="457200" y="1325880"/>
-            <a:ext cx="73152" cy="731520"/>
-          </a:xfrm>
-          <a:prstGeom prst="rect">
-            <a:avLst/>
-          </a:prstGeom>
-          <a:solidFill>
-            <a:srgbClr val="EF4444"/>
+          <p:cNvPr id="8" name="Rectangle 7"/>
+          <p:cNvSpPr/>
+          <p:nvPr/>
+        </p:nvSpPr>
+        <p:spPr>
+          <a:xfrm>
+            <a:off x="457200" y="1280160"/>
+            <a:ext cx="54864" cy="685800"/>
+          </a:xfrm>
+          <a:prstGeom prst="rect">
+            <a:avLst/>
+          </a:prstGeom>
+          <a:solidFill>
+            <a:srgbClr val="F43F5E"/>
           </a:solidFill>
           <a:ln>
             <a:noFill/>
@@ -13603,20 +14004,20 @@
       </p:sp>
       <p:sp>
         <p:nvSpPr>
-          <p:cNvPr id="8" name="Oval 7"/>
-          <p:cNvSpPr/>
-          <p:nvPr/>
-        </p:nvSpPr>
-        <p:spPr>
-          <a:xfrm>
-            <a:off x="731520" y="1490472"/>
-            <a:ext cx="365760" cy="365760"/>
+          <p:cNvPr id="9" name="Oval 8"/>
+          <p:cNvSpPr/>
+          <p:nvPr/>
+        </p:nvSpPr>
+        <p:spPr>
+          <a:xfrm>
+            <a:off x="685800" y="1463040"/>
+            <a:ext cx="320040" cy="320040"/>
           </a:xfrm>
           <a:prstGeom prst="ellipse">
             <a:avLst/>
           </a:prstGeom>
           <a:solidFill>
-            <a:srgbClr val="EF4444"/>
+            <a:srgbClr val="F43F5E"/>
           </a:solidFill>
           <a:ln>
             <a:noFill/>
@@ -13646,14 +14047,14 @@
       </p:sp>
       <p:sp>
         <p:nvSpPr>
-          <p:cNvPr id="9" name="TextBox 8"/>
+          <p:cNvPr id="10" name="TextBox 9"/>
           <p:cNvSpPr txBox="1"/>
           <p:nvPr/>
         </p:nvSpPr>
         <p:spPr>
           <a:xfrm>
-            <a:off x="731520" y="1490472"/>
-            <a:ext cx="365760" cy="365760"/>
+            <a:off x="685800" y="1463040"/>
+            <a:ext cx="320040" cy="320040"/>
           </a:xfrm>
           <a:prstGeom prst="rect">
             <a:avLst/>
@@ -13667,9 +14068,9 @@
           <a:lstStyle/>
           <a:p>
             <a:pPr algn="ctr">
-              <a:defRPr sz="1100" b="1">
+              <a:defRPr sz="1000" b="1">
                 <a:solidFill>
-                  <a:srgbClr val="FFFFFF"/>
+                  <a:srgbClr val="F0F4FC"/>
                 </a:solidFill>
                 <a:latin typeface="Microsoft YaHei"/>
               </a:defRPr>
@@ -13682,14 +14083,14 @@
       </p:sp>
       <p:sp>
         <p:nvSpPr>
-          <p:cNvPr id="10" name="TextBox 9"/>
+          <p:cNvPr id="11" name="TextBox 10"/>
           <p:cNvSpPr txBox="1"/>
           <p:nvPr/>
         </p:nvSpPr>
         <p:spPr>
           <a:xfrm>
-            <a:off x="1280160" y="1417320"/>
-            <a:ext cx="10058400" cy="548640"/>
+            <a:off x="1188720" y="1440180"/>
+            <a:ext cx="10058400" cy="365760"/>
           </a:xfrm>
           <a:prstGeom prst="rect">
             <a:avLst/>
@@ -13703,9 +14104,9 @@
           <a:lstStyle/>
           <a:p>
             <a:pPr algn="l">
-              <a:defRPr sz="1500" b="0">
+              <a:defRPr sz="1400" b="0">
                 <a:solidFill>
-                  <a:srgbClr val="CBD5E8"/>
+                  <a:srgbClr val="A0AEC4"/>
                 </a:solidFill>
                 <a:latin typeface="Microsoft YaHei"/>
               </a:defRPr>
@@ -13718,20 +14119,20 @@
       </p:sp>
       <p:sp>
         <p:nvSpPr>
-          <p:cNvPr id="11" name="Rounded Rectangle 10"/>
-          <p:cNvSpPr/>
-          <p:nvPr/>
-        </p:nvSpPr>
-        <p:spPr>
-          <a:xfrm>
-            <a:off x="457200" y="2194560"/>
-            <a:ext cx="11247120" cy="731520"/>
+          <p:cNvPr id="12" name="Rounded Rectangle 11"/>
+          <p:cNvSpPr/>
+          <p:nvPr/>
+        </p:nvSpPr>
+        <p:spPr>
+          <a:xfrm>
+            <a:off x="457200" y="2297430"/>
+            <a:ext cx="11247120" cy="685800"/>
           </a:xfrm>
           <a:prstGeom prst="roundRect">
             <a:avLst/>
           </a:prstGeom>
           <a:solidFill>
-            <a:srgbClr val="141E33"/>
+            <a:srgbClr val="161F35"/>
           </a:solidFill>
           <a:ln>
             <a:noFill/>
@@ -13761,20 +14162,20 @@
       </p:sp>
       <p:sp>
         <p:nvSpPr>
-          <p:cNvPr id="12" name="Rectangle 11"/>
-          <p:cNvSpPr/>
-          <p:nvPr/>
-        </p:nvSpPr>
-        <p:spPr>
-          <a:xfrm>
-            <a:off x="457200" y="2194560"/>
-            <a:ext cx="73152" cy="731520"/>
-          </a:xfrm>
-          <a:prstGeom prst="rect">
-            <a:avLst/>
-          </a:prstGeom>
-          <a:solidFill>
-            <a:srgbClr val="EF4444"/>
+          <p:cNvPr id="13" name="Rectangle 12"/>
+          <p:cNvSpPr/>
+          <p:nvPr/>
+        </p:nvSpPr>
+        <p:spPr>
+          <a:xfrm>
+            <a:off x="457200" y="2297430"/>
+            <a:ext cx="54864" cy="685800"/>
+          </a:xfrm>
+          <a:prstGeom prst="rect">
+            <a:avLst/>
+          </a:prstGeom>
+          <a:solidFill>
+            <a:srgbClr val="F43F5E"/>
           </a:solidFill>
           <a:ln>
             <a:noFill/>
@@ -13804,20 +14205,20 @@
       </p:sp>
       <p:sp>
         <p:nvSpPr>
-          <p:cNvPr id="13" name="Oval 12"/>
-          <p:cNvSpPr/>
-          <p:nvPr/>
-        </p:nvSpPr>
-        <p:spPr>
-          <a:xfrm>
-            <a:off x="731520" y="2359152"/>
-            <a:ext cx="365760" cy="365760"/>
+          <p:cNvPr id="14" name="Oval 13"/>
+          <p:cNvSpPr/>
+          <p:nvPr/>
+        </p:nvSpPr>
+        <p:spPr>
+          <a:xfrm>
+            <a:off x="685800" y="2480310"/>
+            <a:ext cx="320040" cy="320040"/>
           </a:xfrm>
           <a:prstGeom prst="ellipse">
             <a:avLst/>
           </a:prstGeom>
           <a:solidFill>
-            <a:srgbClr val="EF4444"/>
+            <a:srgbClr val="F43F5E"/>
           </a:solidFill>
           <a:ln>
             <a:noFill/>
@@ -13847,14 +14248,14 @@
       </p:sp>
       <p:sp>
         <p:nvSpPr>
-          <p:cNvPr id="14" name="TextBox 13"/>
+          <p:cNvPr id="15" name="TextBox 14"/>
           <p:cNvSpPr txBox="1"/>
           <p:nvPr/>
         </p:nvSpPr>
         <p:spPr>
           <a:xfrm>
-            <a:off x="731520" y="2359152"/>
-            <a:ext cx="365760" cy="365760"/>
+            <a:off x="685800" y="2480310"/>
+            <a:ext cx="320040" cy="320040"/>
           </a:xfrm>
           <a:prstGeom prst="rect">
             <a:avLst/>
@@ -13868,9 +14269,9 @@
           <a:lstStyle/>
           <a:p>
             <a:pPr algn="ctr">
-              <a:defRPr sz="1100" b="1">
+              <a:defRPr sz="1000" b="1">
                 <a:solidFill>
-                  <a:srgbClr val="FFFFFF"/>
+                  <a:srgbClr val="F0F4FC"/>
                 </a:solidFill>
                 <a:latin typeface="Microsoft YaHei"/>
               </a:defRPr>
@@ -13883,14 +14284,14 @@
       </p:sp>
       <p:sp>
         <p:nvSpPr>
-          <p:cNvPr id="15" name="TextBox 14"/>
+          <p:cNvPr id="16" name="TextBox 15"/>
           <p:cNvSpPr txBox="1"/>
           <p:nvPr/>
         </p:nvSpPr>
         <p:spPr>
           <a:xfrm>
-            <a:off x="1280160" y="2286000"/>
-            <a:ext cx="10058400" cy="548640"/>
+            <a:off x="1188720" y="2457450"/>
+            <a:ext cx="10058400" cy="365760"/>
           </a:xfrm>
           <a:prstGeom prst="rect">
             <a:avLst/>
@@ -13904,9 +14305,9 @@
           <a:lstStyle/>
           <a:p>
             <a:pPr algn="l">
-              <a:defRPr sz="1500" b="0">
+              <a:defRPr sz="1400" b="0">
                 <a:solidFill>
-                  <a:srgbClr val="CBD5E8"/>
+                  <a:srgbClr val="A0AEC4"/>
                 </a:solidFill>
                 <a:latin typeface="Microsoft YaHei"/>
               </a:defRPr>
@@ -13919,20 +14320,20 @@
       </p:sp>
       <p:sp>
         <p:nvSpPr>
-          <p:cNvPr id="16" name="Rounded Rectangle 15"/>
-          <p:cNvSpPr/>
-          <p:nvPr/>
-        </p:nvSpPr>
-        <p:spPr>
-          <a:xfrm>
-            <a:off x="457200" y="3063240"/>
-            <a:ext cx="11247120" cy="731520"/>
+          <p:cNvPr id="17" name="Rounded Rectangle 16"/>
+          <p:cNvSpPr/>
+          <p:nvPr/>
+        </p:nvSpPr>
+        <p:spPr>
+          <a:xfrm>
+            <a:off x="457200" y="3314700"/>
+            <a:ext cx="11247120" cy="685800"/>
           </a:xfrm>
           <a:prstGeom prst="roundRect">
             <a:avLst/>
           </a:prstGeom>
           <a:solidFill>
-            <a:srgbClr val="141E33"/>
+            <a:srgbClr val="161F35"/>
           </a:solidFill>
           <a:ln>
             <a:noFill/>
@@ -13962,20 +14363,20 @@
       </p:sp>
       <p:sp>
         <p:nvSpPr>
-          <p:cNvPr id="17" name="Rectangle 16"/>
-          <p:cNvSpPr/>
-          <p:nvPr/>
-        </p:nvSpPr>
-        <p:spPr>
-          <a:xfrm>
-            <a:off x="457200" y="3063240"/>
-            <a:ext cx="73152" cy="731520"/>
-          </a:xfrm>
-          <a:prstGeom prst="rect">
-            <a:avLst/>
-          </a:prstGeom>
-          <a:solidFill>
-            <a:srgbClr val="EF4444"/>
+          <p:cNvPr id="18" name="Rectangle 17"/>
+          <p:cNvSpPr/>
+          <p:nvPr/>
+        </p:nvSpPr>
+        <p:spPr>
+          <a:xfrm>
+            <a:off x="457200" y="3314700"/>
+            <a:ext cx="54864" cy="685800"/>
+          </a:xfrm>
+          <a:prstGeom prst="rect">
+            <a:avLst/>
+          </a:prstGeom>
+          <a:solidFill>
+            <a:srgbClr val="F43F5E"/>
           </a:solidFill>
           <a:ln>
             <a:noFill/>
@@ -14005,20 +14406,20 @@
       </p:sp>
       <p:sp>
         <p:nvSpPr>
-          <p:cNvPr id="18" name="Oval 17"/>
-          <p:cNvSpPr/>
-          <p:nvPr/>
-        </p:nvSpPr>
-        <p:spPr>
-          <a:xfrm>
-            <a:off x="731520" y="3227832"/>
-            <a:ext cx="365760" cy="365760"/>
+          <p:cNvPr id="19" name="Oval 18"/>
+          <p:cNvSpPr/>
+          <p:nvPr/>
+        </p:nvSpPr>
+        <p:spPr>
+          <a:xfrm>
+            <a:off x="685800" y="3497580"/>
+            <a:ext cx="320040" cy="320040"/>
           </a:xfrm>
           <a:prstGeom prst="ellipse">
             <a:avLst/>
           </a:prstGeom>
           <a:solidFill>
-            <a:srgbClr val="EF4444"/>
+            <a:srgbClr val="F43F5E"/>
           </a:solidFill>
           <a:ln>
             <a:noFill/>
@@ -14048,14 +14449,14 @@
       </p:sp>
       <p:sp>
         <p:nvSpPr>
-          <p:cNvPr id="19" name="TextBox 18"/>
+          <p:cNvPr id="20" name="TextBox 19"/>
           <p:cNvSpPr txBox="1"/>
           <p:nvPr/>
         </p:nvSpPr>
         <p:spPr>
           <a:xfrm>
-            <a:off x="731520" y="3227832"/>
-            <a:ext cx="365760" cy="365760"/>
+            <a:off x="685800" y="3497580"/>
+            <a:ext cx="320040" cy="320040"/>
           </a:xfrm>
           <a:prstGeom prst="rect">
             <a:avLst/>
@@ -14069,9 +14470,9 @@
           <a:lstStyle/>
           <a:p>
             <a:pPr algn="ctr">
-              <a:defRPr sz="1100" b="1">
+              <a:defRPr sz="1000" b="1">
                 <a:solidFill>
-                  <a:srgbClr val="FFFFFF"/>
+                  <a:srgbClr val="F0F4FC"/>
                 </a:solidFill>
                 <a:latin typeface="Microsoft YaHei"/>
               </a:defRPr>
@@ -14084,14 +14485,14 @@
       </p:sp>
       <p:sp>
         <p:nvSpPr>
-          <p:cNvPr id="20" name="TextBox 19"/>
+          <p:cNvPr id="21" name="TextBox 20"/>
           <p:cNvSpPr txBox="1"/>
           <p:nvPr/>
         </p:nvSpPr>
         <p:spPr>
           <a:xfrm>
-            <a:off x="1280160" y="3154680"/>
-            <a:ext cx="10058400" cy="548640"/>
+            <a:off x="1188720" y="3474720"/>
+            <a:ext cx="10058400" cy="365760"/>
           </a:xfrm>
           <a:prstGeom prst="rect">
             <a:avLst/>
@@ -14105,9 +14506,9 @@
           <a:lstStyle/>
           <a:p>
             <a:pPr algn="l">
-              <a:defRPr sz="1500" b="0">
+              <a:defRPr sz="1400" b="0">
                 <a:solidFill>
-                  <a:srgbClr val="CBD5E8"/>
+                  <a:srgbClr val="A0AEC4"/>
                 </a:solidFill>
                 <a:latin typeface="Microsoft YaHei"/>
               </a:defRPr>
@@ -14120,20 +14521,20 @@
       </p:sp>
       <p:sp>
         <p:nvSpPr>
-          <p:cNvPr id="21" name="Rounded Rectangle 20"/>
-          <p:cNvSpPr/>
-          <p:nvPr/>
-        </p:nvSpPr>
-        <p:spPr>
-          <a:xfrm>
-            <a:off x="457200" y="3931919"/>
-            <a:ext cx="11247120" cy="731520"/>
+          <p:cNvPr id="22" name="Rounded Rectangle 21"/>
+          <p:cNvSpPr/>
+          <p:nvPr/>
+        </p:nvSpPr>
+        <p:spPr>
+          <a:xfrm>
+            <a:off x="457200" y="4331970"/>
+            <a:ext cx="11247120" cy="685800"/>
           </a:xfrm>
           <a:prstGeom prst="roundRect">
             <a:avLst/>
           </a:prstGeom>
           <a:solidFill>
-            <a:srgbClr val="141E33"/>
+            <a:srgbClr val="161F35"/>
           </a:solidFill>
           <a:ln>
             <a:noFill/>
@@ -14163,20 +14564,20 @@
       </p:sp>
       <p:sp>
         <p:nvSpPr>
-          <p:cNvPr id="22" name="Rectangle 21"/>
-          <p:cNvSpPr/>
-          <p:nvPr/>
-        </p:nvSpPr>
-        <p:spPr>
-          <a:xfrm>
-            <a:off x="457200" y="3931919"/>
-            <a:ext cx="73152" cy="731520"/>
-          </a:xfrm>
-          <a:prstGeom prst="rect">
-            <a:avLst/>
-          </a:prstGeom>
-          <a:solidFill>
-            <a:srgbClr val="EF4444"/>
+          <p:cNvPr id="23" name="Rectangle 22"/>
+          <p:cNvSpPr/>
+          <p:nvPr/>
+        </p:nvSpPr>
+        <p:spPr>
+          <a:xfrm>
+            <a:off x="457200" y="4331970"/>
+            <a:ext cx="54864" cy="685800"/>
+          </a:xfrm>
+          <a:prstGeom prst="rect">
+            <a:avLst/>
+          </a:prstGeom>
+          <a:solidFill>
+            <a:srgbClr val="F43F5E"/>
           </a:solidFill>
           <a:ln>
             <a:noFill/>
@@ -14206,20 +14607,20 @@
       </p:sp>
       <p:sp>
         <p:nvSpPr>
-          <p:cNvPr id="23" name="Oval 22"/>
-          <p:cNvSpPr/>
-          <p:nvPr/>
-        </p:nvSpPr>
-        <p:spPr>
-          <a:xfrm>
-            <a:off x="731520" y="4096511"/>
-            <a:ext cx="365760" cy="365760"/>
+          <p:cNvPr id="24" name="Oval 23"/>
+          <p:cNvSpPr/>
+          <p:nvPr/>
+        </p:nvSpPr>
+        <p:spPr>
+          <a:xfrm>
+            <a:off x="685800" y="4514850"/>
+            <a:ext cx="320040" cy="320040"/>
           </a:xfrm>
           <a:prstGeom prst="ellipse">
             <a:avLst/>
           </a:prstGeom>
           <a:solidFill>
-            <a:srgbClr val="EF4444"/>
+            <a:srgbClr val="F43F5E"/>
           </a:solidFill>
           <a:ln>
             <a:noFill/>
@@ -14249,14 +14650,14 @@
       </p:sp>
       <p:sp>
         <p:nvSpPr>
-          <p:cNvPr id="24" name="TextBox 23"/>
+          <p:cNvPr id="25" name="TextBox 24"/>
           <p:cNvSpPr txBox="1"/>
           <p:nvPr/>
         </p:nvSpPr>
         <p:spPr>
           <a:xfrm>
-            <a:off x="731520" y="4096511"/>
-            <a:ext cx="365760" cy="365760"/>
+            <a:off x="685800" y="4514850"/>
+            <a:ext cx="320040" cy="320040"/>
           </a:xfrm>
           <a:prstGeom prst="rect">
             <a:avLst/>
@@ -14270,9 +14671,9 @@
           <a:lstStyle/>
           <a:p>
             <a:pPr algn="ctr">
-              <a:defRPr sz="1100" b="1">
+              <a:defRPr sz="1000" b="1">
                 <a:solidFill>
-                  <a:srgbClr val="FFFFFF"/>
+                  <a:srgbClr val="F0F4FC"/>
                 </a:solidFill>
                 <a:latin typeface="Microsoft YaHei"/>
               </a:defRPr>
@@ -14285,14 +14686,14 @@
       </p:sp>
       <p:sp>
         <p:nvSpPr>
-          <p:cNvPr id="25" name="TextBox 24"/>
+          <p:cNvPr id="26" name="TextBox 25"/>
           <p:cNvSpPr txBox="1"/>
           <p:nvPr/>
         </p:nvSpPr>
         <p:spPr>
           <a:xfrm>
-            <a:off x="1280160" y="4023359"/>
-            <a:ext cx="10058400" cy="548640"/>
+            <a:off x="1188720" y="4491990"/>
+            <a:ext cx="10058400" cy="365760"/>
           </a:xfrm>
           <a:prstGeom prst="rect">
             <a:avLst/>
@@ -14306,9 +14707,9 @@
           <a:lstStyle/>
           <a:p>
             <a:pPr algn="l">
-              <a:defRPr sz="1500" b="0">
+              <a:defRPr sz="1400" b="0">
                 <a:solidFill>
-                  <a:srgbClr val="CBD5E8"/>
+                  <a:srgbClr val="A0AEC4"/>
                 </a:solidFill>
                 <a:latin typeface="Microsoft YaHei"/>
               </a:defRPr>
@@ -14321,20 +14722,20 @@
       </p:sp>
       <p:sp>
         <p:nvSpPr>
-          <p:cNvPr id="26" name="Rounded Rectangle 25"/>
-          <p:cNvSpPr/>
-          <p:nvPr/>
-        </p:nvSpPr>
-        <p:spPr>
-          <a:xfrm>
-            <a:off x="457200" y="4800600"/>
-            <a:ext cx="11247120" cy="731520"/>
+          <p:cNvPr id="27" name="Rounded Rectangle 26"/>
+          <p:cNvSpPr/>
+          <p:nvPr/>
+        </p:nvSpPr>
+        <p:spPr>
+          <a:xfrm>
+            <a:off x="457200" y="5349240"/>
+            <a:ext cx="11247120" cy="685800"/>
           </a:xfrm>
           <a:prstGeom prst="roundRect">
             <a:avLst/>
           </a:prstGeom>
           <a:solidFill>
-            <a:srgbClr val="141E33"/>
+            <a:srgbClr val="161F35"/>
           </a:solidFill>
           <a:ln>
             <a:noFill/>
@@ -14364,20 +14765,20 @@
       </p:sp>
       <p:sp>
         <p:nvSpPr>
-          <p:cNvPr id="27" name="Rectangle 26"/>
-          <p:cNvSpPr/>
-          <p:nvPr/>
-        </p:nvSpPr>
-        <p:spPr>
-          <a:xfrm>
-            <a:off x="457200" y="4800600"/>
-            <a:ext cx="73152" cy="731520"/>
-          </a:xfrm>
-          <a:prstGeom prst="rect">
-            <a:avLst/>
-          </a:prstGeom>
-          <a:solidFill>
-            <a:srgbClr val="EF4444"/>
+          <p:cNvPr id="28" name="Rectangle 27"/>
+          <p:cNvSpPr/>
+          <p:nvPr/>
+        </p:nvSpPr>
+        <p:spPr>
+          <a:xfrm>
+            <a:off x="457200" y="5349240"/>
+            <a:ext cx="54864" cy="685800"/>
+          </a:xfrm>
+          <a:prstGeom prst="rect">
+            <a:avLst/>
+          </a:prstGeom>
+          <a:solidFill>
+            <a:srgbClr val="F43F5E"/>
           </a:solidFill>
           <a:ln>
             <a:noFill/>
@@ -14407,20 +14808,20 @@
       </p:sp>
       <p:sp>
         <p:nvSpPr>
-          <p:cNvPr id="28" name="Oval 27"/>
-          <p:cNvSpPr/>
-          <p:nvPr/>
-        </p:nvSpPr>
-        <p:spPr>
-          <a:xfrm>
-            <a:off x="731520" y="4965192"/>
-            <a:ext cx="365760" cy="365760"/>
+          <p:cNvPr id="29" name="Oval 28"/>
+          <p:cNvSpPr/>
+          <p:nvPr/>
+        </p:nvSpPr>
+        <p:spPr>
+          <a:xfrm>
+            <a:off x="685800" y="5532120"/>
+            <a:ext cx="320040" cy="320040"/>
           </a:xfrm>
           <a:prstGeom prst="ellipse">
             <a:avLst/>
           </a:prstGeom>
           <a:solidFill>
-            <a:srgbClr val="EF4444"/>
+            <a:srgbClr val="F43F5E"/>
           </a:solidFill>
           <a:ln>
             <a:noFill/>
@@ -14450,14 +14851,14 @@
       </p:sp>
       <p:sp>
         <p:nvSpPr>
-          <p:cNvPr id="29" name="TextBox 28"/>
+          <p:cNvPr id="30" name="TextBox 29"/>
           <p:cNvSpPr txBox="1"/>
           <p:nvPr/>
         </p:nvSpPr>
         <p:spPr>
           <a:xfrm>
-            <a:off x="731520" y="4965192"/>
-            <a:ext cx="365760" cy="365760"/>
+            <a:off x="685800" y="5532120"/>
+            <a:ext cx="320040" cy="320040"/>
           </a:xfrm>
           <a:prstGeom prst="rect">
             <a:avLst/>
@@ -14471,9 +14872,9 @@
           <a:lstStyle/>
           <a:p>
             <a:pPr algn="ctr">
-              <a:defRPr sz="1100" b="1">
+              <a:defRPr sz="1000" b="1">
                 <a:solidFill>
-                  <a:srgbClr val="FFFFFF"/>
+                  <a:srgbClr val="F0F4FC"/>
                 </a:solidFill>
                 <a:latin typeface="Microsoft YaHei"/>
               </a:defRPr>
@@ -14486,14 +14887,14 @@
       </p:sp>
       <p:sp>
         <p:nvSpPr>
-          <p:cNvPr id="30" name="TextBox 29"/>
+          <p:cNvPr id="31" name="TextBox 30"/>
           <p:cNvSpPr txBox="1"/>
           <p:nvPr/>
         </p:nvSpPr>
         <p:spPr>
           <a:xfrm>
-            <a:off x="1280160" y="4892040"/>
-            <a:ext cx="10058400" cy="548640"/>
+            <a:off x="1188720" y="5509260"/>
+            <a:ext cx="10058400" cy="365760"/>
           </a:xfrm>
           <a:prstGeom prst="rect">
             <a:avLst/>
@@ -14507,9 +14908,9 @@
           <a:lstStyle/>
           <a:p>
             <a:pPr algn="l">
-              <a:defRPr sz="1500" b="0">
+              <a:defRPr sz="1400" b="0">
                 <a:solidFill>
-                  <a:srgbClr val="CBD5E8"/>
+                  <a:srgbClr val="A0AEC4"/>
                 </a:solidFill>
                 <a:latin typeface="Microsoft YaHei"/>
               </a:defRPr>
@@ -14522,20 +14923,20 @@
       </p:sp>
       <p:sp>
         <p:nvSpPr>
-          <p:cNvPr id="31" name="Rectangle 30"/>
+          <p:cNvPr id="32" name="Rectangle 31"/>
           <p:cNvSpPr/>
           <p:nvPr/>
         </p:nvSpPr>
         <p:spPr>
           <a:xfrm>
             <a:off x="0" y="6446520"/>
-            <a:ext cx="12191695" cy="19050"/>
-          </a:xfrm>
-          <a:prstGeom prst="rect">
-            <a:avLst/>
-          </a:prstGeom>
-          <a:solidFill>
-            <a:srgbClr val="2D3B55"/>
+            <a:ext cx="12191695" cy="12700"/>
+          </a:xfrm>
+          <a:prstGeom prst="rect">
+            <a:avLst/>
+          </a:prstGeom>
+          <a:solidFill>
+            <a:srgbClr val="253350"/>
           </a:solidFill>
           <a:ln>
             <a:noFill/>
@@ -14565,14 +14966,14 @@
       </p:sp>
       <p:sp>
         <p:nvSpPr>
-          <p:cNvPr id="32" name="TextBox 31"/>
+          <p:cNvPr id="33" name="TextBox 32"/>
           <p:cNvSpPr txBox="1"/>
           <p:nvPr/>
         </p:nvSpPr>
         <p:spPr>
           <a:xfrm>
-            <a:off x="457200" y="6492240"/>
-            <a:ext cx="5486400" cy="274320"/>
+            <a:off x="731520" y="6492240"/>
+            <a:ext cx="4572000" cy="274320"/>
           </a:xfrm>
           <a:prstGeom prst="rect">
             <a:avLst/>
@@ -14588,20 +14989,20 @@
             <a:pPr algn="l">
               <a:defRPr sz="900" b="0">
                 <a:solidFill>
-                  <a:srgbClr val="6B7B9E"/>
+                  <a:srgbClr val="607090"/>
                 </a:solidFill>
                 <a:latin typeface="Microsoft YaHei"/>
               </a:defRPr>
             </a:pPr>
             <a:r>
-              <a:t>模块16：合规规范</a:t>
-            </a:r>
-          </a:p>
-        </p:txBody>
-      </p:sp>
-      <p:sp>
-        <p:nvSpPr>
-          <p:cNvPr id="33" name="TextBox 32"/>
+              <a:t>模块16 · 合规规范</a:t>
+            </a:r>
+          </a:p>
+        </p:txBody>
+      </p:sp>
+      <p:sp>
+        <p:nvSpPr>
+          <p:cNvPr id="34" name="TextBox 33"/>
           <p:cNvSpPr txBox="1"/>
           <p:nvPr/>
         </p:nvSpPr>
@@ -14624,7 +15025,7 @@
             <a:pPr algn="r">
               <a:defRPr sz="900" b="0">
                 <a:solidFill>
-                  <a:srgbClr val="6B7B9E"/>
+                  <a:srgbClr val="607090"/>
                 </a:solidFill>
                 <a:latin typeface="Microsoft YaHei"/>
               </a:defRPr>

--- a/AI漫剧制作课程/PPT课件/模块16-合规规范.pptx
+++ b/AI漫剧制作课程/PPT课件/模块16-合规规范.pptx
@@ -11246,7 +11246,7 @@
               </a:defRPr>
             </a:pPr>
             <a:r>
-              <a:t>🛠️  本模块实操任务</a:t>
+              <a:t>◆  本模块实操任务</a:t>
             </a:r>
           </a:p>
         </p:txBody>
@@ -15013,7 +15013,7 @@
               </a:defRPr>
             </a:pPr>
             <a:r>
-              <a:t>✓</a:t>
+              <a:t>◆</a:t>
             </a:r>
           </a:p>
         </p:txBody>
@@ -17130,7 +17130,7 @@
               </a:defRPr>
             </a:pPr>
             <a:r>
-              <a:t>📋  本节内容</a:t>
+              <a:t>§  本节内容</a:t>
             </a:r>
           </a:p>
         </p:txBody>
@@ -38466,7 +38466,7 @@
                         </a:defRPr>
                       </a:pPr>
                       <a:r>
-                        <a:t>❌ 不受保护</a:t>
+                        <a:t>◆ 不受保护</a:t>
                       </a:r>
                     </a:p>
                   </a:txBody>
@@ -38540,7 +38540,7 @@
                         </a:defRPr>
                       </a:pPr>
                       <a:r>
-                        <a:t>✅ 可获保护</a:t>
+                        <a:t>◆ 可获保护</a:t>
                       </a:r>
                     </a:p>
                   </a:txBody>
@@ -38614,7 +38614,7 @@
                         </a:defRPr>
                       </a:pPr>
                       <a:r>
-                        <a:t>⚠️ 视情况</a:t>
+                        <a:t>! 视情况</a:t>
                       </a:r>
                     </a:p>
                   </a:txBody>
